--- a/docs/content/t_tests/t_tests_lecture.pptx
+++ b/docs/content/t_tests/t_tests_lecture.pptx
@@ -51,6 +51,11 @@
     <p:sldId id="299" r:id="rId45"/>
     <p:sldId id="300" r:id="rId46"/>
     <p:sldId id="301" r:id="rId47"/>
+    <p:sldId id="302" r:id="rId48"/>
+    <p:sldId id="303" r:id="rId49"/>
+    <p:sldId id="304" r:id="rId50"/>
+    <p:sldId id="305" r:id="rId51"/>
+    <p:sldId id="306" r:id="rId52"/>
   </p:sldIdLst>
   <p:sldSz cx="9144000" cy="5143500" type="screen16x9"/>
   <p:notesSz cx="6858000" cy="9144000"/>
@@ -3426,7 +3431,7 @@
             </a:pPr>
             <a:r>
               <a:rPr/>
-              <a:t>The Same Two Plots, After Averaging</a:t>
+              <a:t>The Same Two Plots, After Averaging — Boxplot</a:t>
             </a:r>
           </a:p>
         </p:txBody>
@@ -3706,12 +3711,132 @@
       </p:pic>
       <p:sp>
         <p:nvSpPr>
-          <p:cNvPr id="4" name="Content Placeholder 3"/>
+          <p:cNvPr id="5" name="Text Placeholder 4"/>
           <p:cNvSpPr>
             <a:spLocks noGrp="1"/>
           </p:cNvSpPr>
           <p:nvPr>
-            <p:ph idx="2" sz="half"/>
+            <p:ph idx="3" sz="quarter" type="body"/>
+          </p:nvPr>
+        </p:nvSpPr>
+        <p:spPr/>
+        <p:txBody>
+          <a:bodyPr/>
+          <a:lstStyle/>
+          <a:p>
+            <a:pPr lvl="0" indent="0" marL="1270000">
+              <a:buNone/>
+            </a:pPr>
+            <a:r>
+              <a:rPr sz="2000" b="1"/>
+              <a:t>Important</a:t>
+            </a:r>
+          </a:p>
+          <a:p>
+            <a:pPr lvl="0" indent="0" marL="1270000">
+              <a:buNone/>
+            </a:pPr>
+            <a:r>
+              <a:rPr sz="2000" b="1"/>
+              <a:t>✅ Key idea · The means did not move. The error bars did.</a:t>
+            </a:r>
+          </a:p>
+          <a:p>
+            <a:pPr lvl="0" indent="0" marL="1270000">
+              <a:buNone/>
+            </a:pPr>
+            <a:r>
+              <a:rPr sz="2000"/>
+              <a:t>Averaging changed the </a:t>
+            </a:r>
+            <a:r>
+              <a:rPr sz="2000" b="1"/>
+              <a:t>means not at all</a:t>
+            </a:r>
+            <a:r>
+              <a:rPr sz="2000"/>
+              <a:t> and </a:t>
+            </a:r>
+            <a:r>
+              <a:rPr sz="2000" b="1"/>
+              <a:t>doubled the standard errors</a:t>
+            </a:r>
+            <a:r>
+              <a:rPr sz="2000"/>
+              <a:t>.</a:t>
+            </a:r>
+          </a:p>
+          <a:p>
+            <a:pPr lvl="0" indent="0" marL="1270000">
+              <a:buNone/>
+            </a:pPr>
+            <a:r>
+              <a:rPr sz="2000"/>
+              <a:t>That is the whole cost of pseudoreplication, in one table. The raw plot was not more precise — it was just wrong about how much we knew.</a:t>
+            </a:r>
+          </a:p>
+        </p:txBody>
+      </p:sp>
+    </p:spTree>
+  </p:cSld>
+</p:sld>
+</file>
+
+<file path=ppt/slides/slide11.xml><?xml version="1.0" encoding="utf-8"?>
+<p:sld xmlns:a="http://schemas.openxmlformats.org/drawingml/2006/main" xmlns:r="http://schemas.openxmlformats.org/officeDocument/2006/relationships" xmlns:p="http://schemas.openxmlformats.org/presentationml/2006/main">
+  <p:cSld>
+    <p:spTree>
+      <p:nvGrpSpPr>
+        <p:cNvPr id="1" name=""/>
+        <p:cNvGrpSpPr/>
+        <p:nvPr/>
+      </p:nvGrpSpPr>
+      <p:grpSpPr>
+        <a:xfrm>
+          <a:off x="0" y="0"/>
+          <a:ext cx="0" cy="0"/>
+          <a:chOff x="0" y="0"/>
+          <a:chExt cx="0" cy="0"/>
+        </a:xfrm>
+      </p:grpSpPr>
+      <p:sp>
+        <p:nvSpPr>
+          <p:cNvPr id="2" name="Title 1"/>
+          <p:cNvSpPr>
+            <a:spLocks noGrp="1"/>
+          </p:cNvSpPr>
+          <p:nvPr>
+            <p:ph type="title"/>
+          </p:nvPr>
+        </p:nvSpPr>
+        <p:spPr>
+          <a:xfrm>
+            <a:off x="139485" y="78119"/>
+            <a:ext cx="8229600" cy="607682"/>
+          </a:xfrm>
+        </p:spPr>
+        <p:txBody>
+          <a:bodyPr/>
+          <a:lstStyle/>
+          <a:p>
+            <a:pPr lvl="0" indent="0" marL="0">
+              <a:buNone/>
+            </a:pPr>
+            <a:r>
+              <a:rPr/>
+              <a:t>The Same Two Plots, After Averaging — Mean ± SE</a:t>
+            </a:r>
+          </a:p>
+        </p:txBody>
+      </p:sp>
+      <p:sp>
+        <p:nvSpPr>
+          <p:cNvPr id="3" name="Text Placeholder 2"/>
+          <p:cNvSpPr>
+            <a:spLocks noGrp="1"/>
+          </p:cNvSpPr>
+          <p:nvPr>
+            <p:ph idx="1" type="body"/>
           </p:nvPr>
         </p:nvSpPr>
         <p:spPr/>
@@ -4100,7 +4225,7 @@
           <p:nvPr/>
         </p:nvPicPr>
         <p:blipFill>
-          <a:blip r:embed="rId3"/>
+          <a:blip r:embed="rId2"/>
           <a:stretch>
             <a:fillRect/>
           </a:stretch>
@@ -4141,58 +4266,6 @@
             </a:pPr>
             <a:r>
               <a:rPr sz="2000" b="1"/>
-              <a:t>Important</a:t>
-            </a:r>
-          </a:p>
-          <a:p>
-            <a:pPr lvl="0" indent="0" marL="1270000">
-              <a:buNone/>
-            </a:pPr>
-            <a:r>
-              <a:rPr sz="2000" b="1"/>
-              <a:t>✅ Key idea · The means did not move. The error bars did.</a:t>
-            </a:r>
-          </a:p>
-          <a:p>
-            <a:pPr lvl="0" indent="0" marL="1270000">
-              <a:buNone/>
-            </a:pPr>
-            <a:r>
-              <a:rPr sz="2000"/>
-              <a:t>Averaging changed the </a:t>
-            </a:r>
-            <a:r>
-              <a:rPr sz="2000" b="1"/>
-              <a:t>means not at all</a:t>
-            </a:r>
-            <a:r>
-              <a:rPr sz="2000"/>
-              <a:t> and </a:t>
-            </a:r>
-            <a:r>
-              <a:rPr sz="2000" b="1"/>
-              <a:t>doubled the standard errors</a:t>
-            </a:r>
-            <a:r>
-              <a:rPr sz="2000"/>
-              <a:t>.</a:t>
-            </a:r>
-          </a:p>
-          <a:p>
-            <a:pPr lvl="0" indent="0" marL="1270000">
-              <a:buNone/>
-            </a:pPr>
-            <a:r>
-              <a:rPr sz="2000"/>
-              <a:t>That is the whole cost of pseudoreplication, in one table. The raw plot was not more precise — it was just wrong about how much we knew.</a:t>
-            </a:r>
-          </a:p>
-          <a:p>
-            <a:pPr lvl="0" indent="0" marL="1270000">
-              <a:buNone/>
-            </a:pPr>
-            <a:r>
-              <a:rPr sz="2000" b="1"/>
               <a:t>Tip</a:t>
             </a:r>
           </a:p>
@@ -4231,7 +4304,7 @@
 </p:sld>
 </file>
 
-<file path=ppt/slides/slide11.xml><?xml version="1.0" encoding="utf-8"?>
+<file path=ppt/slides/slide12.xml><?xml version="1.0" encoding="utf-8"?>
 <p:sld xmlns:a="http://schemas.openxmlformats.org/drawingml/2006/main" xmlns:r="http://schemas.openxmlformats.org/officeDocument/2006/relationships" xmlns:p="http://schemas.openxmlformats.org/presentationml/2006/main">
   <p:cSld>
     <p:spTree>
@@ -4630,58 +4703,6 @@
 </p:sld>
 </file>
 
-<file path=ppt/slides/slide12.xml><?xml version="1.0" encoding="utf-8"?>
-<p:sld xmlns:a="http://schemas.openxmlformats.org/drawingml/2006/main" xmlns:r="http://schemas.openxmlformats.org/officeDocument/2006/relationships" xmlns:p="http://schemas.openxmlformats.org/presentationml/2006/main">
-  <p:cSld>
-    <p:spTree>
-      <p:nvGrpSpPr>
-        <p:cNvPr id="1" name=""/>
-        <p:cNvGrpSpPr/>
-        <p:nvPr/>
-      </p:nvGrpSpPr>
-      <p:grpSpPr>
-        <a:xfrm>
-          <a:off x="0" y="0"/>
-          <a:ext cx="0" cy="0"/>
-          <a:chOff x="0" y="0"/>
-          <a:chExt cx="0" cy="0"/>
-        </a:xfrm>
-      </p:grpSpPr>
-      <p:sp>
-        <p:nvSpPr>
-          <p:cNvPr id="2" name="Title 1"/>
-          <p:cNvSpPr>
-            <a:spLocks noGrp="1"/>
-          </p:cNvSpPr>
-          <p:nvPr>
-            <p:ph type="title"/>
-          </p:nvPr>
-        </p:nvSpPr>
-        <p:spPr>
-          <a:xfrm>
-            <a:off x="0" y="0"/>
-            <a:ext cx="9144000" cy="582780"/>
-          </a:xfrm>
-        </p:spPr>
-        <p:txBody>
-          <a:bodyPr/>
-          <a:lstStyle/>
-          <a:p>
-            <a:pPr lvl="0" indent="0" marL="0">
-              <a:buNone/>
-            </a:pPr>
-            <a:r>
-              <a:rPr/>
-              <a:t>Part 2 · Hypothesis Testing Framework</a:t>
-            </a:r>
-          </a:p>
-        </p:txBody>
-      </p:sp>
-    </p:spTree>
-  </p:cSld>
-</p:sld>
-</file>
-
 <file path=ppt/slides/slide13.xml><?xml version="1.0" encoding="utf-8"?>
 <p:sld xmlns:a="http://schemas.openxmlformats.org/drawingml/2006/main" xmlns:r="http://schemas.openxmlformats.org/officeDocument/2006/relationships" xmlns:p="http://schemas.openxmlformats.org/presentationml/2006/main">
   <p:cSld>
@@ -4712,6 +4733,58 @@
         <p:spPr>
           <a:xfrm>
             <a:off x="0" y="0"/>
+            <a:ext cx="9144000" cy="582780"/>
+          </a:xfrm>
+        </p:spPr>
+        <p:txBody>
+          <a:bodyPr/>
+          <a:lstStyle/>
+          <a:p>
+            <a:pPr lvl="0" indent="0" marL="0">
+              <a:buNone/>
+            </a:pPr>
+            <a:r>
+              <a:rPr/>
+              <a:t>Part 2 · Hypothesis Testing Framework</a:t>
+            </a:r>
+          </a:p>
+        </p:txBody>
+      </p:sp>
+    </p:spTree>
+  </p:cSld>
+</p:sld>
+</file>
+
+<file path=ppt/slides/slide14.xml><?xml version="1.0" encoding="utf-8"?>
+<p:sld xmlns:a="http://schemas.openxmlformats.org/drawingml/2006/main" xmlns:r="http://schemas.openxmlformats.org/officeDocument/2006/relationships" xmlns:p="http://schemas.openxmlformats.org/presentationml/2006/main">
+  <p:cSld>
+    <p:spTree>
+      <p:nvGrpSpPr>
+        <p:cNvPr id="1" name=""/>
+        <p:cNvGrpSpPr/>
+        <p:nvPr/>
+      </p:nvGrpSpPr>
+      <p:grpSpPr>
+        <a:xfrm>
+          <a:off x="0" y="0"/>
+          <a:ext cx="0" cy="0"/>
+          <a:chOff x="0" y="0"/>
+          <a:chExt cx="0" cy="0"/>
+        </a:xfrm>
+      </p:grpSpPr>
+      <p:sp>
+        <p:nvSpPr>
+          <p:cNvPr id="2" name="Title 1"/>
+          <p:cNvSpPr>
+            <a:spLocks noGrp="1"/>
+          </p:cNvSpPr>
+          <p:nvPr>
+            <p:ph type="title"/>
+          </p:nvPr>
+        </p:nvSpPr>
+        <p:spPr>
+          <a:xfrm>
+            <a:off x="0" y="0"/>
             <a:ext cx="9144000" cy="602780"/>
           </a:xfrm>
           <a:solidFill>
@@ -5031,7 +5104,7 @@
 </p:sld>
 </file>
 
-<file path=ppt/slides/slide14.xml><?xml version="1.0" encoding="utf-8"?>
+<file path=ppt/slides/slide15.xml><?xml version="1.0" encoding="utf-8"?>
 <p:sld xmlns:a="http://schemas.openxmlformats.org/drawingml/2006/main" xmlns:r="http://schemas.openxmlformats.org/officeDocument/2006/relationships" xmlns:p="http://schemas.openxmlformats.org/presentationml/2006/main">
   <p:cSld>
     <p:spTree>
@@ -5401,7 +5474,7 @@
 </p:sld>
 </file>
 
-<file path=ppt/slides/slide15.xml><?xml version="1.0" encoding="utf-8"?>
+<file path=ppt/slides/slide16.xml><?xml version="1.0" encoding="utf-8"?>
 <p:sld xmlns:a="http://schemas.openxmlformats.org/drawingml/2006/main" xmlns:r="http://schemas.openxmlformats.org/officeDocument/2006/relationships" xmlns:p="http://schemas.openxmlformats.org/presentationml/2006/main">
   <p:cSld>
     <p:spTree>
@@ -5453,7 +5526,7 @@
 </p:sld>
 </file>
 
-<file path=ppt/slides/slide16.xml><?xml version="1.0" encoding="utf-8"?>
+<file path=ppt/slides/slide17.xml><?xml version="1.0" encoding="utf-8"?>
 <p:sld xmlns:a="http://schemas.openxmlformats.org/drawingml/2006/main" xmlns:r="http://schemas.openxmlformats.org/officeDocument/2006/relationships" xmlns:p="http://schemas.openxmlformats.org/presentationml/2006/main">
   <p:cSld>
     <p:spTree>
@@ -5715,7 +5788,7 @@
 </p:sld>
 </file>
 
-<file path=ppt/slides/slide17.xml><?xml version="1.0" encoding="utf-8"?>
+<file path=ppt/slides/slide18.xml><?xml version="1.0" encoding="utf-8"?>
 <p:sld xmlns:a="http://schemas.openxmlformats.org/drawingml/2006/main" xmlns:r="http://schemas.openxmlformats.org/officeDocument/2006/relationships" xmlns:p="http://schemas.openxmlformats.org/presentationml/2006/main">
   <p:cSld>
     <p:spTree>
@@ -6019,7 +6092,7 @@
 </p:sld>
 </file>
 
-<file path=ppt/slides/slide18.xml><?xml version="1.0" encoding="utf-8"?>
+<file path=ppt/slides/slide19.xml><?xml version="1.0" encoding="utf-8"?>
 <p:sld xmlns:a="http://schemas.openxmlformats.org/drawingml/2006/main" xmlns:r="http://schemas.openxmlformats.org/officeDocument/2006/relationships" xmlns:p="http://schemas.openxmlformats.org/presentationml/2006/main">
   <p:cSld>
     <p:spTree>
@@ -6585,7 +6658,309 @@
 </p:sld>
 </file>
 
-<file path=ppt/slides/slide19.xml><?xml version="1.0" encoding="utf-8"?>
+<file path=ppt/slides/slide2.xml><?xml version="1.0" encoding="utf-8"?>
+<p:sld xmlns:a="http://schemas.openxmlformats.org/drawingml/2006/main" xmlns:r="http://schemas.openxmlformats.org/officeDocument/2006/relationships" xmlns:p="http://schemas.openxmlformats.org/presentationml/2006/main">
+  <p:cSld>
+    <p:spTree>
+      <p:nvGrpSpPr>
+        <p:cNvPr id="1" name=""/>
+        <p:cNvGrpSpPr/>
+        <p:nvPr/>
+      </p:nvGrpSpPr>
+      <p:grpSpPr>
+        <a:xfrm>
+          <a:off x="0" y="0"/>
+          <a:ext cx="0" cy="0"/>
+          <a:chOff x="0" y="0"/>
+          <a:chExt cx="0" cy="0"/>
+        </a:xfrm>
+      </p:grpSpPr>
+      <p:sp>
+        <p:nvSpPr>
+          <p:cNvPr id="2" name="Title 1"/>
+          <p:cNvSpPr>
+            <a:spLocks noGrp="1"/>
+          </p:cNvSpPr>
+          <p:nvPr>
+            <p:ph type="title"/>
+          </p:nvPr>
+        </p:nvSpPr>
+        <p:spPr>
+          <a:xfrm>
+            <a:off x="0" y="0"/>
+            <a:ext cx="9144000" cy="602780"/>
+          </a:xfrm>
+          <a:solidFill>
+            <a:srgbClr val="70121D"/>
+          </a:solidFill>
+        </p:spPr>
+        <p:txBody>
+          <a:bodyPr/>
+          <a:lstStyle/>
+          <a:p>
+            <a:pPr lvl="0" indent="0" marL="0">
+              <a:buNone/>
+            </a:pPr>
+            <a:r>
+              <a:rPr/>
+              <a:t>Where We Left Off</a:t>
+            </a:r>
+          </a:p>
+        </p:txBody>
+      </p:sp>
+      <p:sp>
+        <p:nvSpPr>
+          <p:cNvPr id="3" name="Content Placeholder 2"/>
+          <p:cNvSpPr>
+            <a:spLocks noGrp="1"/>
+          </p:cNvSpPr>
+          <p:nvPr>
+            <p:ph idx="1" sz="half"/>
+          </p:nvPr>
+        </p:nvSpPr>
+        <p:spPr/>
+        <p:txBody>
+          <a:bodyPr/>
+          <a:lstStyle/>
+          <a:p>
+            <a:pPr lvl="0" indent="0" marL="0">
+              <a:buNone/>
+            </a:pPr>
+            <a:r>
+              <a:rPr/>
+              <a:t>Last time:</a:t>
+            </a:r>
+          </a:p>
+          <a:p>
+            <a:pPr lvl="0"/>
+            <a:r>
+              <a:rPr/>
+              <a:t>Histograms / frequency distributions</a:t>
+            </a:r>
+          </a:p>
+          <a:p>
+            <a:pPr lvl="0"/>
+            <a:r>
+              <a:rPr/>
+              <a:t>Probability distribution functions (PDFs)</a:t>
+            </a:r>
+          </a:p>
+          <a:p>
+            <a:pPr lvl="0"/>
+            <a:r>
+              <a:rPr/>
+              <a:t>Z-scores and t-scores</a:t>
+            </a:r>
+          </a:p>
+          <a:p>
+            <a:pPr lvl="0"/>
+            <a:r>
+              <a:rPr/>
+              <a:t>Tests of means using t-tests: one sample, two sample</a:t>
+            </a:r>
+          </a:p>
+          <a:p>
+            <a:pPr lvl="0" indent="0" marL="1270000">
+              <a:buNone/>
+            </a:pPr>
+            <a:r>
+              <a:rPr sz="2000" b="1"/>
+              <a:t>Note</a:t>
+            </a:r>
+          </a:p>
+          <a:p>
+            <a:pPr lvl="0" indent="0" marL="1270000">
+              <a:buNone/>
+            </a:pPr>
+            <a:r>
+              <a:rPr sz="2000" b="1"/>
+              <a:t>✅ Key idea from last lecture</a:t>
+            </a:r>
+          </a:p>
+          <a:p>
+            <a:pPr lvl="0" indent="0" marL="1270000">
+              <a:buNone/>
+            </a:pPr>
+            <a:r>
+              <a:rPr sz="2000"/>
+              <a:t>A t-score is just a z-score computed with the </a:t>
+            </a:r>
+            <a:r>
+              <a:rPr sz="2000" i="1"/>
+              <a:t>sample</a:t>
+            </a:r>
+            <a:r>
+              <a:rPr sz="2000"/>
+              <a:t> standard deviation instead of the population standard deviation</a:t>
+            </a:r>
+            <a:br/>
+            <a:r>
+              <a:rPr sz="2000"/>
+              <a:t>— that substitution is why we need the t-distribution at all. Today we put it to work.</a:t>
+            </a:r>
+          </a:p>
+        </p:txBody>
+      </p:sp>
+      <p:pic>
+        <p:nvPicPr>
+          <p:cNvPr descr="images/clipboard-536528302.png" id="0" name="Picture 1"/>
+          <p:cNvPicPr>
+            <a:picLocks noGrp="1" noChangeAspect="1"/>
+          </p:cNvPicPr>
+          <p:nvPr/>
+        </p:nvPicPr>
+        <p:blipFill>
+          <a:blip r:embed="rId2"/>
+          <a:stretch>
+            <a:fillRect/>
+          </a:stretch>
+        </p:blipFill>
+        <p:spPr bwMode="auto">
+          <a:xfrm>
+            <a:off x="6134100" y="660400"/>
+            <a:ext cx="2743200" cy="3962400"/>
+          </a:xfrm>
+          <a:prstGeom prst="rect">
+            <a:avLst/>
+          </a:prstGeom>
+          <a:noFill/>
+          <a:ln w="9525">
+            <a:noFill/>
+            <a:headEnd/>
+            <a:tailEnd/>
+          </a:ln>
+        </p:spPr>
+      </p:pic>
+      <p:sp>
+        <p:nvSpPr>
+          <p:cNvPr id="1" name="TextBox 3"/>
+          <p:cNvSpPr txBox="1"/>
+          <p:nvPr>
+            <p:ph idx="1"/>
+          </p:nvPr>
+        </p:nvSpPr>
+        <p:spPr>
+          <a:xfrm>
+            <a:off x="6121400" y="4622800"/>
+            <a:ext cx="2781300" cy="508000"/>
+          </a:xfrm>
+          <a:prstGeom prst="rect">
+            <a:avLst/>
+          </a:prstGeom>
+          <a:noFill/>
+        </p:spPr>
+        <p:txBody>
+          <a:bodyPr/>
+          <a:lstStyle/>
+          <a:p>
+            <a:pPr lvl="0" indent="0" marL="0" algn="ctr">
+              <a:buNone/>
+            </a:pPr>
+            <a:r>
+              <a:rPr/>
+              <a:t>Diagram of a large circle labeled ‘population’ with dots representing individuals and Greek-letter parameters (mu, sigma, sigma-squared), with orange arrows showing a subset of dots being drawn down into a small circle labeled ‘sample’ with its statistics (y-bar, s, s-squared), illustrating that a sample is used to estimate unknown population parameters.</a:t>
+            </a:r>
+          </a:p>
+        </p:txBody>
+      </p:sp>
+      <p:sp>
+        <p:nvSpPr>
+          <p:cNvPr id="4" name="Content Placeholder 3"/>
+          <p:cNvSpPr>
+            <a:spLocks noGrp="1"/>
+          </p:cNvSpPr>
+          <p:nvPr>
+            <p:ph idx="2" sz="half"/>
+          </p:nvPr>
+        </p:nvSpPr>
+        <p:spPr/>
+        <p:txBody>
+          <a:bodyPr/>
+          <a:lstStyle/>
+          <a:p>
+            <a:pPr lvl="0" indent="0" marL="1270000">
+              <a:buNone/>
+            </a:pPr>
+            <a:r>
+              <a:rPr sz="2000" b="1"/>
+              <a:t>Note</a:t>
+            </a:r>
+          </a:p>
+          <a:p>
+            <a:pPr lvl="0" indent="0" marL="1270000">
+              <a:buNone/>
+            </a:pPr>
+            <a:r>
+              <a:rPr sz="2000" b="1"/>
+              <a:t>Today’s roadmap</a:t>
+            </a:r>
+          </a:p>
+          <a:p>
+            <a:pPr lvl="0" indent="-342900" marL="342900">
+              <a:buAutoNum type="arabicPeriod"/>
+            </a:pPr>
+            <a:r>
+              <a:rPr sz="2000"/>
+              <a:t>Hypothesis testing framework</a:t>
+            </a:r>
+          </a:p>
+          <a:p>
+            <a:pPr lvl="0" indent="-342900" marL="342900">
+              <a:buAutoNum type="arabicPeriod"/>
+            </a:pPr>
+            <a:r>
+              <a:rPr sz="2000"/>
+              <a:t>The t-distribution and </a:t>
+            </a:r>
+            <a:r>
+              <a:rPr sz="2000" b="1"/>
+              <a:t>degrees of freedom</a:t>
+            </a:r>
+          </a:p>
+          <a:p>
+            <a:pPr lvl="0" indent="-342900" marL="342900">
+              <a:buAutoNum type="arabicPeriod"/>
+            </a:pPr>
+            <a:r>
+              <a:rPr sz="2000"/>
+              <a:t>One-sample t-test — two-tailed and one-tailed</a:t>
+            </a:r>
+          </a:p>
+          <a:p>
+            <a:pPr lvl="0" indent="-342900" marL="342900">
+              <a:buAutoNum type="arabicPeriod"/>
+            </a:pPr>
+            <a:r>
+              <a:rPr sz="2000"/>
+              <a:t>Two-sample t-test (Student’s and Welch’s)</a:t>
+            </a:r>
+          </a:p>
+          <a:p>
+            <a:pPr lvl="0" indent="-342900" marL="342900">
+              <a:buAutoNum type="arabicPeriod"/>
+            </a:pPr>
+            <a:r>
+              <a:rPr sz="2000"/>
+              <a:t>Paired t-test</a:t>
+            </a:r>
+          </a:p>
+          <a:p>
+            <a:pPr lvl="0" indent="-342900" marL="342900">
+              <a:buAutoNum type="arabicPeriod"/>
+            </a:pPr>
+            <a:r>
+              <a:rPr sz="2000"/>
+              <a:t>Checking assumptions throughout</a:t>
+            </a:r>
+          </a:p>
+        </p:txBody>
+      </p:sp>
+    </p:spTree>
+  </p:cSld>
+</p:sld>
+</file>
+
+<file path=ppt/slides/slide20.xml><?xml version="1.0" encoding="utf-8"?>
 <p:sld xmlns:a="http://schemas.openxmlformats.org/drawingml/2006/main" xmlns:r="http://schemas.openxmlformats.org/officeDocument/2006/relationships" xmlns:p="http://schemas.openxmlformats.org/presentationml/2006/main">
   <p:cSld>
     <p:spTree>
@@ -7428,485 +7803,6 @@
 </p:sld>
 </file>
 
-<file path=ppt/slides/slide2.xml><?xml version="1.0" encoding="utf-8"?>
-<p:sld xmlns:a="http://schemas.openxmlformats.org/drawingml/2006/main" xmlns:r="http://schemas.openxmlformats.org/officeDocument/2006/relationships" xmlns:p="http://schemas.openxmlformats.org/presentationml/2006/main">
-  <p:cSld>
-    <p:spTree>
-      <p:nvGrpSpPr>
-        <p:cNvPr id="1" name=""/>
-        <p:cNvGrpSpPr/>
-        <p:nvPr/>
-      </p:nvGrpSpPr>
-      <p:grpSpPr>
-        <a:xfrm>
-          <a:off x="0" y="0"/>
-          <a:ext cx="0" cy="0"/>
-          <a:chOff x="0" y="0"/>
-          <a:chExt cx="0" cy="0"/>
-        </a:xfrm>
-      </p:grpSpPr>
-      <p:sp>
-        <p:nvSpPr>
-          <p:cNvPr id="2" name="Title 1"/>
-          <p:cNvSpPr>
-            <a:spLocks noGrp="1"/>
-          </p:cNvSpPr>
-          <p:nvPr>
-            <p:ph type="title"/>
-          </p:nvPr>
-        </p:nvSpPr>
-        <p:spPr>
-          <a:xfrm>
-            <a:off x="0" y="0"/>
-            <a:ext cx="9144000" cy="602780"/>
-          </a:xfrm>
-          <a:solidFill>
-            <a:srgbClr val="70121D"/>
-          </a:solidFill>
-        </p:spPr>
-        <p:txBody>
-          <a:bodyPr/>
-          <a:lstStyle/>
-          <a:p>
-            <a:pPr lvl="0" indent="0" marL="0">
-              <a:buNone/>
-            </a:pPr>
-            <a:r>
-              <a:rPr/>
-              <a:t>Where We Left Off</a:t>
-            </a:r>
-          </a:p>
-        </p:txBody>
-      </p:sp>
-      <p:sp>
-        <p:nvSpPr>
-          <p:cNvPr id="3" name="Content Placeholder 2"/>
-          <p:cNvSpPr>
-            <a:spLocks noGrp="1"/>
-          </p:cNvSpPr>
-          <p:nvPr>
-            <p:ph idx="1" sz="half"/>
-          </p:nvPr>
-        </p:nvSpPr>
-        <p:spPr/>
-        <p:txBody>
-          <a:bodyPr/>
-          <a:lstStyle/>
-          <a:p>
-            <a:pPr lvl="0" indent="0" marL="0">
-              <a:buNone/>
-            </a:pPr>
-            <a:r>
-              <a:rPr/>
-              <a:t>Last time:</a:t>
-            </a:r>
-          </a:p>
-          <a:p>
-            <a:pPr lvl="0"/>
-            <a:r>
-              <a:rPr/>
-              <a:t>Histograms / frequency distributions</a:t>
-            </a:r>
-          </a:p>
-          <a:p>
-            <a:pPr lvl="0"/>
-            <a:r>
-              <a:rPr/>
-              <a:t>Probability distribution functions (PDFs)</a:t>
-            </a:r>
-          </a:p>
-          <a:p>
-            <a:pPr lvl="0"/>
-            <a:r>
-              <a:rPr/>
-              <a:t>Z-scores and t-scores</a:t>
-            </a:r>
-          </a:p>
-          <a:p>
-            <a:pPr lvl="0"/>
-            <a:r>
-              <a:rPr/>
-              <a:t>Tests of means using t-tests: one sample, two sample</a:t>
-            </a:r>
-          </a:p>
-          <a:p>
-            <a:pPr lvl="0" indent="0" marL="1270000">
-              <a:buNone/>
-            </a:pPr>
-            <a:r>
-              <a:rPr sz="2000" b="1"/>
-              <a:t>Note</a:t>
-            </a:r>
-          </a:p>
-          <a:p>
-            <a:pPr lvl="0" indent="0" marL="1270000">
-              <a:buNone/>
-            </a:pPr>
-            <a:r>
-              <a:rPr sz="2000" b="1"/>
-              <a:t>✅ Key idea from last lecture</a:t>
-            </a:r>
-          </a:p>
-          <a:p>
-            <a:pPr lvl="0" indent="0" marL="1270000">
-              <a:buNone/>
-            </a:pPr>
-            <a:r>
-              <a:rPr sz="2000"/>
-              <a:t>A t-score is just a z-score computed with the </a:t>
-            </a:r>
-            <a:r>
-              <a:rPr sz="2000" i="1"/>
-              <a:t>sample</a:t>
-            </a:r>
-            <a:r>
-              <a:rPr sz="2000"/>
-              <a:t> standard deviation instead of the population standard deviation</a:t>
-            </a:r>
-            <a:br/>
-            <a:r>
-              <a:rPr sz="2000"/>
-              <a:t>— that substitution is why we need the t-distribution at all. Today we put it to work.</a:t>
-            </a:r>
-          </a:p>
-        </p:txBody>
-      </p:sp>
-      <p:pic>
-        <p:nvPicPr>
-          <p:cNvPr descr="images/clipboard-536528302.png" id="0" name="Picture 1"/>
-          <p:cNvPicPr>
-            <a:picLocks noGrp="1" noChangeAspect="1"/>
-          </p:cNvPicPr>
-          <p:nvPr/>
-        </p:nvPicPr>
-        <p:blipFill>
-          <a:blip r:embed="rId2"/>
-          <a:stretch>
-            <a:fillRect/>
-          </a:stretch>
-        </p:blipFill>
-        <p:spPr bwMode="auto">
-          <a:xfrm>
-            <a:off x="6134100" y="660400"/>
-            <a:ext cx="2743200" cy="3962400"/>
-          </a:xfrm>
-          <a:prstGeom prst="rect">
-            <a:avLst/>
-          </a:prstGeom>
-          <a:noFill/>
-          <a:ln w="9525">
-            <a:noFill/>
-            <a:headEnd/>
-            <a:tailEnd/>
-          </a:ln>
-        </p:spPr>
-      </p:pic>
-      <p:sp>
-        <p:nvSpPr>
-          <p:cNvPr id="1" name="TextBox 3"/>
-          <p:cNvSpPr txBox="1"/>
-          <p:nvPr>
-            <p:ph idx="1"/>
-          </p:nvPr>
-        </p:nvSpPr>
-        <p:spPr>
-          <a:xfrm>
-            <a:off x="6121400" y="4622800"/>
-            <a:ext cx="2781300" cy="508000"/>
-          </a:xfrm>
-          <a:prstGeom prst="rect">
-            <a:avLst/>
-          </a:prstGeom>
-          <a:noFill/>
-        </p:spPr>
-        <p:txBody>
-          <a:bodyPr/>
-          <a:lstStyle/>
-          <a:p>
-            <a:pPr lvl="0" indent="0" marL="0" algn="ctr">
-              <a:buNone/>
-            </a:pPr>
-            <a:r>
-              <a:rPr/>
-              <a:t>Diagram of a large circle labeled ‘population’ with dots representing individuals and Greek-letter parameters (mu, sigma, sigma-squared), with orange arrows showing a subset of dots being drawn down into a small circle labeled ‘sample’ with its statistics (y-bar, s, s-squared), illustrating that a sample is used to estimate unknown population parameters.</a:t>
-            </a:r>
-          </a:p>
-        </p:txBody>
-      </p:sp>
-      <p:sp>
-        <p:nvSpPr>
-          <p:cNvPr id="4" name="Content Placeholder 3"/>
-          <p:cNvSpPr>
-            <a:spLocks noGrp="1"/>
-          </p:cNvSpPr>
-          <p:nvPr>
-            <p:ph idx="2" sz="half"/>
-          </p:nvPr>
-        </p:nvSpPr>
-        <p:spPr/>
-        <p:txBody>
-          <a:bodyPr/>
-          <a:lstStyle/>
-          <a:p>
-            <a:pPr lvl="0" indent="0" marL="1270000">
-              <a:buNone/>
-            </a:pPr>
-            <a:r>
-              <a:rPr sz="2000" b="1"/>
-              <a:t>Note</a:t>
-            </a:r>
-          </a:p>
-          <a:p>
-            <a:pPr lvl="0" indent="0" marL="1270000">
-              <a:buNone/>
-            </a:pPr>
-            <a:r>
-              <a:rPr sz="2000" b="1"/>
-              <a:t>Today’s roadmap</a:t>
-            </a:r>
-          </a:p>
-          <a:p>
-            <a:pPr lvl="0" indent="-342900" marL="342900">
-              <a:buAutoNum type="arabicPeriod"/>
-            </a:pPr>
-            <a:r>
-              <a:rPr sz="2000"/>
-              <a:t>Hypothesis testing framework</a:t>
-            </a:r>
-          </a:p>
-          <a:p>
-            <a:pPr lvl="0" indent="-342900" marL="342900">
-              <a:buAutoNum type="arabicPeriod"/>
-            </a:pPr>
-            <a:r>
-              <a:rPr sz="2000"/>
-              <a:t>The t-distribution and </a:t>
-            </a:r>
-            <a:r>
-              <a:rPr sz="2000" b="1"/>
-              <a:t>degrees of freedom</a:t>
-            </a:r>
-          </a:p>
-          <a:p>
-            <a:pPr lvl="0" indent="-342900" marL="342900">
-              <a:buAutoNum type="arabicPeriod"/>
-            </a:pPr>
-            <a:r>
-              <a:rPr sz="2000"/>
-              <a:t>One-sample t-test — two-tailed and one-tailed</a:t>
-            </a:r>
-          </a:p>
-          <a:p>
-            <a:pPr lvl="0" indent="-342900" marL="342900">
-              <a:buAutoNum type="arabicPeriod"/>
-            </a:pPr>
-            <a:r>
-              <a:rPr sz="2000"/>
-              <a:t>Two-sample t-test (Student’s and Welch’s)</a:t>
-            </a:r>
-          </a:p>
-          <a:p>
-            <a:pPr lvl="0" indent="-342900" marL="342900">
-              <a:buAutoNum type="arabicPeriod"/>
-            </a:pPr>
-            <a:r>
-              <a:rPr sz="2000"/>
-              <a:t>Paired t-test</a:t>
-            </a:r>
-          </a:p>
-          <a:p>
-            <a:pPr lvl="0" indent="-342900" marL="342900">
-              <a:buAutoNum type="arabicPeriod"/>
-            </a:pPr>
-            <a:r>
-              <a:rPr sz="2000"/>
-              <a:t>Checking assumptions throughout</a:t>
-            </a:r>
-          </a:p>
-        </p:txBody>
-      </p:sp>
-    </p:spTree>
-  </p:cSld>
-</p:sld>
-</file>
-
-<file path=ppt/slides/slide20.xml><?xml version="1.0" encoding="utf-8"?>
-<p:sld xmlns:a="http://schemas.openxmlformats.org/drawingml/2006/main" xmlns:r="http://schemas.openxmlformats.org/officeDocument/2006/relationships" xmlns:p="http://schemas.openxmlformats.org/presentationml/2006/main">
-  <p:cSld>
-    <p:spTree>
-      <p:nvGrpSpPr>
-        <p:cNvPr id="1" name=""/>
-        <p:cNvGrpSpPr/>
-        <p:nvPr/>
-      </p:nvGrpSpPr>
-      <p:grpSpPr>
-        <a:xfrm>
-          <a:off x="0" y="0"/>
-          <a:ext cx="0" cy="0"/>
-          <a:chOff x="0" y="0"/>
-          <a:chExt cx="0" cy="0"/>
-        </a:xfrm>
-      </p:grpSpPr>
-      <p:sp>
-        <p:nvSpPr>
-          <p:cNvPr id="2" name="Title 1"/>
-          <p:cNvSpPr>
-            <a:spLocks noGrp="1"/>
-          </p:cNvSpPr>
-          <p:nvPr>
-            <p:ph type="title"/>
-          </p:nvPr>
-        </p:nvSpPr>
-        <p:spPr>
-          <a:xfrm>
-            <a:off x="0" y="0"/>
-            <a:ext cx="9144000" cy="602780"/>
-          </a:xfrm>
-          <a:solidFill>
-            <a:srgbClr val="70121D"/>
-          </a:solidFill>
-        </p:spPr>
-        <p:txBody>
-          <a:bodyPr/>
-          <a:lstStyle/>
-          <a:p>
-            <a:pPr lvl="0" indent="0" marL="0">
-              <a:buNone/>
-            </a:pPr>
-            <a:r>
-              <a:rPr/>
-              <a:t>Applications of the t-Distribution</a:t>
-            </a:r>
-          </a:p>
-        </p:txBody>
-      </p:sp>
-      <p:sp>
-        <p:nvSpPr>
-          <p:cNvPr id="3" name="Content Placeholder 2"/>
-          <p:cNvSpPr>
-            <a:spLocks noGrp="1"/>
-          </p:cNvSpPr>
-          <p:nvPr>
-            <p:ph idx="1" sz="half"/>
-          </p:nvPr>
-        </p:nvSpPr>
-        <p:spPr/>
-        <p:txBody>
-          <a:bodyPr/>
-          <a:lstStyle/>
-          <a:p>
-            <a:pPr lvl="0"/>
-            <a:r>
-              <a:rPr/>
-              <a:t>Can assess confidence that the population mean is within a certain range</a:t>
-            </a:r>
-          </a:p>
-          <a:p>
-            <a:pPr lvl="0"/>
-            <a:r>
-              <a:rPr/>
-              <a:t>Can use the t-distribution to ask:</a:t>
-            </a:r>
-          </a:p>
-          <a:p>
-            <a:pPr lvl="1"/>
-            <a:r>
-              <a:rPr/>
-              <a:t>“What is the probability of getting a sample with mean = ȳ from a population with mean = µ?” </a:t>
-            </a:r>
-            <a:r>
-              <a:rPr i="1"/>
-              <a:t>(1-sample t-test, df = n − 1)</a:t>
-            </a:r>
-          </a:p>
-          <a:p>
-            <a:pPr lvl="1"/>
-            <a:r>
-              <a:rPr/>
-              <a:t>“What is the probability that two samples came from the same population?” </a:t>
-            </a:r>
-            <a:r>
-              <a:rPr i="1"/>
-              <a:t>(2-sample t-test, df = n₁ + n₂ − 2)</a:t>
-            </a:r>
-          </a:p>
-          <a:p>
-            <a:pPr lvl="1"/>
-            <a:r>
-              <a:rPr/>
-              <a:t>“Is the average </a:t>
-            </a:r>
-            <a:r>
-              <a:rPr i="1"/>
-              <a:t>change within</a:t>
-            </a:r>
-            <a:r>
-              <a:rPr/>
-              <a:t> a subject different from zero?” </a:t>
-            </a:r>
-            <a:r>
-              <a:rPr i="1"/>
-              <a:t>(paired t-test, df = n</a:t>
-            </a:r>
-            <a:r>
-              <a:rPr i="1" baseline="-25000"/>
-              <a:t>pairs</a:t>
-            </a:r>
-            <a:r>
-              <a:rPr i="1"/>
-              <a:t> − 1)</a:t>
-            </a:r>
-          </a:p>
-        </p:txBody>
-      </p:sp>
-      <p:sp>
-        <p:nvSpPr>
-          <p:cNvPr id="4" name="Content Placeholder 3"/>
-          <p:cNvSpPr>
-            <a:spLocks noGrp="1"/>
-          </p:cNvSpPr>
-          <p:nvPr>
-            <p:ph idx="2" sz="half"/>
-          </p:nvPr>
-        </p:nvSpPr>
-        <p:spPr/>
-        <p:txBody>
-          <a:bodyPr/>
-          <a:lstStyle/>
-          <a:p>
-            <a:pPr lvl="0" indent="0" marL="1270000">
-              <a:buNone/>
-            </a:pPr>
-            <a:r>
-              <a:rPr sz="2000" b="1"/>
-              <a:t>Tip</a:t>
-            </a:r>
-          </a:p>
-          <a:p>
-            <a:pPr lvl="0" indent="0" marL="1270000">
-              <a:buNone/>
-            </a:pPr>
-            <a:r>
-              <a:rPr sz="2000" b="1"/>
-              <a:t>🖐 Try it yourself</a:t>
-            </a:r>
-          </a:p>
-          <a:p>
-            <a:pPr lvl="0" indent="0" marL="1270000">
-              <a:buNone/>
-            </a:pPr>
-            <a:r>
-              <a:rPr sz="2000"/>
-              <a:t>Before the next slide: which of these three questions does our pine needle design actually ask?</a:t>
-            </a:r>
-          </a:p>
-        </p:txBody>
-      </p:sp>
-    </p:spTree>
-  </p:cSld>
-</p:sld>
-</file>
-
 <file path=ppt/slides/slide21.xml><?xml version="1.0" encoding="utf-8"?>
 <p:sld xmlns:a="http://schemas.openxmlformats.org/drawingml/2006/main" xmlns:r="http://schemas.openxmlformats.org/officeDocument/2006/relationships" xmlns:p="http://schemas.openxmlformats.org/presentationml/2006/main">
   <p:cSld>
@@ -7937,8 +7833,11 @@
         <p:spPr>
           <a:xfrm>
             <a:off x="0" y="0"/>
-            <a:ext cx="9144000" cy="582780"/>
+            <a:ext cx="9144000" cy="602780"/>
           </a:xfrm>
+          <a:solidFill>
+            <a:srgbClr val="70121D"/>
+          </a:solidFill>
         </p:spPr>
         <p:txBody>
           <a:bodyPr/>
@@ -7949,7 +7848,129 @@
             </a:pPr>
             <a:r>
               <a:rPr/>
-              <a:t>Part 4 · One-Sample T-Test</a:t>
+              <a:t>Applications of the t-Distribution</a:t>
+            </a:r>
+          </a:p>
+        </p:txBody>
+      </p:sp>
+      <p:sp>
+        <p:nvSpPr>
+          <p:cNvPr id="3" name="Content Placeholder 2"/>
+          <p:cNvSpPr>
+            <a:spLocks noGrp="1"/>
+          </p:cNvSpPr>
+          <p:nvPr>
+            <p:ph idx="1" sz="half"/>
+          </p:nvPr>
+        </p:nvSpPr>
+        <p:spPr/>
+        <p:txBody>
+          <a:bodyPr/>
+          <a:lstStyle/>
+          <a:p>
+            <a:pPr lvl="0"/>
+            <a:r>
+              <a:rPr/>
+              <a:t>Can assess confidence that the population mean is within a certain range</a:t>
+            </a:r>
+          </a:p>
+          <a:p>
+            <a:pPr lvl="0"/>
+            <a:r>
+              <a:rPr/>
+              <a:t>Can use the t-distribution to ask:</a:t>
+            </a:r>
+          </a:p>
+          <a:p>
+            <a:pPr lvl="1"/>
+            <a:r>
+              <a:rPr/>
+              <a:t>“What is the probability of getting a sample with mean = ȳ from a population with mean = µ?” </a:t>
+            </a:r>
+            <a:r>
+              <a:rPr i="1"/>
+              <a:t>(1-sample t-test, df = n − 1)</a:t>
+            </a:r>
+          </a:p>
+          <a:p>
+            <a:pPr lvl="1"/>
+            <a:r>
+              <a:rPr/>
+              <a:t>“What is the probability that two samples came from the same population?” </a:t>
+            </a:r>
+            <a:r>
+              <a:rPr i="1"/>
+              <a:t>(2-sample t-test, df = n₁ + n₂ − 2)</a:t>
+            </a:r>
+          </a:p>
+          <a:p>
+            <a:pPr lvl="1"/>
+            <a:r>
+              <a:rPr/>
+              <a:t>“Is the average </a:t>
+            </a:r>
+            <a:r>
+              <a:rPr i="1"/>
+              <a:t>change within</a:t>
+            </a:r>
+            <a:r>
+              <a:rPr/>
+              <a:t> a subject different from zero?” </a:t>
+            </a:r>
+            <a:r>
+              <a:rPr i="1"/>
+              <a:t>(paired t-test, df = n</a:t>
+            </a:r>
+            <a:r>
+              <a:rPr i="1" baseline="-25000"/>
+              <a:t>pairs</a:t>
+            </a:r>
+            <a:r>
+              <a:rPr i="1"/>
+              <a:t> − 1)</a:t>
+            </a:r>
+          </a:p>
+        </p:txBody>
+      </p:sp>
+      <p:sp>
+        <p:nvSpPr>
+          <p:cNvPr id="4" name="Content Placeholder 3"/>
+          <p:cNvSpPr>
+            <a:spLocks noGrp="1"/>
+          </p:cNvSpPr>
+          <p:nvPr>
+            <p:ph idx="2" sz="half"/>
+          </p:nvPr>
+        </p:nvSpPr>
+        <p:spPr/>
+        <p:txBody>
+          <a:bodyPr/>
+          <a:lstStyle/>
+          <a:p>
+            <a:pPr lvl="0" indent="0" marL="1270000">
+              <a:buNone/>
+            </a:pPr>
+            <a:r>
+              <a:rPr sz="2000" b="1"/>
+              <a:t>Tip</a:t>
+            </a:r>
+          </a:p>
+          <a:p>
+            <a:pPr lvl="0" indent="0" marL="1270000">
+              <a:buNone/>
+            </a:pPr>
+            <a:r>
+              <a:rPr sz="2000" b="1"/>
+              <a:t>🖐 Try it yourself</a:t>
+            </a:r>
+          </a:p>
+          <a:p>
+            <a:pPr lvl="0" indent="0" marL="1270000">
+              <a:buNone/>
+            </a:pPr>
+            <a:r>
+              <a:rPr sz="2000"/>
+              <a:t>Before the next slide: which of these three questions does our pine needle design actually ask?</a:t>
             </a:r>
           </a:p>
         </p:txBody>
@@ -7989,6 +8010,58 @@
         <p:spPr>
           <a:xfrm>
             <a:off x="0" y="0"/>
+            <a:ext cx="9144000" cy="582780"/>
+          </a:xfrm>
+        </p:spPr>
+        <p:txBody>
+          <a:bodyPr/>
+          <a:lstStyle/>
+          <a:p>
+            <a:pPr lvl="0" indent="0" marL="0">
+              <a:buNone/>
+            </a:pPr>
+            <a:r>
+              <a:rPr/>
+              <a:t>Part 4 · One-Sample T-Test</a:t>
+            </a:r>
+          </a:p>
+        </p:txBody>
+      </p:sp>
+    </p:spTree>
+  </p:cSld>
+</p:sld>
+</file>
+
+<file path=ppt/slides/slide23.xml><?xml version="1.0" encoding="utf-8"?>
+<p:sld xmlns:a="http://schemas.openxmlformats.org/drawingml/2006/main" xmlns:r="http://schemas.openxmlformats.org/officeDocument/2006/relationships" xmlns:p="http://schemas.openxmlformats.org/presentationml/2006/main">
+  <p:cSld>
+    <p:spTree>
+      <p:nvGrpSpPr>
+        <p:cNvPr id="1" name=""/>
+        <p:cNvGrpSpPr/>
+        <p:nvPr/>
+      </p:nvGrpSpPr>
+      <p:grpSpPr>
+        <a:xfrm>
+          <a:off x="0" y="0"/>
+          <a:ext cx="0" cy="0"/>
+          <a:chOff x="0" y="0"/>
+          <a:chExt cx="0" cy="0"/>
+        </a:xfrm>
+      </p:grpSpPr>
+      <p:sp>
+        <p:nvSpPr>
+          <p:cNvPr id="2" name="Title 1"/>
+          <p:cNvSpPr>
+            <a:spLocks noGrp="1"/>
+          </p:cNvSpPr>
+          <p:nvPr>
+            <p:ph type="title"/>
+          </p:nvPr>
+        </p:nvSpPr>
+        <p:spPr>
+          <a:xfrm>
+            <a:off x="0" y="0"/>
             <a:ext cx="9144000" cy="602780"/>
           </a:xfrm>
           <a:solidFill>
@@ -8204,7 +8277,7 @@
 </p:sld>
 </file>
 
-<file path=ppt/slides/slide23.xml><?xml version="1.0" encoding="utf-8"?>
+<file path=ppt/slides/slide24.xml><?xml version="1.0" encoding="utf-8"?>
 <p:sld xmlns:a="http://schemas.openxmlformats.org/drawingml/2006/main" xmlns:r="http://schemas.openxmlformats.org/officeDocument/2006/relationships" xmlns:p="http://schemas.openxmlformats.org/presentationml/2006/main">
   <p:cSld>
     <p:spTree>
@@ -8383,6 +8456,140 @@
               <a:t>[1] 4 1</a:t>
             </a:r>
           </a:p>
+        </p:txBody>
+      </p:sp>
+      <p:sp>
+        <p:nvSpPr>
+          <p:cNvPr id="5" name="Text Placeholder 4"/>
+          <p:cNvSpPr>
+            <a:spLocks noGrp="1"/>
+          </p:cNvSpPr>
+          <p:nvPr>
+            <p:ph idx="3" sz="quarter" type="body"/>
+          </p:nvPr>
+        </p:nvSpPr>
+        <p:spPr/>
+        <p:txBody>
+          <a:bodyPr/>
+          <a:lstStyle/>
+          <a:p>
+            <a:pPr lvl="0" indent="0" marL="1270000">
+              <a:buNone/>
+            </a:pPr>
+            <a:r>
+              <a:rPr sz="2000" b="1"/>
+              <a:t>Tip</a:t>
+            </a:r>
+          </a:p>
+          <a:p>
+            <a:pPr lvl="0" indent="0" marL="1270000">
+              <a:buNone/>
+            </a:pPr>
+            <a:r>
+              <a:rPr sz="2000" b="1"/>
+              <a:t>🖐 Notice</a:t>
+            </a:r>
+          </a:p>
+          <a:p>
+            <a:pPr lvl="0" indent="0" marL="1270000">
+              <a:buNone/>
+            </a:pPr>
+            <a:r>
+              <a:rPr sz="2000"/>
+              <a:t>Points that hug the line support normality; points that curve away — especially in the tails — are a warning sign.</a:t>
+            </a:r>
+          </a:p>
+          <a:p>
+            <a:pPr lvl="0" indent="0" marL="1270000">
+              <a:buNone/>
+            </a:pPr>
+            <a:r>
+              <a:rPr sz="2000">
+                <a:latin typeface="Courier"/>
+              </a:rPr>
+              <a:t>qqPlot()</a:t>
+            </a:r>
+            <a:r>
+              <a:rPr sz="2000"/>
+              <a:t> from </a:t>
+            </a:r>
+            <a:r>
+              <a:rPr sz="2000" b="1"/>
+              <a:t>car</a:t>
+            </a:r>
+            <a:r>
+              <a:rPr sz="2000"/>
+              <a:t> adds a shaded confidence envelope automatically.</a:t>
+            </a:r>
+          </a:p>
+        </p:txBody>
+      </p:sp>
+    </p:spTree>
+  </p:cSld>
+</p:sld>
+</file>
+
+<file path=ppt/slides/slide25.xml><?xml version="1.0" encoding="utf-8"?>
+<p:sld xmlns:a="http://schemas.openxmlformats.org/drawingml/2006/main" xmlns:r="http://schemas.openxmlformats.org/officeDocument/2006/relationships" xmlns:p="http://schemas.openxmlformats.org/presentationml/2006/main">
+  <p:cSld>
+    <p:spTree>
+      <p:nvGrpSpPr>
+        <p:cNvPr id="1" name=""/>
+        <p:cNvGrpSpPr/>
+        <p:nvPr/>
+      </p:nvGrpSpPr>
+      <p:grpSpPr>
+        <a:xfrm>
+          <a:off x="0" y="0"/>
+          <a:ext cx="0" cy="0"/>
+          <a:chOff x="0" y="0"/>
+          <a:chExt cx="0" cy="0"/>
+        </a:xfrm>
+      </p:grpSpPr>
+      <p:sp>
+        <p:nvSpPr>
+          <p:cNvPr id="2" name="Title 1"/>
+          <p:cNvSpPr>
+            <a:spLocks noGrp="1"/>
+          </p:cNvSpPr>
+          <p:nvPr>
+            <p:ph type="title"/>
+          </p:nvPr>
+        </p:nvSpPr>
+        <p:spPr>
+          <a:xfrm>
+            <a:off x="139485" y="78119"/>
+            <a:ext cx="8229600" cy="607682"/>
+          </a:xfrm>
+        </p:spPr>
+        <p:txBody>
+          <a:bodyPr/>
+          <a:lstStyle/>
+          <a:p>
+            <a:pPr lvl="0" indent="0" marL="0">
+              <a:buNone/>
+            </a:pPr>
+            <a:r>
+              <a:rPr/>
+              <a:t>Checking Normality — QQ Plot, Base R</a:t>
+            </a:r>
+          </a:p>
+        </p:txBody>
+      </p:sp>
+      <p:sp>
+        <p:nvSpPr>
+          <p:cNvPr id="3" name="Text Placeholder 2"/>
+          <p:cNvSpPr>
+            <a:spLocks noGrp="1"/>
+          </p:cNvSpPr>
+          <p:nvPr>
+            <p:ph idx="1" type="body"/>
+          </p:nvPr>
+        </p:nvSpPr>
+        <p:spPr/>
+        <p:txBody>
+          <a:bodyPr/>
+          <a:lstStyle/>
           <a:p>
             <a:pPr lvl="0" indent="0">
               <a:buNone/>
@@ -8482,7 +8689,7 @@
           <p:nvPr/>
         </p:nvPicPr>
         <p:blipFill>
-          <a:blip r:embed="rId3"/>
+          <a:blip r:embed="rId2"/>
           <a:stretch>
             <a:fillRect/>
           </a:stretch>
@@ -8532,7 +8739,7 @@
             </a:pPr>
             <a:r>
               <a:rPr sz="2000" b="1"/>
-              <a:t>🖐 Notice</a:t>
+              <a:t>🖐 Same idea, no package</a:t>
             </a:r>
           </a:p>
           <a:p>
@@ -8540,51 +8747,34 @@
               <a:buNone/>
             </a:pPr>
             <a:r>
-              <a:rPr sz="2000"/>
-              <a:t>Points that hug the line support normality; points that curve away — especially in the tails — are a warning sign.</a:t>
-            </a:r>
-          </a:p>
-          <a:p>
-            <a:pPr lvl="0" indent="0" marL="1270000">
-              <a:buNone/>
-            </a:pPr>
-            <a:r>
               <a:rPr sz="2000">
                 <a:latin typeface="Courier"/>
               </a:rPr>
+              <a:t>qqnorm()</a:t>
+            </a:r>
+            <a:r>
+              <a:rPr sz="2000"/>
+              <a:t> + </a:t>
+            </a:r>
+            <a:r>
+              <a:rPr sz="2000">
+                <a:latin typeface="Courier"/>
+              </a:rPr>
+              <a:t>qqline()</a:t>
+            </a:r>
+            <a:r>
+              <a:rPr sz="2000"/>
+              <a:t> gives you the same picture as </a:t>
+            </a:r>
+            <a:r>
+              <a:rPr sz="2000">
+                <a:latin typeface="Courier"/>
+              </a:rPr>
               <a:t>qqPlot()</a:t>
             </a:r>
             <a:r>
               <a:rPr sz="2000"/>
-              <a:t> from </a:t>
-            </a:r>
-            <a:r>
-              <a:rPr sz="2000" b="1"/>
-              <a:t>car</a:t>
-            </a:r>
-            <a:r>
-              <a:rPr sz="2000"/>
-              <a:t> adds a shaded confidence envelope; base R’s </a:t>
-            </a:r>
-            <a:r>
-              <a:rPr sz="2000">
-                <a:latin typeface="Courier"/>
-              </a:rPr>
-              <a:t>qqnorm()</a:t>
-            </a:r>
-            <a:r>
-              <a:rPr sz="2000"/>
-              <a:t> + </a:t>
-            </a:r>
-            <a:r>
-              <a:rPr sz="2000">
-                <a:latin typeface="Courier"/>
-              </a:rPr>
-              <a:t>qqline()</a:t>
-            </a:r>
-            <a:r>
-              <a:rPr sz="2000"/>
-              <a:t> gives you the same picture without it. Either is fine.</a:t>
+              <a:t>, just without the shaded envelope. Either is fine.</a:t>
             </a:r>
           </a:p>
           <a:p>
@@ -8621,7 +8811,7 @@
 </p:sld>
 </file>
 
-<file path=ppt/slides/slide24.xml><?xml version="1.0" encoding="utf-8"?>
+<file path=ppt/slides/slide26.xml><?xml version="1.0" encoding="utf-8"?>
 <p:sld xmlns:a="http://schemas.openxmlformats.org/drawingml/2006/main" xmlns:r="http://schemas.openxmlformats.org/officeDocument/2006/relationships" xmlns:p="http://schemas.openxmlformats.org/presentationml/2006/main">
   <p:cSld>
     <p:spTree>
@@ -8864,7 +9054,7 @@
 </p:sld>
 </file>
 
-<file path=ppt/slides/slide25.xml><?xml version="1.0" encoding="utf-8"?>
+<file path=ppt/slides/slide27.xml><?xml version="1.0" encoding="utf-8"?>
 <p:sld xmlns:a="http://schemas.openxmlformats.org/drawingml/2006/main" xmlns:r="http://schemas.openxmlformats.org/officeDocument/2006/relationships" xmlns:p="http://schemas.openxmlformats.org/presentationml/2006/main">
   <p:cSld>
     <p:spTree>
@@ -9025,748 +9215,6 @@
 </p:sld>
 </file>
 
-<file path=ppt/slides/slide26.xml><?xml version="1.0" encoding="utf-8"?>
-<p:sld xmlns:a="http://schemas.openxmlformats.org/drawingml/2006/main" xmlns:r="http://schemas.openxmlformats.org/officeDocument/2006/relationships" xmlns:p="http://schemas.openxmlformats.org/presentationml/2006/main">
-  <p:cSld>
-    <p:spTree>
-      <p:nvGrpSpPr>
-        <p:cNvPr id="1" name=""/>
-        <p:cNvGrpSpPr/>
-        <p:nvPr/>
-      </p:nvGrpSpPr>
-      <p:grpSpPr>
-        <a:xfrm>
-          <a:off x="0" y="0"/>
-          <a:ext cx="0" cy="0"/>
-          <a:chOff x="0" y="0"/>
-          <a:chExt cx="0" cy="0"/>
-        </a:xfrm>
-      </p:grpSpPr>
-      <p:sp>
-        <p:nvSpPr>
-          <p:cNvPr id="2" name="Title 1"/>
-          <p:cNvSpPr>
-            <a:spLocks noGrp="1"/>
-          </p:cNvSpPr>
-          <p:nvPr>
-            <p:ph type="title"/>
-          </p:nvPr>
-        </p:nvSpPr>
-        <p:spPr>
-          <a:xfrm>
-            <a:off x="0" y="0"/>
-            <a:ext cx="9144000" cy="602780"/>
-          </a:xfrm>
-          <a:solidFill>
-            <a:srgbClr val="70121D"/>
-          </a:solidFill>
-        </p:spPr>
-        <p:txBody>
-          <a:bodyPr/>
-          <a:lstStyle/>
-          <a:p>
-            <a:pPr lvl="0" indent="0" marL="0">
-              <a:buNone/>
-            </a:pPr>
-            <a:r>
-              <a:rPr/>
-              <a:t>Running the One-Sample t-Test</a:t>
-            </a:r>
-          </a:p>
-        </p:txBody>
-      </p:sp>
-      <p:sp>
-        <p:nvSpPr>
-          <p:cNvPr id="3" name="Content Placeholder 2"/>
-          <p:cNvSpPr>
-            <a:spLocks noGrp="1"/>
-          </p:cNvSpPr>
-          <p:nvPr>
-            <p:ph idx="1" sz="half"/>
-          </p:nvPr>
-        </p:nvSpPr>
-        <p:spPr/>
-        <p:txBody>
-          <a:bodyPr/>
-          <a:lstStyle/>
-          <a:p>
-            <a:pPr lvl="0" indent="0">
-              <a:buNone/>
-            </a:pPr>
-            <a:r>
-              <a:rPr>
-                <a:solidFill>
-                  <a:srgbClr val="003B4F"/>
-                </a:solidFill>
-                <a:latin typeface="Courier"/>
-              </a:rPr>
-              <a:t>one_sample_model &lt;- </a:t>
-            </a:r>
-            <a:r>
-              <a:rPr>
-                <a:solidFill>
-                  <a:srgbClr val="4758AB"/>
-                </a:solidFill>
-                <a:latin typeface="Courier"/>
-              </a:rPr>
-              <a:t>t.test</a:t>
-            </a:r>
-            <a:r>
-              <a:rPr>
-                <a:solidFill>
-                  <a:srgbClr val="003B4F"/>
-                </a:solidFill>
-                <a:latin typeface="Courier"/>
-              </a:rPr>
-              <a:t>(shady_df</a:t>
-            </a:r>
-            <a:r>
-              <a:rPr>
-                <a:solidFill>
-                  <a:srgbClr val="5E5E5E"/>
-                </a:solidFill>
-                <a:latin typeface="Courier"/>
-              </a:rPr>
-              <a:t>$</a:t>
-            </a:r>
-            <a:r>
-              <a:rPr>
-                <a:solidFill>
-                  <a:srgbClr val="003B4F"/>
-                </a:solidFill>
-                <a:latin typeface="Courier"/>
-              </a:rPr>
-              <a:t>needle_length_mm, </a:t>
-            </a:r>
-            <a:r>
-              <a:rPr>
-                <a:solidFill>
-                  <a:srgbClr val="657422"/>
-                </a:solidFill>
-                <a:latin typeface="Courier"/>
-              </a:rPr>
-              <a:t>mu =</a:t>
-            </a:r>
-            <a:r>
-              <a:rPr>
-                <a:solidFill>
-                  <a:srgbClr val="003B4F"/>
-                </a:solidFill>
-                <a:latin typeface="Courier"/>
-              </a:rPr>
-              <a:t> </a:t>
-            </a:r>
-            <a:r>
-              <a:rPr>
-                <a:solidFill>
-                  <a:srgbClr val="AD0000"/>
-                </a:solidFill>
-                <a:latin typeface="Courier"/>
-              </a:rPr>
-              <a:t>15</a:t>
-            </a:r>
-            <a:r>
-              <a:rPr>
-                <a:solidFill>
-                  <a:srgbClr val="003B4F"/>
-                </a:solidFill>
-                <a:latin typeface="Courier"/>
-              </a:rPr>
-              <a:t>)</a:t>
-            </a:r>
-            <a:br/>
-            <a:br/>
-            <a:r>
-              <a:rPr>
-                <a:solidFill>
-                  <a:srgbClr val="003B4F"/>
-                </a:solidFill>
-                <a:latin typeface="Courier"/>
-              </a:rPr>
-              <a:t>one_sample_model</a:t>
-            </a:r>
-          </a:p>
-          <a:p>
-            <a:pPr lvl="0" indent="0">
-              <a:buNone/>
-            </a:pPr>
-            <a:r>
-              <a:rPr>
-                <a:latin typeface="Courier"/>
-              </a:rPr>
-              <a:t>
-    One Sample t-test
-data:  shady_df$needle_length_mm
-t = -0.87183, df = 3, p-value = 0.4475
-alternative hypothesis: true mean is not equal to 15
-95 percent confidence interval:
- 10.91210 17.32978
-sample estimates:
-mean of x 
- 14.12094 </a:t>
-            </a:r>
-          </a:p>
-        </p:txBody>
-      </p:sp>
-      <p:sp>
-        <p:nvSpPr>
-          <p:cNvPr id="4" name="Content Placeholder 3"/>
-          <p:cNvSpPr>
-            <a:spLocks noGrp="1"/>
-          </p:cNvSpPr>
-          <p:nvPr>
-            <p:ph idx="2" sz="half"/>
-          </p:nvPr>
-        </p:nvSpPr>
-        <p:spPr/>
-        <p:txBody>
-          <a:bodyPr/>
-          <a:lstStyle/>
-          <a:p>
-            <a:pPr lvl="0" indent="0" marL="1270000">
-              <a:buNone/>
-            </a:pPr>
-            <a:r>
-              <a:rPr sz="2000" b="1"/>
-              <a:t>Note</a:t>
-            </a:r>
-          </a:p>
-          <a:p>
-            <a:pPr lvl="0" indent="0" marL="1270000">
-              <a:buNone/>
-            </a:pPr>
-            <a:r>
-              <a:rPr sz="2000" b="1"/>
-              <a:t>✅ Read </a:t>
-            </a:r>
-            <a:r>
-              <a:rPr sz="2000" b="1">
-                <a:latin typeface="Courier"/>
-              </a:rPr>
-              <a:t>df = 3</a:t>
-            </a:r>
-            <a:r>
-              <a:rPr sz="2000" b="1"/>
-              <a:t> in that output</a:t>
-            </a:r>
-          </a:p>
-          <a:p>
-            <a:pPr lvl="0" indent="0" marL="1270000">
-              <a:buNone/>
-            </a:pPr>
-            <a:r>
-              <a:rPr sz="2000"/>
-              <a:t>R is telling you exactly what the Degrees of Freedom slide said: 4 shady trees, one mean estimated, </a:t>
-            </a:r>
-            <a:r>
-              <a:rPr sz="2000" b="1"/>
-              <a:t>df = 4 − 1 = 3</a:t>
-            </a:r>
-            <a:r>
-              <a:rPr sz="2000"/>
-              <a:t>.</a:t>
-            </a:r>
-          </a:p>
-          <a:p>
-            <a:pPr lvl="0" indent="0" marL="1270000">
-              <a:buNone/>
-            </a:pPr>
-            <a:r>
-              <a:rPr sz="2000" b="1"/>
-              <a:t>Tip</a:t>
-            </a:r>
-          </a:p>
-          <a:p>
-            <a:pPr lvl="0" indent="0" marL="1270000">
-              <a:buNone/>
-            </a:pPr>
-            <a:r>
-              <a:rPr sz="2000" b="1"/>
-              <a:t>🖐 Interpret it</a:t>
-            </a:r>
-          </a:p>
-          <a:p>
-            <a:pPr lvl="0" indent="-342900" marL="342900">
-              <a:buAutoNum type="arabicPeriod"/>
-            </a:pPr>
-            <a:r>
-              <a:rPr sz="2000"/>
-              <a:t>What was H₀? What was Hₐ?</a:t>
-            </a:r>
-          </a:p>
-          <a:p>
-            <a:pPr lvl="0" indent="-342900" marL="342900">
-              <a:buAutoNum type="arabicPeriod"/>
-            </a:pPr>
-            <a:r>
-              <a:rPr sz="2000"/>
-              <a:t>What does the p-value tell us?</a:t>
-            </a:r>
-          </a:p>
-          <a:p>
-            <a:pPr lvl="0" indent="-342900" marL="342900">
-              <a:buAutoNum type="arabicPeriod"/>
-            </a:pPr>
-            <a:r>
-              <a:rPr sz="2000"/>
-              <a:t>Reject or fail to reject at α = 0.05?</a:t>
-            </a:r>
-          </a:p>
-          <a:p>
-            <a:pPr lvl="0" indent="-342900" marL="342900">
-              <a:buAutoNum type="arabicPeriod"/>
-            </a:pPr>
-            <a:r>
-              <a:rPr sz="2000"/>
-              <a:t>What does that mean for a botanist?</a:t>
-            </a:r>
-          </a:p>
-        </p:txBody>
-      </p:sp>
-    </p:spTree>
-  </p:cSld>
-</p:sld>
-</file>
-
-<file path=ppt/slides/slide27.xml><?xml version="1.0" encoding="utf-8"?>
-<p:sld xmlns:a="http://schemas.openxmlformats.org/drawingml/2006/main" xmlns:r="http://schemas.openxmlformats.org/officeDocument/2006/relationships" xmlns:p="http://schemas.openxmlformats.org/presentationml/2006/main">
-  <p:cSld>
-    <p:spTree>
-      <p:nvGrpSpPr>
-        <p:cNvPr id="1" name=""/>
-        <p:cNvGrpSpPr/>
-        <p:nvPr/>
-      </p:nvGrpSpPr>
-      <p:grpSpPr>
-        <a:xfrm>
-          <a:off x="0" y="0"/>
-          <a:ext cx="0" cy="0"/>
-          <a:chOff x="0" y="0"/>
-          <a:chExt cx="0" cy="0"/>
-        </a:xfrm>
-      </p:grpSpPr>
-      <p:sp>
-        <p:nvSpPr>
-          <p:cNvPr id="2" name="Title 1"/>
-          <p:cNvSpPr>
-            <a:spLocks noGrp="1"/>
-          </p:cNvSpPr>
-          <p:nvPr>
-            <p:ph type="title"/>
-          </p:nvPr>
-        </p:nvSpPr>
-        <p:spPr>
-          <a:xfrm>
-            <a:off x="0" y="0"/>
-            <a:ext cx="9144000" cy="602780"/>
-          </a:xfrm>
-          <a:solidFill>
-            <a:srgbClr val="70121D"/>
-          </a:solidFill>
-        </p:spPr>
-        <p:txBody>
-          <a:bodyPr/>
-          <a:lstStyle/>
-          <a:p>
-            <a:pPr lvl="0" indent="0" marL="0">
-              <a:buNone/>
-            </a:pPr>
-            <a:r>
-              <a:rPr/>
-              <a:t>One-Tailed Variation — the Same Test, One Direction</a:t>
-            </a:r>
-          </a:p>
-        </p:txBody>
-      </p:sp>
-      <p:sp>
-        <p:nvSpPr>
-          <p:cNvPr id="3" name="Content Placeholder 2"/>
-          <p:cNvSpPr>
-            <a:spLocks noGrp="1"/>
-          </p:cNvSpPr>
-          <p:nvPr>
-            <p:ph idx="1" sz="half"/>
-          </p:nvPr>
-        </p:nvSpPr>
-        <p:spPr/>
-        <p:txBody>
-          <a:bodyPr/>
-          <a:lstStyle/>
-          <a:p>
-            <a:pPr lvl="0" indent="0" marL="0">
-              <a:buNone/>
-            </a:pPr>
-            <a:r>
-              <a:rPr/>
-              <a:t>Our prediction was </a:t>
-            </a:r>
-            <a:r>
-              <a:rPr b="1"/>
-              <a:t>directional</a:t>
-            </a:r>
-            <a:r>
-              <a:rPr/>
-              <a:t>: shady needles are </a:t>
-            </a:r>
-            <a:r>
-              <a:rPr i="1"/>
-              <a:t>shorter</a:t>
-            </a:r>
-            <a:r>
-              <a:rPr/>
-              <a:t> than 15 mm. If we commit to that </a:t>
-            </a:r>
-            <a:r>
-              <a:rPr b="1"/>
-              <a:t>before</a:t>
-            </a:r>
-            <a:r>
-              <a:rPr/>
-              <a:t> collecting data, we can run a one-tailed test.</a:t>
-            </a:r>
-          </a:p>
-          <a:p>
-            <a:pPr lvl="0"/>
-            <a:r>
-              <a:rPr b="1"/>
-              <a:t>H₀:</a:t>
-            </a:r>
-            <a:r>
-              <a:rPr/>
-              <a:t> μ ≥ 15</a:t>
-            </a:r>
-          </a:p>
-          <a:p>
-            <a:pPr lvl="0"/>
-            <a:r>
-              <a:rPr b="1"/>
-              <a:t>Hₐ:</a:t>
-            </a:r>
-            <a:r>
-              <a:rPr/>
-              <a:t> μ &lt; 15 — all 5% of α in the </a:t>
-            </a:r>
-            <a:r>
-              <a:rPr i="1"/>
-              <a:t>lower</a:t>
-            </a:r>
-            <a:r>
-              <a:rPr/>
-              <a:t> tail</a:t>
-            </a:r>
-          </a:p>
-          <a:p>
-            <a:pPr lvl="0" indent="0">
-              <a:buNone/>
-            </a:pPr>
-            <a:r>
-              <a:rPr>
-                <a:solidFill>
-                  <a:srgbClr val="003B4F"/>
-                </a:solidFill>
-                <a:latin typeface="Courier"/>
-              </a:rPr>
-              <a:t>one_tailed_model &lt;- </a:t>
-            </a:r>
-            <a:r>
-              <a:rPr>
-                <a:solidFill>
-                  <a:srgbClr val="4758AB"/>
-                </a:solidFill>
-                <a:latin typeface="Courier"/>
-              </a:rPr>
-              <a:t>t.test</a:t>
-            </a:r>
-            <a:r>
-              <a:rPr>
-                <a:solidFill>
-                  <a:srgbClr val="003B4F"/>
-                </a:solidFill>
-                <a:latin typeface="Courier"/>
-              </a:rPr>
-              <a:t>(shady_df</a:t>
-            </a:r>
-            <a:r>
-              <a:rPr>
-                <a:solidFill>
-                  <a:srgbClr val="5E5E5E"/>
-                </a:solidFill>
-                <a:latin typeface="Courier"/>
-              </a:rPr>
-              <a:t>$</a:t>
-            </a:r>
-            <a:r>
-              <a:rPr>
-                <a:solidFill>
-                  <a:srgbClr val="003B4F"/>
-                </a:solidFill>
-                <a:latin typeface="Courier"/>
-              </a:rPr>
-              <a:t>needle_length_mm,</a:t>
-            </a:r>
-            <a:br/>
-            <a:r>
-              <a:rPr>
-                <a:solidFill>
-                  <a:srgbClr val="003B4F"/>
-                </a:solidFill>
-                <a:latin typeface="Courier"/>
-              </a:rPr>
-              <a:t>                           </a:t>
-            </a:r>
-            <a:r>
-              <a:rPr>
-                <a:solidFill>
-                  <a:srgbClr val="657422"/>
-                </a:solidFill>
-                <a:latin typeface="Courier"/>
-              </a:rPr>
-              <a:t>mu =</a:t>
-            </a:r>
-            <a:r>
-              <a:rPr>
-                <a:solidFill>
-                  <a:srgbClr val="003B4F"/>
-                </a:solidFill>
-                <a:latin typeface="Courier"/>
-              </a:rPr>
-              <a:t> </a:t>
-            </a:r>
-            <a:r>
-              <a:rPr>
-                <a:solidFill>
-                  <a:srgbClr val="AD0000"/>
-                </a:solidFill>
-                <a:latin typeface="Courier"/>
-              </a:rPr>
-              <a:t>15</a:t>
-            </a:r>
-            <a:r>
-              <a:rPr>
-                <a:solidFill>
-                  <a:srgbClr val="003B4F"/>
-                </a:solidFill>
-                <a:latin typeface="Courier"/>
-              </a:rPr>
-              <a:t>,</a:t>
-            </a:r>
-            <a:br/>
-            <a:r>
-              <a:rPr>
-                <a:solidFill>
-                  <a:srgbClr val="003B4F"/>
-                </a:solidFill>
-                <a:latin typeface="Courier"/>
-              </a:rPr>
-              <a:t>                           </a:t>
-            </a:r>
-            <a:r>
-              <a:rPr>
-                <a:solidFill>
-                  <a:srgbClr val="657422"/>
-                </a:solidFill>
-                <a:latin typeface="Courier"/>
-              </a:rPr>
-              <a:t>alternative =</a:t>
-            </a:r>
-            <a:r>
-              <a:rPr>
-                <a:solidFill>
-                  <a:srgbClr val="003B4F"/>
-                </a:solidFill>
-                <a:latin typeface="Courier"/>
-              </a:rPr>
-              <a:t> </a:t>
-            </a:r>
-            <a:r>
-              <a:rPr>
-                <a:solidFill>
-                  <a:srgbClr val="20794D"/>
-                </a:solidFill>
-                <a:latin typeface="Courier"/>
-              </a:rPr>
-              <a:t>"less"</a:t>
-            </a:r>
-            <a:r>
-              <a:rPr>
-                <a:solidFill>
-                  <a:srgbClr val="003B4F"/>
-                </a:solidFill>
-                <a:latin typeface="Courier"/>
-              </a:rPr>
-              <a:t>)</a:t>
-            </a:r>
-            <a:br/>
-            <a:br/>
-            <a:r>
-              <a:rPr>
-                <a:solidFill>
-                  <a:srgbClr val="003B4F"/>
-                </a:solidFill>
-                <a:latin typeface="Courier"/>
-              </a:rPr>
-              <a:t>one_tailed_model</a:t>
-            </a:r>
-          </a:p>
-          <a:p>
-            <a:pPr lvl="0" indent="0">
-              <a:buNone/>
-            </a:pPr>
-            <a:r>
-              <a:rPr>
-                <a:latin typeface="Courier"/>
-              </a:rPr>
-              <a:t>
-    One Sample t-test
-data:  shady_df$needle_length_mm
-t = -0.87183, df = 3, p-value = 0.2237
-alternative hypothesis: true mean is less than 15
-95 percent confidence interval:
-     -Inf 16.49382
-sample estimates:
-mean of x 
- 14.12094 </a:t>
-            </a:r>
-          </a:p>
-        </p:txBody>
-      </p:sp>
-      <p:sp>
-        <p:nvSpPr>
-          <p:cNvPr id="4" name="Content Placeholder 3"/>
-          <p:cNvSpPr>
-            <a:spLocks noGrp="1"/>
-          </p:cNvSpPr>
-          <p:nvPr>
-            <p:ph idx="2" sz="half"/>
-          </p:nvPr>
-        </p:nvSpPr>
-        <p:spPr/>
-        <p:txBody>
-          <a:bodyPr/>
-          <a:lstStyle/>
-          <a:p>
-            <a:pPr lvl="0" indent="0" marL="1270000">
-              <a:buNone/>
-            </a:pPr>
-            <a:r>
-              <a:rPr sz="2000" b="1"/>
-              <a:t>Note</a:t>
-            </a:r>
-          </a:p>
-          <a:p>
-            <a:pPr lvl="0" indent="0" marL="1270000">
-              <a:buNone/>
-            </a:pPr>
-            <a:r>
-              <a:rPr sz="2000" b="1"/>
-              <a:t>✅ Key idea</a:t>
-            </a:r>
-          </a:p>
-          <a:p>
-            <a:pPr lvl="0" indent="0" marL="1270000">
-              <a:buNone/>
-            </a:pPr>
-            <a:r>
-              <a:rPr sz="2000">
-                <a:latin typeface="Courier"/>
-              </a:rPr>
-              <a:t>alternative = "less"</a:t>
-            </a:r>
-            <a:r>
-              <a:rPr sz="2000"/>
-              <a:t> or </a:t>
-            </a:r>
-            <a:r>
-              <a:rPr sz="2000">
-                <a:latin typeface="Courier"/>
-              </a:rPr>
-              <a:t>"greater"</a:t>
-            </a:r>
-            <a:r>
-              <a:rPr sz="2000"/>
-              <a:t> is the </a:t>
-            </a:r>
-            <a:r>
-              <a:rPr sz="2000" i="1"/>
-              <a:t>only</a:t>
-            </a:r>
-            <a:r>
-              <a:rPr sz="2000"/>
-              <a:t> thing that changed. Same data, same t, same </a:t>
-            </a:r>
-            <a:r>
-              <a:rPr sz="2000" b="1"/>
-              <a:t>df = 3</a:t>
-            </a:r>
-            <a:r>
-              <a:rPr sz="2000"/>
-              <a:t>.</a:t>
-            </a:r>
-          </a:p>
-          <a:p>
-            <a:pPr lvl="0" indent="0" marL="1270000">
-              <a:buNone/>
-            </a:pPr>
-            <a:r>
-              <a:rPr sz="2000"/>
-              <a:t>Compare the two p-values:</a:t>
-            </a:r>
-          </a:p>
-          <a:p>
-            <a:pPr lvl="0" indent="0" marL="1270000">
-              <a:buNone/>
-            </a:pPr>
-            <a:r>
-              <a:rPr sz="2000" b="1"/>
-              <a:t>Exactly half.</a:t>
-            </a:r>
-            <a:r>
-              <a:rPr sz="2000"/>
-              <a:t> All of α now sits in one tail, so the observed t only has to beat one cutoff instead of two.</a:t>
-            </a:r>
-          </a:p>
-          <a:p>
-            <a:pPr lvl="0" indent="0" marL="1270000">
-              <a:buNone/>
-            </a:pPr>
-            <a:r>
-              <a:rPr sz="2000" b="1"/>
-              <a:t>Warning</a:t>
-            </a:r>
-          </a:p>
-          <a:p>
-            <a:pPr lvl="0" indent="0" marL="1270000">
-              <a:buNone/>
-            </a:pPr>
-            <a:r>
-              <a:rPr sz="2000" b="1"/>
-              <a:t>⚠️ Notice the confidence interval changed too</a:t>
-            </a:r>
-          </a:p>
-          <a:p>
-            <a:pPr lvl="0" indent="0" marL="1270000">
-              <a:buNone/>
-            </a:pPr>
-            <a:r>
-              <a:rPr sz="2000"/>
-              <a:t>It now runs from </a:t>
-            </a:r>
-            <a:r>
-              <a:rPr sz="2000" b="1"/>
-              <a:t>−Inf</a:t>
-            </a:r>
-            <a:r>
-              <a:rPr sz="2000"/>
-              <a:t> to an upper bound. A one-tailed test makes no claim in the direction you ruled out.</a:t>
-            </a:r>
-          </a:p>
-        </p:txBody>
-      </p:sp>
-    </p:spTree>
-  </p:cSld>
-</p:sld>
-</file>
-
 <file path=ppt/slides/slide28.xml><?xml version="1.0" encoding="utf-8"?>
 <p:sld xmlns:a="http://schemas.openxmlformats.org/drawingml/2006/main" xmlns:r="http://schemas.openxmlformats.org/officeDocument/2006/relationships" xmlns:p="http://schemas.openxmlformats.org/presentationml/2006/main">
   <p:cSld>
@@ -9812,7 +9260,7 @@
             </a:pPr>
             <a:r>
               <a:rPr/>
-              <a:t>One-Tailed vs. Two-Tailed — What It Costs You</a:t>
+              <a:t>Running the One-Sample t-Test</a:t>
             </a:r>
           </a:p>
         </p:txBody>
@@ -9832,6 +9280,800 @@
           <a:bodyPr/>
           <a:lstStyle/>
           <a:p>
+            <a:pPr lvl="0" indent="0">
+              <a:buNone/>
+            </a:pPr>
+            <a:r>
+              <a:rPr>
+                <a:solidFill>
+                  <a:srgbClr val="003B4F"/>
+                </a:solidFill>
+                <a:latin typeface="Courier"/>
+              </a:rPr>
+              <a:t>one_sample_model &lt;- </a:t>
+            </a:r>
+            <a:r>
+              <a:rPr>
+                <a:solidFill>
+                  <a:srgbClr val="4758AB"/>
+                </a:solidFill>
+                <a:latin typeface="Courier"/>
+              </a:rPr>
+              <a:t>t.test</a:t>
+            </a:r>
+            <a:r>
+              <a:rPr>
+                <a:solidFill>
+                  <a:srgbClr val="003B4F"/>
+                </a:solidFill>
+                <a:latin typeface="Courier"/>
+              </a:rPr>
+              <a:t>(shady_df</a:t>
+            </a:r>
+            <a:r>
+              <a:rPr>
+                <a:solidFill>
+                  <a:srgbClr val="5E5E5E"/>
+                </a:solidFill>
+                <a:latin typeface="Courier"/>
+              </a:rPr>
+              <a:t>$</a:t>
+            </a:r>
+            <a:r>
+              <a:rPr>
+                <a:solidFill>
+                  <a:srgbClr val="003B4F"/>
+                </a:solidFill>
+                <a:latin typeface="Courier"/>
+              </a:rPr>
+              <a:t>needle_length_mm, </a:t>
+            </a:r>
+            <a:r>
+              <a:rPr>
+                <a:solidFill>
+                  <a:srgbClr val="657422"/>
+                </a:solidFill>
+                <a:latin typeface="Courier"/>
+              </a:rPr>
+              <a:t>mu =</a:t>
+            </a:r>
+            <a:r>
+              <a:rPr>
+                <a:solidFill>
+                  <a:srgbClr val="003B4F"/>
+                </a:solidFill>
+                <a:latin typeface="Courier"/>
+              </a:rPr>
+              <a:t> </a:t>
+            </a:r>
+            <a:r>
+              <a:rPr>
+                <a:solidFill>
+                  <a:srgbClr val="AD0000"/>
+                </a:solidFill>
+                <a:latin typeface="Courier"/>
+              </a:rPr>
+              <a:t>15</a:t>
+            </a:r>
+            <a:r>
+              <a:rPr>
+                <a:solidFill>
+                  <a:srgbClr val="003B4F"/>
+                </a:solidFill>
+                <a:latin typeface="Courier"/>
+              </a:rPr>
+              <a:t>)</a:t>
+            </a:r>
+            <a:br/>
+            <a:br/>
+            <a:r>
+              <a:rPr>
+                <a:solidFill>
+                  <a:srgbClr val="003B4F"/>
+                </a:solidFill>
+                <a:latin typeface="Courier"/>
+              </a:rPr>
+              <a:t>one_sample_model</a:t>
+            </a:r>
+          </a:p>
+          <a:p>
+            <a:pPr lvl="0" indent="0">
+              <a:buNone/>
+            </a:pPr>
+            <a:r>
+              <a:rPr>
+                <a:latin typeface="Courier"/>
+              </a:rPr>
+              <a:t>
+    One Sample t-test
+data:  shady_df$needle_length_mm
+t = -0.87183, df = 3, p-value = 0.4475
+alternative hypothesis: true mean is not equal to 15
+95 percent confidence interval:
+ 10.91210 17.32978
+sample estimates:
+mean of x 
+ 14.12094 </a:t>
+            </a:r>
+          </a:p>
+        </p:txBody>
+      </p:sp>
+      <p:sp>
+        <p:nvSpPr>
+          <p:cNvPr id="4" name="Content Placeholder 3"/>
+          <p:cNvSpPr>
+            <a:spLocks noGrp="1"/>
+          </p:cNvSpPr>
+          <p:nvPr>
+            <p:ph idx="2" sz="half"/>
+          </p:nvPr>
+        </p:nvSpPr>
+        <p:spPr/>
+        <p:txBody>
+          <a:bodyPr/>
+          <a:lstStyle/>
+          <a:p>
+            <a:pPr lvl="0" indent="0" marL="1270000">
+              <a:buNone/>
+            </a:pPr>
+            <a:r>
+              <a:rPr sz="2000" b="1"/>
+              <a:t>Note</a:t>
+            </a:r>
+          </a:p>
+          <a:p>
+            <a:pPr lvl="0" indent="0" marL="1270000">
+              <a:buNone/>
+            </a:pPr>
+            <a:r>
+              <a:rPr sz="2000" b="1"/>
+              <a:t>✅ Read </a:t>
+            </a:r>
+            <a:r>
+              <a:rPr sz="2000" b="1">
+                <a:latin typeface="Courier"/>
+              </a:rPr>
+              <a:t>df = 3</a:t>
+            </a:r>
+            <a:r>
+              <a:rPr sz="2000" b="1"/>
+              <a:t> in that output</a:t>
+            </a:r>
+          </a:p>
+          <a:p>
+            <a:pPr lvl="0" indent="0" marL="1270000">
+              <a:buNone/>
+            </a:pPr>
+            <a:r>
+              <a:rPr sz="2000"/>
+              <a:t>R is telling you exactly what the Degrees of Freedom slide said: 4 shady trees, one mean estimated, </a:t>
+            </a:r>
+            <a:r>
+              <a:rPr sz="2000" b="1"/>
+              <a:t>df = 4 − 1 = 3</a:t>
+            </a:r>
+            <a:r>
+              <a:rPr sz="2000"/>
+              <a:t>.</a:t>
+            </a:r>
+          </a:p>
+          <a:p>
+            <a:pPr lvl="0" indent="0" marL="1270000">
+              <a:buNone/>
+            </a:pPr>
+            <a:r>
+              <a:rPr sz="2000" b="1"/>
+              <a:t>Tip</a:t>
+            </a:r>
+          </a:p>
+          <a:p>
+            <a:pPr lvl="0" indent="0" marL="1270000">
+              <a:buNone/>
+            </a:pPr>
+            <a:r>
+              <a:rPr sz="2000" b="1"/>
+              <a:t>🖐 Interpret it</a:t>
+            </a:r>
+          </a:p>
+          <a:p>
+            <a:pPr lvl="0" indent="-342900" marL="342900">
+              <a:buAutoNum type="arabicPeriod"/>
+            </a:pPr>
+            <a:r>
+              <a:rPr sz="2000"/>
+              <a:t>What was H₀? What was Hₐ?</a:t>
+            </a:r>
+          </a:p>
+          <a:p>
+            <a:pPr lvl="0" indent="-342900" marL="342900">
+              <a:buAutoNum type="arabicPeriod"/>
+            </a:pPr>
+            <a:r>
+              <a:rPr sz="2000"/>
+              <a:t>What does the p-value tell us?</a:t>
+            </a:r>
+          </a:p>
+          <a:p>
+            <a:pPr lvl="0" indent="-342900" marL="342900">
+              <a:buAutoNum type="arabicPeriod"/>
+            </a:pPr>
+            <a:r>
+              <a:rPr sz="2000"/>
+              <a:t>Reject or fail to reject at α = 0.05?</a:t>
+            </a:r>
+          </a:p>
+          <a:p>
+            <a:pPr lvl="0" indent="-342900" marL="342900">
+              <a:buAutoNum type="arabicPeriod"/>
+            </a:pPr>
+            <a:r>
+              <a:rPr sz="2000"/>
+              <a:t>What does that mean for a botanist?</a:t>
+            </a:r>
+          </a:p>
+        </p:txBody>
+      </p:sp>
+    </p:spTree>
+  </p:cSld>
+</p:sld>
+</file>
+
+<file path=ppt/slides/slide29.xml><?xml version="1.0" encoding="utf-8"?>
+<p:sld xmlns:a="http://schemas.openxmlformats.org/drawingml/2006/main" xmlns:r="http://schemas.openxmlformats.org/officeDocument/2006/relationships" xmlns:p="http://schemas.openxmlformats.org/presentationml/2006/main">
+  <p:cSld>
+    <p:spTree>
+      <p:nvGrpSpPr>
+        <p:cNvPr id="1" name=""/>
+        <p:cNvGrpSpPr/>
+        <p:nvPr/>
+      </p:nvGrpSpPr>
+      <p:grpSpPr>
+        <a:xfrm>
+          <a:off x="0" y="0"/>
+          <a:ext cx="0" cy="0"/>
+          <a:chOff x="0" y="0"/>
+          <a:chExt cx="0" cy="0"/>
+        </a:xfrm>
+      </p:grpSpPr>
+      <p:sp>
+        <p:nvSpPr>
+          <p:cNvPr id="2" name="Title 1"/>
+          <p:cNvSpPr>
+            <a:spLocks noGrp="1"/>
+          </p:cNvSpPr>
+          <p:nvPr>
+            <p:ph type="title"/>
+          </p:nvPr>
+        </p:nvSpPr>
+        <p:spPr>
+          <a:xfrm>
+            <a:off x="0" y="0"/>
+            <a:ext cx="9144000" cy="602780"/>
+          </a:xfrm>
+          <a:solidFill>
+            <a:srgbClr val="70121D"/>
+          </a:solidFill>
+        </p:spPr>
+        <p:txBody>
+          <a:bodyPr/>
+          <a:lstStyle/>
+          <a:p>
+            <a:pPr lvl="0" indent="0" marL="0">
+              <a:buNone/>
+            </a:pPr>
+            <a:r>
+              <a:rPr/>
+              <a:t>One-Tailed Variation — the Same Test, One Direction</a:t>
+            </a:r>
+          </a:p>
+        </p:txBody>
+      </p:sp>
+      <p:sp>
+        <p:nvSpPr>
+          <p:cNvPr id="3" name="Content Placeholder 2"/>
+          <p:cNvSpPr>
+            <a:spLocks noGrp="1"/>
+          </p:cNvSpPr>
+          <p:nvPr>
+            <p:ph idx="1" sz="half"/>
+          </p:nvPr>
+        </p:nvSpPr>
+        <p:spPr/>
+        <p:txBody>
+          <a:bodyPr/>
+          <a:lstStyle/>
+          <a:p>
+            <a:pPr lvl="0" indent="0" marL="0">
+              <a:buNone/>
+            </a:pPr>
+            <a:r>
+              <a:rPr/>
+              <a:t>Our prediction was </a:t>
+            </a:r>
+            <a:r>
+              <a:rPr b="1"/>
+              <a:t>directional</a:t>
+            </a:r>
+            <a:r>
+              <a:rPr/>
+              <a:t>: shady needles are </a:t>
+            </a:r>
+            <a:r>
+              <a:rPr i="1"/>
+              <a:t>shorter</a:t>
+            </a:r>
+            <a:r>
+              <a:rPr/>
+              <a:t> than 15 mm. If we commit to that </a:t>
+            </a:r>
+            <a:r>
+              <a:rPr b="1"/>
+              <a:t>before</a:t>
+            </a:r>
+            <a:r>
+              <a:rPr/>
+              <a:t> collecting data, we can run a one-tailed test.</a:t>
+            </a:r>
+          </a:p>
+          <a:p>
+            <a:pPr lvl="0"/>
+            <a:r>
+              <a:rPr b="1"/>
+              <a:t>H₀:</a:t>
+            </a:r>
+            <a:r>
+              <a:rPr/>
+              <a:t> μ ≥ 15</a:t>
+            </a:r>
+          </a:p>
+          <a:p>
+            <a:pPr lvl="0"/>
+            <a:r>
+              <a:rPr b="1"/>
+              <a:t>Hₐ:</a:t>
+            </a:r>
+            <a:r>
+              <a:rPr/>
+              <a:t> μ &lt; 15 — all 5% of α in the </a:t>
+            </a:r>
+            <a:r>
+              <a:rPr i="1"/>
+              <a:t>lower</a:t>
+            </a:r>
+            <a:r>
+              <a:rPr/>
+              <a:t> tail</a:t>
+            </a:r>
+          </a:p>
+          <a:p>
+            <a:pPr lvl="0" indent="0">
+              <a:buNone/>
+            </a:pPr>
+            <a:r>
+              <a:rPr>
+                <a:solidFill>
+                  <a:srgbClr val="003B4F"/>
+                </a:solidFill>
+                <a:latin typeface="Courier"/>
+              </a:rPr>
+              <a:t>one_tailed_model &lt;- </a:t>
+            </a:r>
+            <a:r>
+              <a:rPr>
+                <a:solidFill>
+                  <a:srgbClr val="4758AB"/>
+                </a:solidFill>
+                <a:latin typeface="Courier"/>
+              </a:rPr>
+              <a:t>t.test</a:t>
+            </a:r>
+            <a:r>
+              <a:rPr>
+                <a:solidFill>
+                  <a:srgbClr val="003B4F"/>
+                </a:solidFill>
+                <a:latin typeface="Courier"/>
+              </a:rPr>
+              <a:t>(shady_df</a:t>
+            </a:r>
+            <a:r>
+              <a:rPr>
+                <a:solidFill>
+                  <a:srgbClr val="5E5E5E"/>
+                </a:solidFill>
+                <a:latin typeface="Courier"/>
+              </a:rPr>
+              <a:t>$</a:t>
+            </a:r>
+            <a:r>
+              <a:rPr>
+                <a:solidFill>
+                  <a:srgbClr val="003B4F"/>
+                </a:solidFill>
+                <a:latin typeface="Courier"/>
+              </a:rPr>
+              <a:t>needle_length_mm,</a:t>
+            </a:r>
+            <a:br/>
+            <a:r>
+              <a:rPr>
+                <a:solidFill>
+                  <a:srgbClr val="003B4F"/>
+                </a:solidFill>
+                <a:latin typeface="Courier"/>
+              </a:rPr>
+              <a:t>                           </a:t>
+            </a:r>
+            <a:r>
+              <a:rPr>
+                <a:solidFill>
+                  <a:srgbClr val="657422"/>
+                </a:solidFill>
+                <a:latin typeface="Courier"/>
+              </a:rPr>
+              <a:t>mu =</a:t>
+            </a:r>
+            <a:r>
+              <a:rPr>
+                <a:solidFill>
+                  <a:srgbClr val="003B4F"/>
+                </a:solidFill>
+                <a:latin typeface="Courier"/>
+              </a:rPr>
+              <a:t> </a:t>
+            </a:r>
+            <a:r>
+              <a:rPr>
+                <a:solidFill>
+                  <a:srgbClr val="AD0000"/>
+                </a:solidFill>
+                <a:latin typeface="Courier"/>
+              </a:rPr>
+              <a:t>15</a:t>
+            </a:r>
+            <a:r>
+              <a:rPr>
+                <a:solidFill>
+                  <a:srgbClr val="003B4F"/>
+                </a:solidFill>
+                <a:latin typeface="Courier"/>
+              </a:rPr>
+              <a:t>,</a:t>
+            </a:r>
+            <a:br/>
+            <a:r>
+              <a:rPr>
+                <a:solidFill>
+                  <a:srgbClr val="003B4F"/>
+                </a:solidFill>
+                <a:latin typeface="Courier"/>
+              </a:rPr>
+              <a:t>                           </a:t>
+            </a:r>
+            <a:r>
+              <a:rPr>
+                <a:solidFill>
+                  <a:srgbClr val="657422"/>
+                </a:solidFill>
+                <a:latin typeface="Courier"/>
+              </a:rPr>
+              <a:t>alternative =</a:t>
+            </a:r>
+            <a:r>
+              <a:rPr>
+                <a:solidFill>
+                  <a:srgbClr val="003B4F"/>
+                </a:solidFill>
+                <a:latin typeface="Courier"/>
+              </a:rPr>
+              <a:t> </a:t>
+            </a:r>
+            <a:r>
+              <a:rPr>
+                <a:solidFill>
+                  <a:srgbClr val="20794D"/>
+                </a:solidFill>
+                <a:latin typeface="Courier"/>
+              </a:rPr>
+              <a:t>"less"</a:t>
+            </a:r>
+            <a:r>
+              <a:rPr>
+                <a:solidFill>
+                  <a:srgbClr val="003B4F"/>
+                </a:solidFill>
+                <a:latin typeface="Courier"/>
+              </a:rPr>
+              <a:t>)</a:t>
+            </a:r>
+            <a:br/>
+            <a:br/>
+            <a:r>
+              <a:rPr>
+                <a:solidFill>
+                  <a:srgbClr val="003B4F"/>
+                </a:solidFill>
+                <a:latin typeface="Courier"/>
+              </a:rPr>
+              <a:t>one_tailed_model</a:t>
+            </a:r>
+          </a:p>
+          <a:p>
+            <a:pPr lvl="0" indent="0">
+              <a:buNone/>
+            </a:pPr>
+            <a:r>
+              <a:rPr>
+                <a:latin typeface="Courier"/>
+              </a:rPr>
+              <a:t>
+    One Sample t-test
+data:  shady_df$needle_length_mm
+t = -0.87183, df = 3, p-value = 0.2237
+alternative hypothesis: true mean is less than 15
+95 percent confidence interval:
+     -Inf 16.49382
+sample estimates:
+mean of x 
+ 14.12094 </a:t>
+            </a:r>
+          </a:p>
+        </p:txBody>
+      </p:sp>
+      <p:sp>
+        <p:nvSpPr>
+          <p:cNvPr id="4" name="Content Placeholder 3"/>
+          <p:cNvSpPr>
+            <a:spLocks noGrp="1"/>
+          </p:cNvSpPr>
+          <p:nvPr>
+            <p:ph idx="2" sz="half"/>
+          </p:nvPr>
+        </p:nvSpPr>
+        <p:spPr/>
+        <p:txBody>
+          <a:bodyPr/>
+          <a:lstStyle/>
+          <a:p>
+            <a:pPr lvl="0" indent="0" marL="1270000">
+              <a:buNone/>
+            </a:pPr>
+            <a:r>
+              <a:rPr sz="2000" b="1"/>
+              <a:t>Note</a:t>
+            </a:r>
+          </a:p>
+          <a:p>
+            <a:pPr lvl="0" indent="0" marL="1270000">
+              <a:buNone/>
+            </a:pPr>
+            <a:r>
+              <a:rPr sz="2000" b="1"/>
+              <a:t>✅ Key idea</a:t>
+            </a:r>
+          </a:p>
+          <a:p>
+            <a:pPr lvl="0" indent="0" marL="1270000">
+              <a:buNone/>
+            </a:pPr>
+            <a:r>
+              <a:rPr sz="2000">
+                <a:latin typeface="Courier"/>
+              </a:rPr>
+              <a:t>alternative = "less"</a:t>
+            </a:r>
+            <a:r>
+              <a:rPr sz="2000"/>
+              <a:t> or </a:t>
+            </a:r>
+            <a:r>
+              <a:rPr sz="2000">
+                <a:latin typeface="Courier"/>
+              </a:rPr>
+              <a:t>"greater"</a:t>
+            </a:r>
+            <a:r>
+              <a:rPr sz="2000"/>
+              <a:t> is the </a:t>
+            </a:r>
+            <a:r>
+              <a:rPr sz="2000" i="1"/>
+              <a:t>only</a:t>
+            </a:r>
+            <a:r>
+              <a:rPr sz="2000"/>
+              <a:t> thing that changed. Same data, same t, same </a:t>
+            </a:r>
+            <a:r>
+              <a:rPr sz="2000" b="1"/>
+              <a:t>df = 3</a:t>
+            </a:r>
+            <a:r>
+              <a:rPr sz="2000"/>
+              <a:t>.</a:t>
+            </a:r>
+          </a:p>
+          <a:p>
+            <a:pPr lvl="0" indent="0" marL="1270000">
+              <a:buNone/>
+            </a:pPr>
+            <a:r>
+              <a:rPr sz="2000"/>
+              <a:t>Compare the two p-values:</a:t>
+            </a:r>
+          </a:p>
+          <a:p>
+            <a:pPr lvl="0" indent="0" marL="1270000">
+              <a:buNone/>
+            </a:pPr>
+            <a:r>
+              <a:rPr sz="2000" b="1"/>
+              <a:t>Exactly half.</a:t>
+            </a:r>
+            <a:r>
+              <a:rPr sz="2000"/>
+              <a:t> All of α now sits in one tail, so the observed t only has to beat one cutoff instead of two.</a:t>
+            </a:r>
+          </a:p>
+          <a:p>
+            <a:pPr lvl="0" indent="0" marL="1270000">
+              <a:buNone/>
+            </a:pPr>
+            <a:r>
+              <a:rPr sz="2000" b="1"/>
+              <a:t>Warning</a:t>
+            </a:r>
+          </a:p>
+          <a:p>
+            <a:pPr lvl="0" indent="0" marL="1270000">
+              <a:buNone/>
+            </a:pPr>
+            <a:r>
+              <a:rPr sz="2000" b="1"/>
+              <a:t>⚠️ Notice the confidence interval changed too</a:t>
+            </a:r>
+          </a:p>
+          <a:p>
+            <a:pPr lvl="0" indent="0" marL="1270000">
+              <a:buNone/>
+            </a:pPr>
+            <a:r>
+              <a:rPr sz="2000"/>
+              <a:t>It now runs from </a:t>
+            </a:r>
+            <a:r>
+              <a:rPr sz="2000" b="1"/>
+              <a:t>−Inf</a:t>
+            </a:r>
+            <a:r>
+              <a:rPr sz="2000"/>
+              <a:t> to an upper bound. A one-tailed test makes no claim in the direction you ruled out.</a:t>
+            </a:r>
+          </a:p>
+        </p:txBody>
+      </p:sp>
+    </p:spTree>
+  </p:cSld>
+</p:sld>
+</file>
+
+<file path=ppt/slides/slide3.xml><?xml version="1.0" encoding="utf-8"?>
+<p:sld xmlns:a="http://schemas.openxmlformats.org/drawingml/2006/main" xmlns:r="http://schemas.openxmlformats.org/officeDocument/2006/relationships" xmlns:p="http://schemas.openxmlformats.org/presentationml/2006/main">
+  <p:cSld>
+    <p:spTree>
+      <p:nvGrpSpPr>
+        <p:cNvPr id="1" name=""/>
+        <p:cNvGrpSpPr/>
+        <p:nvPr/>
+      </p:nvGrpSpPr>
+      <p:grpSpPr>
+        <a:xfrm>
+          <a:off x="0" y="0"/>
+          <a:ext cx="0" cy="0"/>
+          <a:chOff x="0" y="0"/>
+          <a:chExt cx="0" cy="0"/>
+        </a:xfrm>
+      </p:grpSpPr>
+      <p:sp>
+        <p:nvSpPr>
+          <p:cNvPr id="2" name="Title 1"/>
+          <p:cNvSpPr>
+            <a:spLocks noGrp="1"/>
+          </p:cNvSpPr>
+          <p:nvPr>
+            <p:ph type="title"/>
+          </p:nvPr>
+        </p:nvSpPr>
+        <p:spPr>
+          <a:xfrm>
+            <a:off x="0" y="0"/>
+            <a:ext cx="9144000" cy="582780"/>
+          </a:xfrm>
+        </p:spPr>
+        <p:txBody>
+          <a:bodyPr/>
+          <a:lstStyle/>
+          <a:p>
+            <a:pPr lvl="0" indent="0" marL="0">
+              <a:buNone/>
+            </a:pPr>
+            <a:r>
+              <a:rPr/>
+              <a:t>Part 1 · Our Data</a:t>
+            </a:r>
+          </a:p>
+        </p:txBody>
+      </p:sp>
+    </p:spTree>
+  </p:cSld>
+</p:sld>
+</file>
+
+<file path=ppt/slides/slide30.xml><?xml version="1.0" encoding="utf-8"?>
+<p:sld xmlns:a="http://schemas.openxmlformats.org/drawingml/2006/main" xmlns:r="http://schemas.openxmlformats.org/officeDocument/2006/relationships" xmlns:p="http://schemas.openxmlformats.org/presentationml/2006/main">
+  <p:cSld>
+    <p:spTree>
+      <p:nvGrpSpPr>
+        <p:cNvPr id="1" name=""/>
+        <p:cNvGrpSpPr/>
+        <p:nvPr/>
+      </p:nvGrpSpPr>
+      <p:grpSpPr>
+        <a:xfrm>
+          <a:off x="0" y="0"/>
+          <a:ext cx="0" cy="0"/>
+          <a:chOff x="0" y="0"/>
+          <a:chExt cx="0" cy="0"/>
+        </a:xfrm>
+      </p:grpSpPr>
+      <p:sp>
+        <p:nvSpPr>
+          <p:cNvPr id="2" name="Title 1"/>
+          <p:cNvSpPr>
+            <a:spLocks noGrp="1"/>
+          </p:cNvSpPr>
+          <p:nvPr>
+            <p:ph type="title"/>
+          </p:nvPr>
+        </p:nvSpPr>
+        <p:spPr>
+          <a:xfrm>
+            <a:off x="0" y="0"/>
+            <a:ext cx="9144000" cy="602780"/>
+          </a:xfrm>
+          <a:solidFill>
+            <a:srgbClr val="70121D"/>
+          </a:solidFill>
+        </p:spPr>
+        <p:txBody>
+          <a:bodyPr/>
+          <a:lstStyle/>
+          <a:p>
+            <a:pPr lvl="0" indent="0" marL="0">
+              <a:buNone/>
+            </a:pPr>
+            <a:r>
+              <a:rPr/>
+              <a:t>One-Tailed vs. Two-Tailed — What It Costs You</a:t>
+            </a:r>
+          </a:p>
+        </p:txBody>
+      </p:sp>
+      <p:sp>
+        <p:nvSpPr>
+          <p:cNvPr id="3" name="Content Placeholder 2"/>
+          <p:cNvSpPr>
+            <a:spLocks noGrp="1"/>
+          </p:cNvSpPr>
+          <p:nvPr>
+            <p:ph idx="1" sz="half"/>
+          </p:nvPr>
+        </p:nvSpPr>
+        <p:spPr/>
+        <p:txBody>
+          <a:bodyPr/>
+          <a:lstStyle/>
+          <a:p>
             <a:pPr lvl="0" indent="0" marL="0">
               <a:buNone/>
             </a:pPr>
@@ -10075,13 +10317,152 @@
               <a:t>). That is the extra power — a smaller t will do.</a:t>
             </a:r>
           </a:p>
+        </p:txBody>
+      </p:sp>
+      <p:sp>
+        <p:nvSpPr>
+          <p:cNvPr id="4" name="Content Placeholder 3"/>
+          <p:cNvSpPr>
+            <a:spLocks noGrp="1"/>
+          </p:cNvSpPr>
+          <p:nvPr>
+            <p:ph idx="2" sz="half"/>
+          </p:nvPr>
+        </p:nvSpPr>
+        <p:spPr/>
+        <p:txBody>
+          <a:bodyPr/>
+          <a:lstStyle/>
+          <a:p>
+            <a:pPr lvl="0" indent="0" marL="1270000">
+              <a:buNone/>
+            </a:pPr>
+            <a:r>
+              <a:rPr sz="2000" b="1"/>
+              <a:t>Important</a:t>
+            </a:r>
+          </a:p>
+          <a:p>
+            <a:pPr lvl="0" indent="0" marL="1270000">
+              <a:buNone/>
+            </a:pPr>
+            <a:r>
+              <a:rPr sz="2000" b="1"/>
+              <a:t>⚠️ The rule that makes one-tailed tests honest</a:t>
+            </a:r>
+          </a:p>
+          <a:p>
+            <a:pPr lvl="0" indent="0" marL="1270000">
+              <a:buNone/>
+            </a:pPr>
+            <a:r>
+              <a:rPr sz="2000"/>
+              <a:t>You must pick the direction </a:t>
+            </a:r>
+            <a:r>
+              <a:rPr sz="2000" b="1"/>
+              <a:t>before you see the data</a:t>
+            </a:r>
+            <a:r>
+              <a:rPr sz="2000"/>
+              <a:t>, on biological grounds, and you must accept that a result in the </a:t>
+            </a:r>
+            <a:r>
+              <a:rPr sz="2000" i="1"/>
+              <a:t>other</a:t>
+            </a:r>
+            <a:r>
+              <a:rPr sz="2000"/>
+              <a:t> direction tells you nothing — no matter how big it is.</a:t>
+            </a:r>
+          </a:p>
+          <a:p>
+            <a:pPr lvl="0" indent="0" marL="1270000">
+              <a:buNone/>
+            </a:pPr>
+            <a:r>
+              <a:rPr sz="2000"/>
+              <a:t>Choosing the tail after looking at your means is not a one-tailed test. It is a two-tailed test with the p-value secretly halved.</a:t>
+            </a:r>
+          </a:p>
+        </p:txBody>
+      </p:sp>
+    </p:spTree>
+  </p:cSld>
+</p:sld>
+</file>
+
+<file path=ppt/slides/slide31.xml><?xml version="1.0" encoding="utf-8"?>
+<p:sld xmlns:a="http://schemas.openxmlformats.org/drawingml/2006/main" xmlns:r="http://schemas.openxmlformats.org/officeDocument/2006/relationships" xmlns:p="http://schemas.openxmlformats.org/presentationml/2006/main">
+  <p:cSld>
+    <p:spTree>
+      <p:nvGrpSpPr>
+        <p:cNvPr id="1" name=""/>
+        <p:cNvGrpSpPr/>
+        <p:nvPr/>
+      </p:nvGrpSpPr>
+      <p:grpSpPr>
+        <a:xfrm>
+          <a:off x="0" y="0"/>
+          <a:ext cx="0" cy="0"/>
+          <a:chOff x="0" y="0"/>
+          <a:chExt cx="0" cy="0"/>
+        </a:xfrm>
+      </p:grpSpPr>
+      <p:sp>
+        <p:nvSpPr>
+          <p:cNvPr id="2" name="Title 1"/>
+          <p:cNvSpPr>
+            <a:spLocks noGrp="1"/>
+          </p:cNvSpPr>
+          <p:nvPr>
+            <p:ph type="title"/>
+          </p:nvPr>
+        </p:nvSpPr>
+        <p:spPr>
+          <a:xfrm>
+            <a:off x="0" y="0"/>
+            <a:ext cx="9144000" cy="602780"/>
+          </a:xfrm>
+          <a:solidFill>
+            <a:srgbClr val="70121D"/>
+          </a:solidFill>
+        </p:spPr>
+        <p:txBody>
+          <a:bodyPr/>
+          <a:lstStyle/>
           <a:p>
             <a:pPr lvl="0" indent="0" marL="0">
               <a:buNone/>
             </a:pPr>
             <a:r>
               <a:rPr/>
-              <a:t>But run it the other way and watch what happens:</a:t>
+              <a:t>One-Tailed, the Wrong Direction</a:t>
+            </a:r>
+          </a:p>
+        </p:txBody>
+      </p:sp>
+      <p:sp>
+        <p:nvSpPr>
+          <p:cNvPr id="3" name="Content Placeholder 2"/>
+          <p:cNvSpPr>
+            <a:spLocks noGrp="1"/>
+          </p:cNvSpPr>
+          <p:nvPr>
+            <p:ph idx="1" sz="half"/>
+          </p:nvPr>
+        </p:nvSpPr>
+        <p:spPr/>
+        <p:txBody>
+          <a:bodyPr/>
+          <a:lstStyle/>
+          <a:p>
+            <a:pPr lvl="0" indent="0" marL="0">
+              <a:buNone/>
+            </a:pPr>
+            <a:r>
+              <a:rPr/>
+              <a:t>But run the same one-tailed test the other way and watch what happens:</a:t>
             </a:r>
           </a:p>
           <a:p>
@@ -10266,58 +10647,6 @@
             </a:pPr>
             <a:r>
               <a:rPr sz="2000" b="1"/>
-              <a:t>Important</a:t>
-            </a:r>
-          </a:p>
-          <a:p>
-            <a:pPr lvl="0" indent="0" marL="1270000">
-              <a:buNone/>
-            </a:pPr>
-            <a:r>
-              <a:rPr sz="2000" b="1"/>
-              <a:t>⚠️ The rule that makes one-tailed tests honest</a:t>
-            </a:r>
-          </a:p>
-          <a:p>
-            <a:pPr lvl="0" indent="0" marL="1270000">
-              <a:buNone/>
-            </a:pPr>
-            <a:r>
-              <a:rPr sz="2000"/>
-              <a:t>You must pick the direction </a:t>
-            </a:r>
-            <a:r>
-              <a:rPr sz="2000" b="1"/>
-              <a:t>before you see the data</a:t>
-            </a:r>
-            <a:r>
-              <a:rPr sz="2000"/>
-              <a:t>, on biological grounds, and you must accept that a result in the </a:t>
-            </a:r>
-            <a:r>
-              <a:rPr sz="2000" i="1"/>
-              <a:t>other</a:t>
-            </a:r>
-            <a:r>
-              <a:rPr sz="2000"/>
-              <a:t> direction tells you nothing — no matter how big it is.</a:t>
-            </a:r>
-          </a:p>
-          <a:p>
-            <a:pPr lvl="0" indent="0" marL="1270000">
-              <a:buNone/>
-            </a:pPr>
-            <a:r>
-              <a:rPr sz="2000"/>
-              <a:t>Choosing the tail after looking at your means is not a one-tailed test. It is a two-tailed test with the p-value secretly halved.</a:t>
-            </a:r>
-          </a:p>
-          <a:p>
-            <a:pPr lvl="0" indent="0" marL="1270000">
-              <a:buNone/>
-            </a:pPr>
-            <a:r>
-              <a:rPr sz="2000" b="1"/>
               <a:t>Tip</a:t>
             </a:r>
           </a:p>
@@ -10375,7 +10704,7 @@
 </p:sld>
 </file>
 
-<file path=ppt/slides/slide29.xml><?xml version="1.0" encoding="utf-8"?>
+<file path=ppt/slides/slide32.xml><?xml version="1.0" encoding="utf-8"?>
 <p:sld xmlns:a="http://schemas.openxmlformats.org/drawingml/2006/main" xmlns:r="http://schemas.openxmlformats.org/officeDocument/2006/relationships" xmlns:p="http://schemas.openxmlformats.org/presentationml/2006/main">
   <p:cSld>
     <p:spTree>
@@ -10538,59 +10867,7 @@
 </p:sld>
 </file>
 
-<file path=ppt/slides/slide3.xml><?xml version="1.0" encoding="utf-8"?>
-<p:sld xmlns:a="http://schemas.openxmlformats.org/drawingml/2006/main" xmlns:r="http://schemas.openxmlformats.org/officeDocument/2006/relationships" xmlns:p="http://schemas.openxmlformats.org/presentationml/2006/main">
-  <p:cSld>
-    <p:spTree>
-      <p:nvGrpSpPr>
-        <p:cNvPr id="1" name=""/>
-        <p:cNvGrpSpPr/>
-        <p:nvPr/>
-      </p:nvGrpSpPr>
-      <p:grpSpPr>
-        <a:xfrm>
-          <a:off x="0" y="0"/>
-          <a:ext cx="0" cy="0"/>
-          <a:chOff x="0" y="0"/>
-          <a:chExt cx="0" cy="0"/>
-        </a:xfrm>
-      </p:grpSpPr>
-      <p:sp>
-        <p:nvSpPr>
-          <p:cNvPr id="2" name="Title 1"/>
-          <p:cNvSpPr>
-            <a:spLocks noGrp="1"/>
-          </p:cNvSpPr>
-          <p:nvPr>
-            <p:ph type="title"/>
-          </p:nvPr>
-        </p:nvSpPr>
-        <p:spPr>
-          <a:xfrm>
-            <a:off x="0" y="0"/>
-            <a:ext cx="9144000" cy="582780"/>
-          </a:xfrm>
-        </p:spPr>
-        <p:txBody>
-          <a:bodyPr/>
-          <a:lstStyle/>
-          <a:p>
-            <a:pPr lvl="0" indent="0" marL="0">
-              <a:buNone/>
-            </a:pPr>
-            <a:r>
-              <a:rPr/>
-              <a:t>Part 1 · Our Data</a:t>
-            </a:r>
-          </a:p>
-        </p:txBody>
-      </p:sp>
-    </p:spTree>
-  </p:cSld>
-</p:sld>
-</file>
-
-<file path=ppt/slides/slide30.xml><?xml version="1.0" encoding="utf-8"?>
+<file path=ppt/slides/slide33.xml><?xml version="1.0" encoding="utf-8"?>
 <p:sld xmlns:a="http://schemas.openxmlformats.org/drawingml/2006/main" xmlns:r="http://schemas.openxmlformats.org/officeDocument/2006/relationships" xmlns:p="http://schemas.openxmlformats.org/presentationml/2006/main">
   <p:cSld>
     <p:spTree>
@@ -10735,7 +11012,7 @@
 </p:sld>
 </file>
 
-<file path=ppt/slides/slide31.xml><?xml version="1.0" encoding="utf-8"?>
+<file path=ppt/slides/slide34.xml><?xml version="1.0" encoding="utf-8"?>
 <p:sld xmlns:a="http://schemas.openxmlformats.org/drawingml/2006/main" xmlns:r="http://schemas.openxmlformats.org/officeDocument/2006/relationships" xmlns:p="http://schemas.openxmlformats.org/presentationml/2006/main">
   <p:cSld>
     <p:spTree>
@@ -10938,7 +11215,7 @@
 </p:sld>
 </file>
 
-<file path=ppt/slides/slide32.xml><?xml version="1.0" encoding="utf-8"?>
+<file path=ppt/slides/slide35.xml><?xml version="1.0" encoding="utf-8"?>
 <p:sld xmlns:a="http://schemas.openxmlformats.org/drawingml/2006/main" xmlns:r="http://schemas.openxmlformats.org/officeDocument/2006/relationships" xmlns:p="http://schemas.openxmlformats.org/presentationml/2006/main">
   <p:cSld>
     <p:spTree>
@@ -10990,7 +11267,7 @@
 </p:sld>
 </file>
 
-<file path=ppt/slides/slide33.xml><?xml version="1.0" encoding="utf-8"?>
+<file path=ppt/slides/slide36.xml><?xml version="1.0" encoding="utf-8"?>
 <p:sld xmlns:a="http://schemas.openxmlformats.org/drawingml/2006/main" xmlns:r="http://schemas.openxmlformats.org/officeDocument/2006/relationships" xmlns:p="http://schemas.openxmlformats.org/presentationml/2006/main">
   <p:cSld>
     <p:spTree>
@@ -11287,7 +11564,7 @@
 </p:sld>
 </file>
 
-<file path=ppt/slides/slide34.xml><?xml version="1.0" encoding="utf-8"?>
+<file path=ppt/slides/slide37.xml><?xml version="1.0" encoding="utf-8"?>
 <p:sld xmlns:a="http://schemas.openxmlformats.org/drawingml/2006/main" xmlns:r="http://schemas.openxmlformats.org/officeDocument/2006/relationships" xmlns:p="http://schemas.openxmlformats.org/presentationml/2006/main">
   <p:cSld>
     <p:spTree>
@@ -11693,964 +11970,6 @@
 </p:sld>
 </file>
 
-<file path=ppt/slides/slide35.xml><?xml version="1.0" encoding="utf-8"?>
-<p:sld xmlns:a="http://schemas.openxmlformats.org/drawingml/2006/main" xmlns:r="http://schemas.openxmlformats.org/officeDocument/2006/relationships" xmlns:p="http://schemas.openxmlformats.org/presentationml/2006/main">
-  <p:cSld>
-    <p:spTree>
-      <p:nvGrpSpPr>
-        <p:cNvPr id="1" name=""/>
-        <p:cNvGrpSpPr/>
-        <p:nvPr/>
-      </p:nvGrpSpPr>
-      <p:grpSpPr>
-        <a:xfrm>
-          <a:off x="0" y="0"/>
-          <a:ext cx="0" cy="0"/>
-          <a:chOff x="0" y="0"/>
-          <a:chExt cx="0" cy="0"/>
-        </a:xfrm>
-      </p:grpSpPr>
-      <p:sp>
-        <p:nvSpPr>
-          <p:cNvPr id="2" name="Title 1"/>
-          <p:cNvSpPr>
-            <a:spLocks noGrp="1"/>
-          </p:cNvSpPr>
-          <p:nvPr>
-            <p:ph type="title"/>
-          </p:nvPr>
-        </p:nvSpPr>
-        <p:spPr>
-          <a:xfrm>
-            <a:off x="0" y="0"/>
-            <a:ext cx="9144000" cy="602780"/>
-          </a:xfrm>
-          <a:solidFill>
-            <a:srgbClr val="70121D"/>
-          </a:solidFill>
-        </p:spPr>
-        <p:txBody>
-          <a:bodyPr/>
-          <a:lstStyle/>
-          <a:p>
-            <a:pPr lvl="0" indent="0" marL="0">
-              <a:buNone/>
-            </a:pPr>
-            <a:r>
-              <a:rPr/>
-              <a:t>Checking Assumptions — Normality by Group</a:t>
-            </a:r>
-          </a:p>
-        </p:txBody>
-      </p:sp>
-      <p:sp>
-        <p:nvSpPr>
-          <p:cNvPr id="3" name="Content Placeholder 2"/>
-          <p:cNvSpPr>
-            <a:spLocks noGrp="1"/>
-          </p:cNvSpPr>
-          <p:nvPr>
-            <p:ph idx="1" sz="half"/>
-          </p:nvPr>
-        </p:nvSpPr>
-        <p:spPr/>
-        <p:txBody>
-          <a:bodyPr/>
-          <a:lstStyle/>
-          <a:p>
-            <a:pPr lvl="0" indent="0">
-              <a:buNone/>
-            </a:pPr>
-            <a:r>
-              <a:rPr>
-                <a:solidFill>
-                  <a:srgbClr val="003B4F"/>
-                </a:solidFill>
-                <a:latin typeface="Courier"/>
-              </a:rPr>
-              <a:t>p_df </a:t>
-            </a:r>
-            <a:r>
-              <a:rPr>
-                <a:solidFill>
-                  <a:srgbClr val="5E5E5E"/>
-                </a:solidFill>
-                <a:latin typeface="Courier"/>
-              </a:rPr>
-              <a:t>%&gt;%</a:t>
-            </a:r>
-            <a:br/>
-            <a:r>
-              <a:rPr>
-                <a:solidFill>
-                  <a:srgbClr val="003B4F"/>
-                </a:solidFill>
-                <a:latin typeface="Courier"/>
-              </a:rPr>
-              <a:t>  </a:t>
-            </a:r>
-            <a:r>
-              <a:rPr>
-                <a:solidFill>
-                  <a:srgbClr val="4758AB"/>
-                </a:solidFill>
-                <a:latin typeface="Courier"/>
-              </a:rPr>
-              <a:t>group_by</a:t>
-            </a:r>
-            <a:r>
-              <a:rPr>
-                <a:solidFill>
-                  <a:srgbClr val="003B4F"/>
-                </a:solidFill>
-                <a:latin typeface="Courier"/>
-              </a:rPr>
-              <a:t>(side) </a:t>
-            </a:r>
-            <a:r>
-              <a:rPr>
-                <a:solidFill>
-                  <a:srgbClr val="5E5E5E"/>
-                </a:solidFill>
-                <a:latin typeface="Courier"/>
-              </a:rPr>
-              <a:t>%&gt;%</a:t>
-            </a:r>
-            <a:br/>
-            <a:r>
-              <a:rPr>
-                <a:solidFill>
-                  <a:srgbClr val="003B4F"/>
-                </a:solidFill>
-                <a:latin typeface="Courier"/>
-              </a:rPr>
-              <a:t>  </a:t>
-            </a:r>
-            <a:r>
-              <a:rPr>
-                <a:solidFill>
-                  <a:srgbClr val="4758AB"/>
-                </a:solidFill>
-                <a:latin typeface="Courier"/>
-              </a:rPr>
-              <a:t>summarize</a:t>
-            </a:r>
-            <a:r>
-              <a:rPr>
-                <a:solidFill>
-                  <a:srgbClr val="003B4F"/>
-                </a:solidFill>
-                <a:latin typeface="Courier"/>
-              </a:rPr>
-              <a:t>(</a:t>
-            </a:r>
-            <a:br/>
-            <a:r>
-              <a:rPr>
-                <a:solidFill>
-                  <a:srgbClr val="003B4F"/>
-                </a:solidFill>
-                <a:latin typeface="Courier"/>
-              </a:rPr>
-              <a:t>    </a:t>
-            </a:r>
-            <a:r>
-              <a:rPr>
-                <a:solidFill>
-                  <a:srgbClr val="657422"/>
-                </a:solidFill>
-                <a:latin typeface="Courier"/>
-              </a:rPr>
-              <a:t>shapiro_p =</a:t>
-            </a:r>
-            <a:r>
-              <a:rPr>
-                <a:solidFill>
-                  <a:srgbClr val="003B4F"/>
-                </a:solidFill>
-                <a:latin typeface="Courier"/>
-              </a:rPr>
-              <a:t> </a:t>
-            </a:r>
-            <a:r>
-              <a:rPr>
-                <a:solidFill>
-                  <a:srgbClr val="4758AB"/>
-                </a:solidFill>
-                <a:latin typeface="Courier"/>
-              </a:rPr>
-              <a:t>shapiro.test</a:t>
-            </a:r>
-            <a:r>
-              <a:rPr>
-                <a:solidFill>
-                  <a:srgbClr val="003B4F"/>
-                </a:solidFill>
-                <a:latin typeface="Courier"/>
-              </a:rPr>
-              <a:t>(needle_length_mm)</a:t>
-            </a:r>
-            <a:r>
-              <a:rPr>
-                <a:solidFill>
-                  <a:srgbClr val="5E5E5E"/>
-                </a:solidFill>
-                <a:latin typeface="Courier"/>
-              </a:rPr>
-              <a:t>$</a:t>
-            </a:r>
-            <a:r>
-              <a:rPr>
-                <a:solidFill>
-                  <a:srgbClr val="003B4F"/>
-                </a:solidFill>
-                <a:latin typeface="Courier"/>
-              </a:rPr>
-              <a:t>p.value,</a:t>
-            </a:r>
-            <a:br/>
-            <a:r>
-              <a:rPr>
-                <a:solidFill>
-                  <a:srgbClr val="003B4F"/>
-                </a:solidFill>
-                <a:latin typeface="Courier"/>
-              </a:rPr>
-              <a:t>    </a:t>
-            </a:r>
-            <a:r>
-              <a:rPr>
-                <a:solidFill>
-                  <a:srgbClr val="657422"/>
-                </a:solidFill>
-                <a:latin typeface="Courier"/>
-              </a:rPr>
-              <a:t>.groups =</a:t>
-            </a:r>
-            <a:r>
-              <a:rPr>
-                <a:solidFill>
-                  <a:srgbClr val="003B4F"/>
-                </a:solidFill>
-                <a:latin typeface="Courier"/>
-              </a:rPr>
-              <a:t> </a:t>
-            </a:r>
-            <a:r>
-              <a:rPr>
-                <a:solidFill>
-                  <a:srgbClr val="20794D"/>
-                </a:solidFill>
-                <a:latin typeface="Courier"/>
-              </a:rPr>
-              <a:t>"drop"</a:t>
-            </a:r>
-            <a:r>
-              <a:rPr>
-                <a:solidFill>
-                  <a:srgbClr val="003B4F"/>
-                </a:solidFill>
-                <a:latin typeface="Courier"/>
-              </a:rPr>
-              <a:t>)</a:t>
-            </a:r>
-          </a:p>
-          <a:p>
-            <a:pPr lvl="0" indent="0">
-              <a:buNone/>
-            </a:pPr>
-            <a:r>
-              <a:rPr>
-                <a:latin typeface="Courier"/>
-              </a:rPr>
-              <a:t># A tibble: 2 × 2
-  side  shapiro_p
-  &lt;chr&gt;     &lt;dbl&gt;
-1 shady     0.674
-2 sunny     0.516</a:t>
-            </a:r>
-          </a:p>
-        </p:txBody>
-      </p:sp>
-      <p:sp>
-        <p:nvSpPr>
-          <p:cNvPr id="4" name="Content Placeholder 3"/>
-          <p:cNvSpPr>
-            <a:spLocks noGrp="1"/>
-          </p:cNvSpPr>
-          <p:nvPr>
-            <p:ph idx="2" sz="half"/>
-          </p:nvPr>
-        </p:nvSpPr>
-        <p:spPr/>
-        <p:txBody>
-          <a:bodyPr/>
-          <a:lstStyle/>
-          <a:p>
-            <a:pPr lvl="0" indent="0" marL="1270000">
-              <a:buNone/>
-            </a:pPr>
-            <a:r>
-              <a:rPr sz="2000" b="1"/>
-              <a:t>Tip</a:t>
-            </a:r>
-          </a:p>
-          <a:p>
-            <a:pPr lvl="0" indent="0" marL="1270000">
-              <a:buNone/>
-            </a:pPr>
-            <a:r>
-              <a:rPr sz="2000" b="1"/>
-              <a:t>🖐 Each group separately</a:t>
-            </a:r>
-          </a:p>
-          <a:p>
-            <a:pPr lvl="0" indent="0" marL="1270000">
-              <a:buNone/>
-            </a:pPr>
-            <a:r>
-              <a:rPr sz="2000"/>
-              <a:t>For a two-sample test the normality assumption is about the </a:t>
-            </a:r>
-            <a:r>
-              <a:rPr sz="2000" i="1"/>
-              <a:t>residuals within each group</a:t>
-            </a:r>
-            <a:r>
-              <a:rPr sz="2000"/>
-              <a:t>, so test each side on its own — never the pooled column.</a:t>
-            </a:r>
-          </a:p>
-        </p:txBody>
-      </p:sp>
-    </p:spTree>
-  </p:cSld>
-</p:sld>
-</file>
-
-<file path=ppt/slides/slide36.xml><?xml version="1.0" encoding="utf-8"?>
-<p:sld xmlns:a="http://schemas.openxmlformats.org/drawingml/2006/main" xmlns:r="http://schemas.openxmlformats.org/officeDocument/2006/relationships" xmlns:p="http://schemas.openxmlformats.org/presentationml/2006/main">
-  <p:cSld>
-    <p:spTree>
-      <p:nvGrpSpPr>
-        <p:cNvPr id="1" name=""/>
-        <p:cNvGrpSpPr/>
-        <p:nvPr/>
-      </p:nvGrpSpPr>
-      <p:grpSpPr>
-        <a:xfrm>
-          <a:off x="0" y="0"/>
-          <a:ext cx="0" cy="0"/>
-          <a:chOff x="0" y="0"/>
-          <a:chExt cx="0" cy="0"/>
-        </a:xfrm>
-      </p:grpSpPr>
-      <p:sp>
-        <p:nvSpPr>
-          <p:cNvPr id="2" name="Title 1"/>
-          <p:cNvSpPr>
-            <a:spLocks noGrp="1"/>
-          </p:cNvSpPr>
-          <p:nvPr>
-            <p:ph type="title"/>
-          </p:nvPr>
-        </p:nvSpPr>
-        <p:spPr>
-          <a:xfrm>
-            <a:off x="0" y="0"/>
-            <a:ext cx="9144000" cy="602780"/>
-          </a:xfrm>
-          <a:solidFill>
-            <a:srgbClr val="70121D"/>
-          </a:solidFill>
-        </p:spPr>
-        <p:txBody>
-          <a:bodyPr/>
-          <a:lstStyle/>
-          <a:p>
-            <a:pPr lvl="0" indent="0" marL="0">
-              <a:buNone/>
-            </a:pPr>
-            <a:r>
-              <a:rPr/>
-              <a:t>Checking Assumptions — Equal Variances</a:t>
-            </a:r>
-          </a:p>
-        </p:txBody>
-      </p:sp>
-      <p:sp>
-        <p:nvSpPr>
-          <p:cNvPr id="3" name="Content Placeholder 2"/>
-          <p:cNvSpPr>
-            <a:spLocks noGrp="1"/>
-          </p:cNvSpPr>
-          <p:nvPr>
-            <p:ph idx="1" sz="half"/>
-          </p:nvPr>
-        </p:nvSpPr>
-        <p:spPr/>
-        <p:txBody>
-          <a:bodyPr/>
-          <a:lstStyle/>
-          <a:p>
-            <a:pPr lvl="0" indent="0">
-              <a:buNone/>
-            </a:pPr>
-            <a:r>
-              <a:rPr>
-                <a:solidFill>
-                  <a:srgbClr val="4758AB"/>
-                </a:solidFill>
-                <a:latin typeface="Courier"/>
-              </a:rPr>
-              <a:t>leveneTest</a:t>
-            </a:r>
-            <a:r>
-              <a:rPr>
-                <a:solidFill>
-                  <a:srgbClr val="003B4F"/>
-                </a:solidFill>
-                <a:latin typeface="Courier"/>
-              </a:rPr>
-              <a:t>(needle_length_mm </a:t>
-            </a:r>
-            <a:r>
-              <a:rPr>
-                <a:solidFill>
-                  <a:srgbClr val="5E5E5E"/>
-                </a:solidFill>
-                <a:latin typeface="Courier"/>
-              </a:rPr>
-              <a:t>~</a:t>
-            </a:r>
-            <a:r>
-              <a:rPr>
-                <a:solidFill>
-                  <a:srgbClr val="003B4F"/>
-                </a:solidFill>
-                <a:latin typeface="Courier"/>
-              </a:rPr>
-              <a:t> </a:t>
-            </a:r>
-            <a:r>
-              <a:rPr>
-                <a:solidFill>
-                  <a:srgbClr val="4758AB"/>
-                </a:solidFill>
-                <a:latin typeface="Courier"/>
-              </a:rPr>
-              <a:t>factor</a:t>
-            </a:r>
-            <a:r>
-              <a:rPr>
-                <a:solidFill>
-                  <a:srgbClr val="003B4F"/>
-                </a:solidFill>
-                <a:latin typeface="Courier"/>
-              </a:rPr>
-              <a:t>(side), </a:t>
-            </a:r>
-            <a:r>
-              <a:rPr>
-                <a:solidFill>
-                  <a:srgbClr val="657422"/>
-                </a:solidFill>
-                <a:latin typeface="Courier"/>
-              </a:rPr>
-              <a:t>data =</a:t>
-            </a:r>
-            <a:r>
-              <a:rPr>
-                <a:solidFill>
-                  <a:srgbClr val="003B4F"/>
-                </a:solidFill>
-                <a:latin typeface="Courier"/>
-              </a:rPr>
-              <a:t> p_df)</a:t>
-            </a:r>
-          </a:p>
-          <a:p>
-            <a:pPr lvl="0" indent="0">
-              <a:buNone/>
-            </a:pPr>
-            <a:r>
-              <a:rPr>
-                <a:latin typeface="Courier"/>
-              </a:rPr>
-              <a:t>Levene's Test for Homogeneity of Variance (center = median)
-      Df F value Pr(&gt;F)
-group  1  0.6355 0.4557
-       6               </a:t>
-            </a:r>
-          </a:p>
-        </p:txBody>
-      </p:sp>
-      <p:sp>
-        <p:nvSpPr>
-          <p:cNvPr id="4" name="Content Placeholder 3"/>
-          <p:cNvSpPr>
-            <a:spLocks noGrp="1"/>
-          </p:cNvSpPr>
-          <p:nvPr>
-            <p:ph idx="2" sz="half"/>
-          </p:nvPr>
-        </p:nvSpPr>
-        <p:spPr/>
-        <p:txBody>
-          <a:bodyPr/>
-          <a:lstStyle/>
-          <a:p>
-            <a:pPr lvl="0" indent="0" marL="1270000">
-              <a:buNone/>
-            </a:pPr>
-            <a:r>
-              <a:rPr sz="2000" b="1"/>
-              <a:t>Important</a:t>
-            </a:r>
-          </a:p>
-          <a:p>
-            <a:pPr lvl="0" indent="0" marL="1270000">
-              <a:buNone/>
-            </a:pPr>
-            <a:r>
-              <a:rPr sz="2000" b="1"/>
-              <a:t>H₀ for Levene’s test is “the variances are equal.”</a:t>
-            </a:r>
-          </a:p>
-          <a:p>
-            <a:pPr lvl="0" indent="0" marL="1270000">
-              <a:buNone/>
-            </a:pPr>
-            <a:r>
-              <a:rPr sz="2000"/>
-              <a:t>You </a:t>
-            </a:r>
-            <a:r>
-              <a:rPr sz="2000" i="1"/>
-              <a:t>want</a:t>
-            </a:r>
-            <a:r>
-              <a:rPr sz="2000"/>
-              <a:t> a non-significant result. If p &gt; 0.05, the standard (Student’s) t-test is fine. If p &lt; 0.05, use Welch’s.</a:t>
-            </a:r>
-          </a:p>
-          <a:p>
-            <a:pPr lvl="0" indent="0" marL="1270000">
-              <a:buNone/>
-            </a:pPr>
-            <a:r>
-              <a:rPr sz="2000">
-                <a:latin typeface="Courier"/>
-              </a:rPr>
-              <a:t>leveneTest()</a:t>
-            </a:r>
-            <a:r>
-              <a:rPr sz="2000"/>
-              <a:t> needs the grouping variable as a factor.</a:t>
-            </a:r>
-          </a:p>
-        </p:txBody>
-      </p:sp>
-    </p:spTree>
-  </p:cSld>
-</p:sld>
-</file>
-
-<file path=ppt/slides/slide37.xml><?xml version="1.0" encoding="utf-8"?>
-<p:sld xmlns:a="http://schemas.openxmlformats.org/drawingml/2006/main" xmlns:r="http://schemas.openxmlformats.org/officeDocument/2006/relationships" xmlns:p="http://schemas.openxmlformats.org/presentationml/2006/main">
-  <p:cSld>
-    <p:spTree>
-      <p:nvGrpSpPr>
-        <p:cNvPr id="1" name=""/>
-        <p:cNvGrpSpPr/>
-        <p:nvPr/>
-      </p:nvGrpSpPr>
-      <p:grpSpPr>
-        <a:xfrm>
-          <a:off x="0" y="0"/>
-          <a:ext cx="0" cy="0"/>
-          <a:chOff x="0" y="0"/>
-          <a:chExt cx="0" cy="0"/>
-        </a:xfrm>
-      </p:grpSpPr>
-      <p:sp>
-        <p:nvSpPr>
-          <p:cNvPr id="2" name="Title 1"/>
-          <p:cNvSpPr>
-            <a:spLocks noGrp="1"/>
-          </p:cNvSpPr>
-          <p:nvPr>
-            <p:ph type="title"/>
-          </p:nvPr>
-        </p:nvSpPr>
-        <p:spPr>
-          <a:xfrm>
-            <a:off x="0" y="0"/>
-            <a:ext cx="9144000" cy="602780"/>
-          </a:xfrm>
-          <a:solidFill>
-            <a:srgbClr val="70121D"/>
-          </a:solidFill>
-        </p:spPr>
-        <p:txBody>
-          <a:bodyPr/>
-          <a:lstStyle/>
-          <a:p>
-            <a:pPr lvl="0" indent="0" marL="0">
-              <a:buNone/>
-            </a:pPr>
-            <a:r>
-              <a:rPr/>
-              <a:t>Conducting the Two-Sample T-Test</a:t>
-            </a:r>
-          </a:p>
-        </p:txBody>
-      </p:sp>
-      <p:sp>
-        <p:nvSpPr>
-          <p:cNvPr id="3" name="Content Placeholder 2"/>
-          <p:cNvSpPr>
-            <a:spLocks noGrp="1"/>
-          </p:cNvSpPr>
-          <p:nvPr>
-            <p:ph idx="1" sz="half"/>
-          </p:nvPr>
-        </p:nvSpPr>
-        <p:spPr/>
-        <p:txBody>
-          <a:bodyPr/>
-          <a:lstStyle/>
-          <a:p>
-            <a:pPr lvl="0" indent="0" marL="0">
-              <a:buNone/>
-            </a:pPr>
-            <a:r>
-              <a:rPr b="1"/>
-              <a:t>Standard (Student’s) — equal variances</a:t>
-            </a:r>
-          </a:p>
-          <a:p>
-            <a:pPr lvl="0" indent="0">
-              <a:buNone/>
-            </a:pPr>
-            <a:r>
-              <a:rPr>
-                <a:solidFill>
-                  <a:srgbClr val="003B4F"/>
-                </a:solidFill>
-                <a:latin typeface="Courier"/>
-              </a:rPr>
-              <a:t>two_sample_model &lt;- </a:t>
-            </a:r>
-            <a:r>
-              <a:rPr>
-                <a:solidFill>
-                  <a:srgbClr val="4758AB"/>
-                </a:solidFill>
-                <a:latin typeface="Courier"/>
-              </a:rPr>
-              <a:t>t.test</a:t>
-            </a:r>
-            <a:r>
-              <a:rPr>
-                <a:solidFill>
-                  <a:srgbClr val="003B4F"/>
-                </a:solidFill>
-                <a:latin typeface="Courier"/>
-              </a:rPr>
-              <a:t>(needle_length_mm </a:t>
-            </a:r>
-            <a:r>
-              <a:rPr>
-                <a:solidFill>
-                  <a:srgbClr val="5E5E5E"/>
-                </a:solidFill>
-                <a:latin typeface="Courier"/>
-              </a:rPr>
-              <a:t>~</a:t>
-            </a:r>
-            <a:r>
-              <a:rPr>
-                <a:solidFill>
-                  <a:srgbClr val="003B4F"/>
-                </a:solidFill>
-                <a:latin typeface="Courier"/>
-              </a:rPr>
-              <a:t> side,</a:t>
-            </a:r>
-            <a:br/>
-            <a:r>
-              <a:rPr>
-                <a:solidFill>
-                  <a:srgbClr val="003B4F"/>
-                </a:solidFill>
-                <a:latin typeface="Courier"/>
-              </a:rPr>
-              <a:t>                           </a:t>
-            </a:r>
-            <a:r>
-              <a:rPr>
-                <a:solidFill>
-                  <a:srgbClr val="657422"/>
-                </a:solidFill>
-                <a:latin typeface="Courier"/>
-              </a:rPr>
-              <a:t>data =</a:t>
-            </a:r>
-            <a:r>
-              <a:rPr>
-                <a:solidFill>
-                  <a:srgbClr val="003B4F"/>
-                </a:solidFill>
-                <a:latin typeface="Courier"/>
-              </a:rPr>
-              <a:t> p_df, </a:t>
-            </a:r>
-            <a:r>
-              <a:rPr>
-                <a:solidFill>
-                  <a:srgbClr val="657422"/>
-                </a:solidFill>
-                <a:latin typeface="Courier"/>
-              </a:rPr>
-              <a:t>var.equal =</a:t>
-            </a:r>
-            <a:r>
-              <a:rPr>
-                <a:solidFill>
-                  <a:srgbClr val="003B4F"/>
-                </a:solidFill>
-                <a:latin typeface="Courier"/>
-              </a:rPr>
-              <a:t> </a:t>
-            </a:r>
-            <a:r>
-              <a:rPr>
-                <a:solidFill>
-                  <a:srgbClr val="8F5902"/>
-                </a:solidFill>
-                <a:latin typeface="Courier"/>
-              </a:rPr>
-              <a:t>TRUE</a:t>
-            </a:r>
-            <a:r>
-              <a:rPr>
-                <a:solidFill>
-                  <a:srgbClr val="003B4F"/>
-                </a:solidFill>
-                <a:latin typeface="Courier"/>
-              </a:rPr>
-              <a:t>)</a:t>
-            </a:r>
-            <a:br/>
-            <a:br/>
-            <a:r>
-              <a:rPr>
-                <a:solidFill>
-                  <a:srgbClr val="003B4F"/>
-                </a:solidFill>
-                <a:latin typeface="Courier"/>
-              </a:rPr>
-              <a:t>two_sample_model</a:t>
-            </a:r>
-          </a:p>
-          <a:p>
-            <a:pPr lvl="0" indent="0">
-              <a:buNone/>
-            </a:pPr>
-            <a:r>
-              <a:rPr>
-                <a:latin typeface="Courier"/>
-              </a:rPr>
-              <a:t>
-    Two Sample t-test
-data:  needle_length_mm by side
-t = -0.85529, df = 6, p-value = 0.4252
-alternative hypothesis: true difference in means between group shady and group sunny is not equal to 0
-95 percent confidence interval:
- -4.221663  2.034788
-sample estimates:
-mean in group shady mean in group sunny 
-           14.12094            15.21438 </a:t>
-            </a:r>
-          </a:p>
-        </p:txBody>
-      </p:sp>
-      <p:sp>
-        <p:nvSpPr>
-          <p:cNvPr id="4" name="Content Placeholder 3"/>
-          <p:cNvSpPr>
-            <a:spLocks noGrp="1"/>
-          </p:cNvSpPr>
-          <p:nvPr>
-            <p:ph idx="2" sz="half"/>
-          </p:nvPr>
-        </p:nvSpPr>
-        <p:spPr/>
-        <p:txBody>
-          <a:bodyPr/>
-          <a:lstStyle/>
-          <a:p>
-            <a:pPr lvl="0" indent="0" marL="0">
-              <a:buNone/>
-            </a:pPr>
-            <a:r>
-              <a:rPr b="1"/>
-              <a:t>Welch’s — unequal variances</a:t>
-            </a:r>
-          </a:p>
-          <a:p>
-            <a:pPr lvl="0" indent="0">
-              <a:buNone/>
-            </a:pPr>
-            <a:r>
-              <a:rPr>
-                <a:solidFill>
-                  <a:srgbClr val="003B4F"/>
-                </a:solidFill>
-                <a:latin typeface="Courier"/>
-              </a:rPr>
-              <a:t>welch_model &lt;- </a:t>
-            </a:r>
-            <a:r>
-              <a:rPr>
-                <a:solidFill>
-                  <a:srgbClr val="4758AB"/>
-                </a:solidFill>
-                <a:latin typeface="Courier"/>
-              </a:rPr>
-              <a:t>t.test</a:t>
-            </a:r>
-            <a:r>
-              <a:rPr>
-                <a:solidFill>
-                  <a:srgbClr val="003B4F"/>
-                </a:solidFill>
-                <a:latin typeface="Courier"/>
-              </a:rPr>
-              <a:t>(needle_length_mm </a:t>
-            </a:r>
-            <a:r>
-              <a:rPr>
-                <a:solidFill>
-                  <a:srgbClr val="5E5E5E"/>
-                </a:solidFill>
-                <a:latin typeface="Courier"/>
-              </a:rPr>
-              <a:t>~</a:t>
-            </a:r>
-            <a:r>
-              <a:rPr>
-                <a:solidFill>
-                  <a:srgbClr val="003B4F"/>
-                </a:solidFill>
-                <a:latin typeface="Courier"/>
-              </a:rPr>
-              <a:t> side,</a:t>
-            </a:r>
-            <a:br/>
-            <a:r>
-              <a:rPr>
-                <a:solidFill>
-                  <a:srgbClr val="003B4F"/>
-                </a:solidFill>
-                <a:latin typeface="Courier"/>
-              </a:rPr>
-              <a:t>                      </a:t>
-            </a:r>
-            <a:r>
-              <a:rPr>
-                <a:solidFill>
-                  <a:srgbClr val="657422"/>
-                </a:solidFill>
-                <a:latin typeface="Courier"/>
-              </a:rPr>
-              <a:t>data =</a:t>
-            </a:r>
-            <a:r>
-              <a:rPr>
-                <a:solidFill>
-                  <a:srgbClr val="003B4F"/>
-                </a:solidFill>
-                <a:latin typeface="Courier"/>
-              </a:rPr>
-              <a:t> p_df, </a:t>
-            </a:r>
-            <a:r>
-              <a:rPr>
-                <a:solidFill>
-                  <a:srgbClr val="657422"/>
-                </a:solidFill>
-                <a:latin typeface="Courier"/>
-              </a:rPr>
-              <a:t>var.equal =</a:t>
-            </a:r>
-            <a:r>
-              <a:rPr>
-                <a:solidFill>
-                  <a:srgbClr val="003B4F"/>
-                </a:solidFill>
-                <a:latin typeface="Courier"/>
-              </a:rPr>
-              <a:t> </a:t>
-            </a:r>
-            <a:r>
-              <a:rPr>
-                <a:solidFill>
-                  <a:srgbClr val="8F5902"/>
-                </a:solidFill>
-                <a:latin typeface="Courier"/>
-              </a:rPr>
-              <a:t>FALSE</a:t>
-            </a:r>
-            <a:r>
-              <a:rPr>
-                <a:solidFill>
-                  <a:srgbClr val="003B4F"/>
-                </a:solidFill>
-                <a:latin typeface="Courier"/>
-              </a:rPr>
-              <a:t>)</a:t>
-            </a:r>
-            <a:br/>
-            <a:br/>
-            <a:r>
-              <a:rPr>
-                <a:solidFill>
-                  <a:srgbClr val="003B4F"/>
-                </a:solidFill>
-                <a:latin typeface="Courier"/>
-              </a:rPr>
-              <a:t>welch_model</a:t>
-            </a:r>
-          </a:p>
-          <a:p>
-            <a:pPr lvl="0" indent="0">
-              <a:buNone/>
-            </a:pPr>
-            <a:r>
-              <a:rPr>
-                <a:latin typeface="Courier"/>
-              </a:rPr>
-              <a:t>
-    Welch Two Sample t-test
-data:  needle_length_mm by side
-t = -0.85529, df = 5.6627, p-value = 0.4271
-alternative hypothesis: true difference in means between group shady and group sunny is not equal to 0
-95 percent confidence interval:
- -4.267394  2.080519
-sample estimates:
-mean in group shady mean in group sunny 
-           14.12094            15.21438 </a:t>
-            </a:r>
-          </a:p>
-        </p:txBody>
-      </p:sp>
-    </p:spTree>
-  </p:cSld>
-</p:sld>
-</file>
-
 <file path=ppt/slides/slide38.xml><?xml version="1.0" encoding="utf-8"?>
 <p:sld xmlns:a="http://schemas.openxmlformats.org/drawingml/2006/main" xmlns:r="http://schemas.openxmlformats.org/officeDocument/2006/relationships" xmlns:p="http://schemas.openxmlformats.org/presentationml/2006/main">
   <p:cSld>
@@ -12696,7 +12015,7 @@
             </a:pPr>
             <a:r>
               <a:rPr/>
-              <a:t>Standard vs. Welch’s t-Test</a:t>
+              <a:t>Checking Assumptions — Normality by Group</a:t>
             </a:r>
           </a:p>
         </p:txBody>
@@ -12716,60 +12035,216 @@
           <a:bodyPr/>
           <a:lstStyle/>
           <a:p>
-            <a:pPr lvl="0" indent="0" marL="0">
-              <a:buNone/>
-            </a:pPr>
-            <a:r>
-              <a:rPr b="1"/>
-              <a:t>Standard t-test (Student’s)</a:t>
-            </a:r>
-          </a:p>
-          <a:p>
-            <a:pPr lvl="0"/>
-            <a:r>
-              <a:rPr b="1"/>
-              <a:t>Assumes equal variances</a:t>
-            </a:r>
-            <a:r>
-              <a:rPr/>
-              <a:t> between groups</a:t>
-            </a:r>
-          </a:p>
-          <a:p>
-            <a:pPr lvl="0"/>
-            <a:r>
-              <a:rPr/>
-              <a:t>Uses a </a:t>
-            </a:r>
-            <a:r>
-              <a:rPr b="1"/>
-              <a:t>pooled variance estimate</a:t>
-            </a:r>
-            <a:r>
-              <a:rPr/>
-              <a:t> combining both groups</a:t>
-            </a:r>
-          </a:p>
-          <a:p>
-            <a:pPr lvl="0"/>
-            <a:r>
-              <a:rPr b="1"/>
-              <a:t>Higher power</a:t>
-            </a:r>
-            <a:r>
-              <a:rPr/>
-              <a:t> when the equal-variance assumption is met</a:t>
-            </a:r>
-          </a:p>
-          <a:p>
-            <a:pPr lvl="0"/>
-            <a:r>
-              <a:rPr b="1"/>
-              <a:t>df = n₁ + n₂ − 2 = 6</a:t>
-            </a:r>
-            <a:r>
-              <a:rPr/>
-              <a:t> — a whole number, every time</a:t>
+            <a:pPr lvl="0" indent="0">
+              <a:buNone/>
+            </a:pPr>
+            <a:r>
+              <a:rPr>
+                <a:solidFill>
+                  <a:srgbClr val="003B4F"/>
+                </a:solidFill>
+                <a:latin typeface="Courier"/>
+              </a:rPr>
+              <a:t>p_df </a:t>
+            </a:r>
+            <a:r>
+              <a:rPr>
+                <a:solidFill>
+                  <a:srgbClr val="5E5E5E"/>
+                </a:solidFill>
+                <a:latin typeface="Courier"/>
+              </a:rPr>
+              <a:t>%&gt;%</a:t>
+            </a:r>
+            <a:br/>
+            <a:r>
+              <a:rPr>
+                <a:solidFill>
+                  <a:srgbClr val="003B4F"/>
+                </a:solidFill>
+                <a:latin typeface="Courier"/>
+              </a:rPr>
+              <a:t>  </a:t>
+            </a:r>
+            <a:r>
+              <a:rPr>
+                <a:solidFill>
+                  <a:srgbClr val="4758AB"/>
+                </a:solidFill>
+                <a:latin typeface="Courier"/>
+              </a:rPr>
+              <a:t>group_by</a:t>
+            </a:r>
+            <a:r>
+              <a:rPr>
+                <a:solidFill>
+                  <a:srgbClr val="003B4F"/>
+                </a:solidFill>
+                <a:latin typeface="Courier"/>
+              </a:rPr>
+              <a:t>(side) </a:t>
+            </a:r>
+            <a:r>
+              <a:rPr>
+                <a:solidFill>
+                  <a:srgbClr val="5E5E5E"/>
+                </a:solidFill>
+                <a:latin typeface="Courier"/>
+              </a:rPr>
+              <a:t>%&gt;%</a:t>
+            </a:r>
+            <a:br/>
+            <a:r>
+              <a:rPr>
+                <a:solidFill>
+                  <a:srgbClr val="003B4F"/>
+                </a:solidFill>
+                <a:latin typeface="Courier"/>
+              </a:rPr>
+              <a:t>  </a:t>
+            </a:r>
+            <a:r>
+              <a:rPr>
+                <a:solidFill>
+                  <a:srgbClr val="4758AB"/>
+                </a:solidFill>
+                <a:latin typeface="Courier"/>
+              </a:rPr>
+              <a:t>summarize</a:t>
+            </a:r>
+            <a:r>
+              <a:rPr>
+                <a:solidFill>
+                  <a:srgbClr val="003B4F"/>
+                </a:solidFill>
+                <a:latin typeface="Courier"/>
+              </a:rPr>
+              <a:t>(</a:t>
+            </a:r>
+            <a:br/>
+            <a:r>
+              <a:rPr>
+                <a:solidFill>
+                  <a:srgbClr val="003B4F"/>
+                </a:solidFill>
+                <a:latin typeface="Courier"/>
+              </a:rPr>
+              <a:t>    </a:t>
+            </a:r>
+            <a:r>
+              <a:rPr>
+                <a:solidFill>
+                  <a:srgbClr val="657422"/>
+                </a:solidFill>
+                <a:latin typeface="Courier"/>
+              </a:rPr>
+              <a:t>shapiro_p =</a:t>
+            </a:r>
+            <a:r>
+              <a:rPr>
+                <a:solidFill>
+                  <a:srgbClr val="003B4F"/>
+                </a:solidFill>
+                <a:latin typeface="Courier"/>
+              </a:rPr>
+              <a:t> </a:t>
+            </a:r>
+            <a:r>
+              <a:rPr>
+                <a:solidFill>
+                  <a:srgbClr val="4758AB"/>
+                </a:solidFill>
+                <a:latin typeface="Courier"/>
+              </a:rPr>
+              <a:t>shapiro.test</a:t>
+            </a:r>
+            <a:r>
+              <a:rPr>
+                <a:solidFill>
+                  <a:srgbClr val="003B4F"/>
+                </a:solidFill>
+                <a:latin typeface="Courier"/>
+              </a:rPr>
+              <a:t>(needle_length_mm)</a:t>
+            </a:r>
+            <a:r>
+              <a:rPr>
+                <a:solidFill>
+                  <a:srgbClr val="5E5E5E"/>
+                </a:solidFill>
+                <a:latin typeface="Courier"/>
+              </a:rPr>
+              <a:t>$</a:t>
+            </a:r>
+            <a:r>
+              <a:rPr>
+                <a:solidFill>
+                  <a:srgbClr val="003B4F"/>
+                </a:solidFill>
+                <a:latin typeface="Courier"/>
+              </a:rPr>
+              <a:t>p.value,</a:t>
+            </a:r>
+            <a:br/>
+            <a:r>
+              <a:rPr>
+                <a:solidFill>
+                  <a:srgbClr val="003B4F"/>
+                </a:solidFill>
+                <a:latin typeface="Courier"/>
+              </a:rPr>
+              <a:t>    </a:t>
+            </a:r>
+            <a:r>
+              <a:rPr>
+                <a:solidFill>
+                  <a:srgbClr val="657422"/>
+                </a:solidFill>
+                <a:latin typeface="Courier"/>
+              </a:rPr>
+              <a:t>.groups =</a:t>
+            </a:r>
+            <a:r>
+              <a:rPr>
+                <a:solidFill>
+                  <a:srgbClr val="003B4F"/>
+                </a:solidFill>
+                <a:latin typeface="Courier"/>
+              </a:rPr>
+              <a:t> </a:t>
+            </a:r>
+            <a:r>
+              <a:rPr>
+                <a:solidFill>
+                  <a:srgbClr val="20794D"/>
+                </a:solidFill>
+                <a:latin typeface="Courier"/>
+              </a:rPr>
+              <a:t>"drop"</a:t>
+            </a:r>
+            <a:r>
+              <a:rPr>
+                <a:solidFill>
+                  <a:srgbClr val="003B4F"/>
+                </a:solidFill>
+                <a:latin typeface="Courier"/>
+              </a:rPr>
+              <a:t>)</a:t>
+            </a:r>
+          </a:p>
+          <a:p>
+            <a:pPr lvl="0" indent="0">
+              <a:buNone/>
+            </a:pPr>
+            <a:r>
+              <a:rPr>
+                <a:latin typeface="Courier"/>
+              </a:rPr>
+              <a:t># A tibble: 2 × 2
+  side  shapiro_p
+  &lt;chr&gt;     &lt;dbl&gt;
+1 shady     0.674
+2 sunny     0.516</a:t>
             </a:r>
           </a:p>
         </p:txBody>
@@ -12789,75 +12264,6 @@
           <a:bodyPr/>
           <a:lstStyle/>
           <a:p>
-            <a:pPr lvl="0" indent="0" marL="0">
-              <a:buNone/>
-            </a:pPr>
-            <a:r>
-              <a:rPr b="1"/>
-              <a:t>Welch’s t-test</a:t>
-            </a:r>
-          </a:p>
-          <a:p>
-            <a:pPr lvl="0"/>
-            <a:r>
-              <a:rPr b="1"/>
-              <a:t>Does not assume equal variances</a:t>
-            </a:r>
-          </a:p>
-          <a:p>
-            <a:pPr lvl="0"/>
-            <a:r>
-              <a:rPr/>
-              <a:t>Uses </a:t>
-            </a:r>
-            <a:r>
-              <a:rPr b="1"/>
-              <a:t>separate variance estimates</a:t>
-            </a:r>
-            <a:r>
-              <a:rPr/>
-              <a:t> for each group</a:t>
-            </a:r>
-          </a:p>
-          <a:p>
-            <a:pPr lvl="0"/>
-            <a:r>
-              <a:rPr/>
-              <a:t>More </a:t>
-            </a:r>
-            <a:r>
-              <a:rPr b="1"/>
-              <a:t>robust</a:t>
-            </a:r>
-            <a:r>
-              <a:rPr/>
-              <a:t> when group variances differ</a:t>
-            </a:r>
-          </a:p>
-          <a:p>
-            <a:pPr lvl="0"/>
-            <a:r>
-              <a:rPr b="1"/>
-              <a:t>df from the Welch–Satterthwaite equation</a:t>
-            </a:r>
-            <a:r>
-              <a:rPr/>
-              <a:t> — typically </a:t>
-            </a:r>
-            <a:r>
-              <a:rPr i="1"/>
-              <a:t>not</a:t>
-            </a:r>
-            <a:r>
-              <a:rPr/>
-              <a:t> a whole number, and always smaller than n₁ + n₂ − 2. Here </a:t>
-            </a:r>
-            <a:r>
-              <a:rPr b="1"/>
-              <a:t>df ≈ 5.66</a:t>
-            </a:r>
-          </a:p>
-          <a:p>
             <a:pPr lvl="0" indent="0" marL="1270000">
               <a:buNone/>
             </a:pPr>
@@ -12872,11 +12278,24 @@
             </a:pPr>
             <a:r>
               <a:rPr sz="2000" b="1"/>
-              <a:t>🖐 The fractional df is the price of the robustness</a:t>
-            </a:r>
-            <a:r>
-              <a:rPr sz="2000"/>
-              <a:t> — Welch’s buys safety by spending degrees of freedom.</a:t>
+              <a:t>🖐 Each group separately</a:t>
+            </a:r>
+          </a:p>
+          <a:p>
+            <a:pPr lvl="0" indent="0" marL="1270000">
+              <a:buNone/>
+            </a:pPr>
+            <a:r>
+              <a:rPr sz="2000"/>
+              <a:t>For a two-sample test the normality assumption is about the </a:t>
+            </a:r>
+            <a:r>
+              <a:rPr sz="2000" i="1"/>
+              <a:t>residuals within each group</a:t>
+            </a:r>
+            <a:r>
+              <a:rPr sz="2000"/>
+              <a:t>, so test each side on its own — never the pooled column.</a:t>
             </a:r>
           </a:p>
         </p:txBody>
@@ -12887,6 +12306,1367 @@
 </file>
 
 <file path=ppt/slides/slide39.xml><?xml version="1.0" encoding="utf-8"?>
+<p:sld xmlns:a="http://schemas.openxmlformats.org/drawingml/2006/main" xmlns:r="http://schemas.openxmlformats.org/officeDocument/2006/relationships" xmlns:p="http://schemas.openxmlformats.org/presentationml/2006/main">
+  <p:cSld>
+    <p:spTree>
+      <p:nvGrpSpPr>
+        <p:cNvPr id="1" name=""/>
+        <p:cNvGrpSpPr/>
+        <p:nvPr/>
+      </p:nvGrpSpPr>
+      <p:grpSpPr>
+        <a:xfrm>
+          <a:off x="0" y="0"/>
+          <a:ext cx="0" cy="0"/>
+          <a:chOff x="0" y="0"/>
+          <a:chExt cx="0" cy="0"/>
+        </a:xfrm>
+      </p:grpSpPr>
+      <p:sp>
+        <p:nvSpPr>
+          <p:cNvPr id="2" name="Title 1"/>
+          <p:cNvSpPr>
+            <a:spLocks noGrp="1"/>
+          </p:cNvSpPr>
+          <p:nvPr>
+            <p:ph type="title"/>
+          </p:nvPr>
+        </p:nvSpPr>
+        <p:spPr>
+          <a:xfrm>
+            <a:off x="0" y="0"/>
+            <a:ext cx="9144000" cy="602780"/>
+          </a:xfrm>
+          <a:solidFill>
+            <a:srgbClr val="70121D"/>
+          </a:solidFill>
+        </p:spPr>
+        <p:txBody>
+          <a:bodyPr/>
+          <a:lstStyle/>
+          <a:p>
+            <a:pPr lvl="0" indent="0" marL="0">
+              <a:buNone/>
+            </a:pPr>
+            <a:r>
+              <a:rPr/>
+              <a:t>Checking Assumptions — Equal Variances</a:t>
+            </a:r>
+          </a:p>
+        </p:txBody>
+      </p:sp>
+      <p:sp>
+        <p:nvSpPr>
+          <p:cNvPr id="3" name="Content Placeholder 2"/>
+          <p:cNvSpPr>
+            <a:spLocks noGrp="1"/>
+          </p:cNvSpPr>
+          <p:nvPr>
+            <p:ph idx="1" sz="half"/>
+          </p:nvPr>
+        </p:nvSpPr>
+        <p:spPr/>
+        <p:txBody>
+          <a:bodyPr/>
+          <a:lstStyle/>
+          <a:p>
+            <a:pPr lvl="0" indent="0">
+              <a:buNone/>
+            </a:pPr>
+            <a:r>
+              <a:rPr>
+                <a:solidFill>
+                  <a:srgbClr val="4758AB"/>
+                </a:solidFill>
+                <a:latin typeface="Courier"/>
+              </a:rPr>
+              <a:t>leveneTest</a:t>
+            </a:r>
+            <a:r>
+              <a:rPr>
+                <a:solidFill>
+                  <a:srgbClr val="003B4F"/>
+                </a:solidFill>
+                <a:latin typeface="Courier"/>
+              </a:rPr>
+              <a:t>(needle_length_mm </a:t>
+            </a:r>
+            <a:r>
+              <a:rPr>
+                <a:solidFill>
+                  <a:srgbClr val="5E5E5E"/>
+                </a:solidFill>
+                <a:latin typeface="Courier"/>
+              </a:rPr>
+              <a:t>~</a:t>
+            </a:r>
+            <a:r>
+              <a:rPr>
+                <a:solidFill>
+                  <a:srgbClr val="003B4F"/>
+                </a:solidFill>
+                <a:latin typeface="Courier"/>
+              </a:rPr>
+              <a:t> </a:t>
+            </a:r>
+            <a:r>
+              <a:rPr>
+                <a:solidFill>
+                  <a:srgbClr val="4758AB"/>
+                </a:solidFill>
+                <a:latin typeface="Courier"/>
+              </a:rPr>
+              <a:t>factor</a:t>
+            </a:r>
+            <a:r>
+              <a:rPr>
+                <a:solidFill>
+                  <a:srgbClr val="003B4F"/>
+                </a:solidFill>
+                <a:latin typeface="Courier"/>
+              </a:rPr>
+              <a:t>(side), </a:t>
+            </a:r>
+            <a:r>
+              <a:rPr>
+                <a:solidFill>
+                  <a:srgbClr val="657422"/>
+                </a:solidFill>
+                <a:latin typeface="Courier"/>
+              </a:rPr>
+              <a:t>data =</a:t>
+            </a:r>
+            <a:r>
+              <a:rPr>
+                <a:solidFill>
+                  <a:srgbClr val="003B4F"/>
+                </a:solidFill>
+                <a:latin typeface="Courier"/>
+              </a:rPr>
+              <a:t> p_df)</a:t>
+            </a:r>
+          </a:p>
+          <a:p>
+            <a:pPr lvl="0" indent="0">
+              <a:buNone/>
+            </a:pPr>
+            <a:r>
+              <a:rPr>
+                <a:latin typeface="Courier"/>
+              </a:rPr>
+              <a:t>Levene's Test for Homogeneity of Variance (center = median)
+      Df F value Pr(&gt;F)
+group  1  0.6355 0.4557
+       6               </a:t>
+            </a:r>
+          </a:p>
+        </p:txBody>
+      </p:sp>
+      <p:sp>
+        <p:nvSpPr>
+          <p:cNvPr id="4" name="Content Placeholder 3"/>
+          <p:cNvSpPr>
+            <a:spLocks noGrp="1"/>
+          </p:cNvSpPr>
+          <p:nvPr>
+            <p:ph idx="2" sz="half"/>
+          </p:nvPr>
+        </p:nvSpPr>
+        <p:spPr/>
+        <p:txBody>
+          <a:bodyPr/>
+          <a:lstStyle/>
+          <a:p>
+            <a:pPr lvl="0" indent="0" marL="1270000">
+              <a:buNone/>
+            </a:pPr>
+            <a:r>
+              <a:rPr sz="2000" b="1"/>
+              <a:t>Important</a:t>
+            </a:r>
+          </a:p>
+          <a:p>
+            <a:pPr lvl="0" indent="0" marL="1270000">
+              <a:buNone/>
+            </a:pPr>
+            <a:r>
+              <a:rPr sz="2000" b="1"/>
+              <a:t>H₀ for Levene’s test is “the variances are equal.”</a:t>
+            </a:r>
+          </a:p>
+          <a:p>
+            <a:pPr lvl="0" indent="0" marL="1270000">
+              <a:buNone/>
+            </a:pPr>
+            <a:r>
+              <a:rPr sz="2000"/>
+              <a:t>You </a:t>
+            </a:r>
+            <a:r>
+              <a:rPr sz="2000" i="1"/>
+              <a:t>want</a:t>
+            </a:r>
+            <a:r>
+              <a:rPr sz="2000"/>
+              <a:t> a non-significant result. If p &gt; 0.05, the standard (Student’s) t-test is fine. If p &lt; 0.05, use Welch’s.</a:t>
+            </a:r>
+          </a:p>
+          <a:p>
+            <a:pPr lvl="0" indent="0" marL="1270000">
+              <a:buNone/>
+            </a:pPr>
+            <a:r>
+              <a:rPr sz="2000">
+                <a:latin typeface="Courier"/>
+              </a:rPr>
+              <a:t>leveneTest()</a:t>
+            </a:r>
+            <a:r>
+              <a:rPr sz="2000"/>
+              <a:t> needs the grouping variable as a factor.</a:t>
+            </a:r>
+          </a:p>
+        </p:txBody>
+      </p:sp>
+    </p:spTree>
+  </p:cSld>
+</p:sld>
+</file>
+
+<file path=ppt/slides/slide4.xml><?xml version="1.0" encoding="utf-8"?>
+<p:sld xmlns:a="http://schemas.openxmlformats.org/drawingml/2006/main" xmlns:r="http://schemas.openxmlformats.org/officeDocument/2006/relationships" xmlns:p="http://schemas.openxmlformats.org/presentationml/2006/main">
+  <p:cSld>
+    <p:spTree>
+      <p:nvGrpSpPr>
+        <p:cNvPr id="1" name=""/>
+        <p:cNvGrpSpPr/>
+        <p:nvPr/>
+      </p:nvGrpSpPr>
+      <p:grpSpPr>
+        <a:xfrm>
+          <a:off x="0" y="0"/>
+          <a:ext cx="0" cy="0"/>
+          <a:chOff x="0" y="0"/>
+          <a:chExt cx="0" cy="0"/>
+        </a:xfrm>
+      </p:grpSpPr>
+      <p:sp>
+        <p:nvSpPr>
+          <p:cNvPr id="2" name="Title 1"/>
+          <p:cNvSpPr>
+            <a:spLocks noGrp="1"/>
+          </p:cNvSpPr>
+          <p:nvPr>
+            <p:ph type="title"/>
+          </p:nvPr>
+        </p:nvSpPr>
+        <p:spPr>
+          <a:xfrm>
+            <a:off x="0" y="0"/>
+            <a:ext cx="9144000" cy="602780"/>
+          </a:xfrm>
+          <a:solidFill>
+            <a:srgbClr val="70121D"/>
+          </a:solidFill>
+        </p:spPr>
+        <p:txBody>
+          <a:bodyPr/>
+          <a:lstStyle/>
+          <a:p>
+            <a:pPr lvl="0" indent="0" marL="0">
+              <a:buNone/>
+            </a:pPr>
+            <a:r>
+              <a:rPr/>
+              <a:t>Setup — One </a:t>
+            </a:r>
+            <a:r>
+              <a:rPr>
+                <a:latin typeface="Courier"/>
+              </a:rPr>
+              <a:t>source()</a:t>
+            </a:r>
+            <a:r>
+              <a:rPr/>
+              <a:t> Line, Two Tools</a:t>
+            </a:r>
+          </a:p>
+        </p:txBody>
+      </p:sp>
+      <p:sp>
+        <p:nvSpPr>
+          <p:cNvPr id="3" name="Content Placeholder 2"/>
+          <p:cNvSpPr>
+            <a:spLocks noGrp="1"/>
+          </p:cNvSpPr>
+          <p:nvPr>
+            <p:ph idx="1" sz="half"/>
+          </p:nvPr>
+        </p:nvSpPr>
+        <p:spPr/>
+        <p:txBody>
+          <a:bodyPr/>
+          <a:lstStyle/>
+          <a:p>
+            <a:pPr lvl="0" indent="0">
+              <a:buNone/>
+            </a:pPr>
+            <a:r>
+              <a:rPr>
+                <a:solidFill>
+                  <a:srgbClr val="4758AB"/>
+                </a:solidFill>
+                <a:latin typeface="Courier"/>
+              </a:rPr>
+              <a:t>library</a:t>
+            </a:r>
+            <a:r>
+              <a:rPr>
+                <a:solidFill>
+                  <a:srgbClr val="003B4F"/>
+                </a:solidFill>
+                <a:latin typeface="Courier"/>
+              </a:rPr>
+              <a:t>(tidyverse)</a:t>
+            </a:r>
+            <a:br/>
+            <a:r>
+              <a:rPr>
+                <a:solidFill>
+                  <a:srgbClr val="4758AB"/>
+                </a:solidFill>
+                <a:latin typeface="Courier"/>
+              </a:rPr>
+              <a:t>library</a:t>
+            </a:r>
+            <a:r>
+              <a:rPr>
+                <a:solidFill>
+                  <a:srgbClr val="003B4F"/>
+                </a:solidFill>
+                <a:latin typeface="Courier"/>
+              </a:rPr>
+              <a:t>(janitor)</a:t>
+            </a:r>
+            <a:br/>
+            <a:r>
+              <a:rPr>
+                <a:solidFill>
+                  <a:srgbClr val="4758AB"/>
+                </a:solidFill>
+                <a:latin typeface="Courier"/>
+              </a:rPr>
+              <a:t>library</a:t>
+            </a:r>
+            <a:r>
+              <a:rPr>
+                <a:solidFill>
+                  <a:srgbClr val="003B4F"/>
+                </a:solidFill>
+                <a:latin typeface="Courier"/>
+              </a:rPr>
+              <a:t>(car)   </a:t>
+            </a:r>
+            <a:r>
+              <a:rPr>
+                <a:solidFill>
+                  <a:srgbClr val="5E5E5E"/>
+                </a:solidFill>
+                <a:latin typeface="Courier"/>
+              </a:rPr>
+              <a:t># qqPlot(), leveneTest()</a:t>
+            </a:r>
+            <a:br/>
+            <a:br/>
+            <a:r>
+              <a:rPr>
+                <a:solidFill>
+                  <a:srgbClr val="4758AB"/>
+                </a:solidFill>
+                <a:latin typeface="Courier"/>
+              </a:rPr>
+              <a:t>source</a:t>
+            </a:r>
+            <a:r>
+              <a:rPr>
+                <a:solidFill>
+                  <a:srgbClr val="003B4F"/>
+                </a:solidFill>
+                <a:latin typeface="Courier"/>
+              </a:rPr>
+              <a:t>(</a:t>
+            </a:r>
+            <a:r>
+              <a:rPr>
+                <a:solidFill>
+                  <a:srgbClr val="20794D"/>
+                </a:solidFill>
+                <a:latin typeface="Courier"/>
+              </a:rPr>
+              <a:t>"themes_functions/r_themes_and_functions.R"</a:t>
+            </a:r>
+            <a:r>
+              <a:rPr>
+                <a:solidFill>
+                  <a:srgbClr val="003B4F"/>
+                </a:solidFill>
+                <a:latin typeface="Courier"/>
+              </a:rPr>
+              <a:t>)</a:t>
+            </a:r>
+            <a:br/>
+            <a:br/>
+            <a:r>
+              <a:rPr>
+                <a:solidFill>
+                  <a:srgbClr val="003B4F"/>
+                </a:solidFill>
+                <a:latin typeface="Courier"/>
+              </a:rPr>
+              <a:t>pine_df &lt;- </a:t>
+            </a:r>
+            <a:r>
+              <a:rPr>
+                <a:solidFill>
+                  <a:srgbClr val="4758AB"/>
+                </a:solidFill>
+                <a:latin typeface="Courier"/>
+              </a:rPr>
+              <a:t>read_csv</a:t>
+            </a:r>
+            <a:r>
+              <a:rPr>
+                <a:solidFill>
+                  <a:srgbClr val="003B4F"/>
+                </a:solidFill>
+                <a:latin typeface="Courier"/>
+              </a:rPr>
+              <a:t>(</a:t>
+            </a:r>
+            <a:r>
+              <a:rPr>
+                <a:solidFill>
+                  <a:srgbClr val="20794D"/>
+                </a:solidFill>
+                <a:latin typeface="Courier"/>
+              </a:rPr>
+              <a:t>"data/pine_data.csv"</a:t>
+            </a:r>
+            <a:r>
+              <a:rPr>
+                <a:solidFill>
+                  <a:srgbClr val="003B4F"/>
+                </a:solidFill>
+                <a:latin typeface="Courier"/>
+              </a:rPr>
+              <a:t>)</a:t>
+            </a:r>
+            <a:br/>
+            <a:br/>
+            <a:r>
+              <a:rPr>
+                <a:solidFill>
+                  <a:srgbClr val="003B4F"/>
+                </a:solidFill>
+                <a:latin typeface="Courier"/>
+              </a:rPr>
+              <a:t>pine_df</a:t>
+            </a:r>
+          </a:p>
+          <a:p>
+            <a:pPr lvl="0" indent="0">
+              <a:buNone/>
+            </a:pPr>
+            <a:r>
+              <a:rPr>
+                <a:latin typeface="Courier"/>
+              </a:rPr>
+              <a:t># A tibble: 64 × 6
+   source_file            team  replicate side  needle_length_mm needle_width_mm
+   &lt;chr&gt;                  &lt;chr&gt;     &lt;dbl&gt; &lt;chr&gt;            &lt;dbl&gt;           &lt;dbl&gt;
+ 1 Bartell_Shingledecker… grac…         1 sunny             18.4            0.79
+ 2 Bartell_Shingledecker… grac…         2 sunny             12.5            0.99
+ 3 Bartell_Shingledecker… grac…         3 sunny             17.7            1.12
+ 4 Bartell_Shingledecker… grac…         4 sunny             14.0            0.94
+ 5 Bartell_Shingledecker… grac…         5 sunny             14.2            1   
+ 6 Bartell_Shingledecker… grac…         6 sunny             19.2            0.99
+ 7 Bartell_Shingledecker… grac…         7 sunny             10.9            0.81
+ 8 Bartell_Shingledecker… grac…         8 sunny             17.3            1.29
+ 9 Bartell_Shingledecker… grac…         1 shady             16.6            0.75
+10 Bartell_Shingledecker… grac…         2 shady             17.0            0.84
+# ℹ 54 more rows</a:t>
+            </a:r>
+          </a:p>
+          <a:p>
+            <a:pPr lvl="0" indent="0" marL="0">
+              <a:buNone/>
+            </a:pPr>
+            <a:r>
+              <a:rPr>
+                <a:hlinkClick r:id="rId2"/>
+              </a:rPr>
+              <a:t>📥 Download the data</a:t>
+            </a:r>
+            <a:r>
+              <a:rPr/>
+              <a:t> </a:t>
+            </a:r>
+            <a:r>
+              <a:rPr>
+                <a:hlinkClick r:id="rId3"/>
+              </a:rPr>
+              <a:t>📥 Download the tools script</a:t>
+            </a:r>
+          </a:p>
+        </p:txBody>
+      </p:sp>
+      <p:sp>
+        <p:nvSpPr>
+          <p:cNvPr id="4" name="Content Placeholder 3"/>
+          <p:cNvSpPr>
+            <a:spLocks noGrp="1"/>
+          </p:cNvSpPr>
+          <p:nvPr>
+            <p:ph idx="2" sz="half"/>
+          </p:nvPr>
+        </p:nvSpPr>
+        <p:spPr/>
+        <p:txBody>
+          <a:bodyPr/>
+          <a:lstStyle/>
+          <a:p>
+            <a:pPr lvl="0" indent="0" marL="1270000">
+              <a:buNone/>
+            </a:pPr>
+            <a:r>
+              <a:rPr sz="2000" b="1"/>
+              <a:t>Note</a:t>
+            </a:r>
+          </a:p>
+          <a:p>
+            <a:pPr lvl="0" indent="0" marL="1270000">
+              <a:buNone/>
+            </a:pPr>
+            <a:r>
+              <a:rPr sz="2000" b="1"/>
+              <a:t>✅ What </a:t>
+            </a:r>
+            <a:r>
+              <a:rPr sz="2000" b="1">
+                <a:latin typeface="Courier"/>
+              </a:rPr>
+              <a:t>source()</a:t>
+            </a:r>
+            <a:r>
+              <a:rPr sz="2000" b="1"/>
+              <a:t> just gave you</a:t>
+            </a:r>
+          </a:p>
+          <a:p>
+            <a:pPr lvl="0"/>
+            <a:r>
+              <a:rPr sz="2000">
+                <a:latin typeface="Courier"/>
+              </a:rPr>
+              <a:t>theme_regular()</a:t>
+            </a:r>
+            <a:r>
+              <a:rPr sz="2000"/>
+              <a:t> — the publication theme from the Graphing lecture</a:t>
+            </a:r>
+          </a:p>
+          <a:p>
+            <a:pPr lvl="0"/>
+            <a:r>
+              <a:rPr sz="2000">
+                <a:latin typeface="Courier"/>
+              </a:rPr>
+              <a:t>summary_stats()</a:t>
+            </a:r>
+            <a:r>
+              <a:rPr sz="2000"/>
+              <a:t> — hand it a column of numbers, get back </a:t>
+            </a:r>
+            <a:r>
+              <a:rPr sz="2000">
+                <a:latin typeface="Courier"/>
+              </a:rPr>
+              <a:t>n</a:t>
+            </a:r>
+            <a:r>
+              <a:rPr sz="2000"/>
+              <a:t>, </a:t>
+            </a:r>
+            <a:r>
+              <a:rPr sz="2000">
+                <a:latin typeface="Courier"/>
+              </a:rPr>
+              <a:t>mean</a:t>
+            </a:r>
+            <a:r>
+              <a:rPr sz="2000"/>
+              <a:t>, </a:t>
+            </a:r>
+            <a:r>
+              <a:rPr sz="2000">
+                <a:latin typeface="Courier"/>
+              </a:rPr>
+              <a:t>sd</a:t>
+            </a:r>
+            <a:r>
+              <a:rPr sz="2000"/>
+              <a:t>, </a:t>
+            </a:r>
+            <a:r>
+              <a:rPr sz="2000">
+                <a:latin typeface="Courier"/>
+              </a:rPr>
+              <a:t>se</a:t>
+            </a:r>
+            <a:r>
+              <a:rPr sz="2000"/>
+              <a:t> and a 95% CI</a:t>
+            </a:r>
+          </a:p>
+          <a:p>
+            <a:pPr lvl="0" indent="0" marL="1270000">
+              <a:buNone/>
+            </a:pPr>
+            <a:r>
+              <a:rPr sz="2000"/>
+              <a:t>Save the file in a </a:t>
+            </a:r>
+            <a:r>
+              <a:rPr sz="2000" b="1">
+                <a:latin typeface="Courier"/>
+              </a:rPr>
+              <a:t>themes_functions/</a:t>
+            </a:r>
+            <a:r>
+              <a:rPr sz="2000"/>
+              <a:t> folder in your project and this exact line works. One line at the top of a script, and both tools are available for the rest of the semester — fix the theme once, and every figure in every script updates.</a:t>
+            </a:r>
+          </a:p>
+          <a:p>
+            <a:pPr lvl="0" indent="0" marL="1270000">
+              <a:buNone/>
+            </a:pPr>
+            <a:r>
+              <a:rPr sz="2000" b="1"/>
+              <a:t>Tip</a:t>
+            </a:r>
+          </a:p>
+          <a:p>
+            <a:pPr lvl="0" indent="0" marL="1270000">
+              <a:buNone/>
+            </a:pPr>
+            <a:r>
+              <a:rPr sz="2000" b="1"/>
+              <a:t>🖐 Recap</a:t>
+            </a:r>
+          </a:p>
+          <a:p>
+            <a:pPr lvl="0" indent="0" marL="1270000">
+              <a:buNone/>
+            </a:pPr>
+            <a:r>
+              <a:rPr sz="2000"/>
+              <a:t>This is the data </a:t>
+            </a:r>
+            <a:r>
+              <a:rPr sz="2000" b="1"/>
+              <a:t>you</a:t>
+            </a:r>
+            <a:r>
+              <a:rPr sz="2000"/>
+              <a:t> collected: </a:t>
+            </a:r>
+            <a:r>
+              <a:rPr sz="2000">
+                <a:latin typeface="Courier"/>
+              </a:rPr>
+              <a:t>team</a:t>
+            </a:r>
+            <a:r>
+              <a:rPr sz="2000"/>
+              <a:t> is your field team (one tree each), </a:t>
+            </a:r>
+            <a:r>
+              <a:rPr sz="2000">
+                <a:latin typeface="Courier"/>
+              </a:rPr>
+              <a:t>side</a:t>
+            </a:r>
+            <a:r>
+              <a:rPr sz="2000"/>
+              <a:t> is sunny vs. shady, </a:t>
+            </a:r>
+            <a:r>
+              <a:rPr sz="2000">
+                <a:latin typeface="Courier"/>
+              </a:rPr>
+              <a:t>replicate</a:t>
+            </a:r>
+            <a:r>
+              <a:rPr sz="2000"/>
+              <a:t> is which of the 8 needles.</a:t>
+            </a:r>
+          </a:p>
+          <a:p>
+            <a:pPr lvl="0" indent="0" marL="1270000">
+              <a:buNone/>
+            </a:pPr>
+            <a:r>
+              <a:rPr sz="2000"/>
+              <a:t>64 rows — but only </a:t>
+            </a:r>
+            <a:r>
+              <a:rPr sz="2000" b="1"/>
+              <a:t>4 trees</a:t>
+            </a:r>
+            <a:r>
+              <a:rPr sz="2000"/>
+              <a:t>.</a:t>
+            </a:r>
+          </a:p>
+        </p:txBody>
+      </p:sp>
+    </p:spTree>
+  </p:cSld>
+</p:sld>
+</file>
+
+<file path=ppt/slides/slide40.xml><?xml version="1.0" encoding="utf-8"?>
+<p:sld xmlns:a="http://schemas.openxmlformats.org/drawingml/2006/main" xmlns:r="http://schemas.openxmlformats.org/officeDocument/2006/relationships" xmlns:p="http://schemas.openxmlformats.org/presentationml/2006/main">
+  <p:cSld>
+    <p:spTree>
+      <p:nvGrpSpPr>
+        <p:cNvPr id="1" name=""/>
+        <p:cNvGrpSpPr/>
+        <p:nvPr/>
+      </p:nvGrpSpPr>
+      <p:grpSpPr>
+        <a:xfrm>
+          <a:off x="0" y="0"/>
+          <a:ext cx="0" cy="0"/>
+          <a:chOff x="0" y="0"/>
+          <a:chExt cx="0" cy="0"/>
+        </a:xfrm>
+      </p:grpSpPr>
+      <p:sp>
+        <p:nvSpPr>
+          <p:cNvPr id="2" name="Title 1"/>
+          <p:cNvSpPr>
+            <a:spLocks noGrp="1"/>
+          </p:cNvSpPr>
+          <p:nvPr>
+            <p:ph type="title"/>
+          </p:nvPr>
+        </p:nvSpPr>
+        <p:spPr>
+          <a:xfrm>
+            <a:off x="0" y="0"/>
+            <a:ext cx="9144000" cy="602780"/>
+          </a:xfrm>
+          <a:solidFill>
+            <a:srgbClr val="70121D"/>
+          </a:solidFill>
+        </p:spPr>
+        <p:txBody>
+          <a:bodyPr/>
+          <a:lstStyle/>
+          <a:p>
+            <a:pPr lvl="0" indent="0" marL="0">
+              <a:buNone/>
+            </a:pPr>
+            <a:r>
+              <a:rPr/>
+              <a:t>Conducting the Two-Sample T-Test</a:t>
+            </a:r>
+          </a:p>
+        </p:txBody>
+      </p:sp>
+      <p:sp>
+        <p:nvSpPr>
+          <p:cNvPr id="3" name="Content Placeholder 2"/>
+          <p:cNvSpPr>
+            <a:spLocks noGrp="1"/>
+          </p:cNvSpPr>
+          <p:nvPr>
+            <p:ph idx="1" sz="half"/>
+          </p:nvPr>
+        </p:nvSpPr>
+        <p:spPr/>
+        <p:txBody>
+          <a:bodyPr/>
+          <a:lstStyle/>
+          <a:p>
+            <a:pPr lvl="0" indent="0" marL="0">
+              <a:buNone/>
+            </a:pPr>
+            <a:r>
+              <a:rPr b="1"/>
+              <a:t>Standard (Student’s) — equal variances</a:t>
+            </a:r>
+          </a:p>
+          <a:p>
+            <a:pPr lvl="0" indent="0">
+              <a:buNone/>
+            </a:pPr>
+            <a:r>
+              <a:rPr>
+                <a:solidFill>
+                  <a:srgbClr val="003B4F"/>
+                </a:solidFill>
+                <a:latin typeface="Courier"/>
+              </a:rPr>
+              <a:t>two_sample_model &lt;- </a:t>
+            </a:r>
+            <a:r>
+              <a:rPr>
+                <a:solidFill>
+                  <a:srgbClr val="4758AB"/>
+                </a:solidFill>
+                <a:latin typeface="Courier"/>
+              </a:rPr>
+              <a:t>t.test</a:t>
+            </a:r>
+            <a:r>
+              <a:rPr>
+                <a:solidFill>
+                  <a:srgbClr val="003B4F"/>
+                </a:solidFill>
+                <a:latin typeface="Courier"/>
+              </a:rPr>
+              <a:t>(needle_length_mm </a:t>
+            </a:r>
+            <a:r>
+              <a:rPr>
+                <a:solidFill>
+                  <a:srgbClr val="5E5E5E"/>
+                </a:solidFill>
+                <a:latin typeface="Courier"/>
+              </a:rPr>
+              <a:t>~</a:t>
+            </a:r>
+            <a:r>
+              <a:rPr>
+                <a:solidFill>
+                  <a:srgbClr val="003B4F"/>
+                </a:solidFill>
+                <a:latin typeface="Courier"/>
+              </a:rPr>
+              <a:t> side,</a:t>
+            </a:r>
+            <a:br/>
+            <a:r>
+              <a:rPr>
+                <a:solidFill>
+                  <a:srgbClr val="003B4F"/>
+                </a:solidFill>
+                <a:latin typeface="Courier"/>
+              </a:rPr>
+              <a:t>                           </a:t>
+            </a:r>
+            <a:r>
+              <a:rPr>
+                <a:solidFill>
+                  <a:srgbClr val="657422"/>
+                </a:solidFill>
+                <a:latin typeface="Courier"/>
+              </a:rPr>
+              <a:t>data =</a:t>
+            </a:r>
+            <a:r>
+              <a:rPr>
+                <a:solidFill>
+                  <a:srgbClr val="003B4F"/>
+                </a:solidFill>
+                <a:latin typeface="Courier"/>
+              </a:rPr>
+              <a:t> p_df, </a:t>
+            </a:r>
+            <a:r>
+              <a:rPr>
+                <a:solidFill>
+                  <a:srgbClr val="657422"/>
+                </a:solidFill>
+                <a:latin typeface="Courier"/>
+              </a:rPr>
+              <a:t>var.equal =</a:t>
+            </a:r>
+            <a:r>
+              <a:rPr>
+                <a:solidFill>
+                  <a:srgbClr val="003B4F"/>
+                </a:solidFill>
+                <a:latin typeface="Courier"/>
+              </a:rPr>
+              <a:t> </a:t>
+            </a:r>
+            <a:r>
+              <a:rPr>
+                <a:solidFill>
+                  <a:srgbClr val="8F5902"/>
+                </a:solidFill>
+                <a:latin typeface="Courier"/>
+              </a:rPr>
+              <a:t>TRUE</a:t>
+            </a:r>
+            <a:r>
+              <a:rPr>
+                <a:solidFill>
+                  <a:srgbClr val="003B4F"/>
+                </a:solidFill>
+                <a:latin typeface="Courier"/>
+              </a:rPr>
+              <a:t>)</a:t>
+            </a:r>
+            <a:br/>
+            <a:br/>
+            <a:r>
+              <a:rPr>
+                <a:solidFill>
+                  <a:srgbClr val="003B4F"/>
+                </a:solidFill>
+                <a:latin typeface="Courier"/>
+              </a:rPr>
+              <a:t>two_sample_model</a:t>
+            </a:r>
+          </a:p>
+          <a:p>
+            <a:pPr lvl="0" indent="0">
+              <a:buNone/>
+            </a:pPr>
+            <a:r>
+              <a:rPr>
+                <a:latin typeface="Courier"/>
+              </a:rPr>
+              <a:t>
+    Two Sample t-test
+data:  needle_length_mm by side
+t = -0.85529, df = 6, p-value = 0.4252
+alternative hypothesis: true difference in means between group shady and group sunny is not equal to 0
+95 percent confidence interval:
+ -4.221663  2.034788
+sample estimates:
+mean in group shady mean in group sunny 
+           14.12094            15.21438 </a:t>
+            </a:r>
+          </a:p>
+        </p:txBody>
+      </p:sp>
+      <p:sp>
+        <p:nvSpPr>
+          <p:cNvPr id="4" name="Content Placeholder 3"/>
+          <p:cNvSpPr>
+            <a:spLocks noGrp="1"/>
+          </p:cNvSpPr>
+          <p:nvPr>
+            <p:ph idx="2" sz="half"/>
+          </p:nvPr>
+        </p:nvSpPr>
+        <p:spPr/>
+        <p:txBody>
+          <a:bodyPr/>
+          <a:lstStyle/>
+          <a:p>
+            <a:pPr lvl="0" indent="0" marL="0">
+              <a:buNone/>
+            </a:pPr>
+            <a:r>
+              <a:rPr b="1"/>
+              <a:t>Welch’s — unequal variances</a:t>
+            </a:r>
+          </a:p>
+          <a:p>
+            <a:pPr lvl="0" indent="0">
+              <a:buNone/>
+            </a:pPr>
+            <a:r>
+              <a:rPr>
+                <a:solidFill>
+                  <a:srgbClr val="003B4F"/>
+                </a:solidFill>
+                <a:latin typeface="Courier"/>
+              </a:rPr>
+              <a:t>welch_model &lt;- </a:t>
+            </a:r>
+            <a:r>
+              <a:rPr>
+                <a:solidFill>
+                  <a:srgbClr val="4758AB"/>
+                </a:solidFill>
+                <a:latin typeface="Courier"/>
+              </a:rPr>
+              <a:t>t.test</a:t>
+            </a:r>
+            <a:r>
+              <a:rPr>
+                <a:solidFill>
+                  <a:srgbClr val="003B4F"/>
+                </a:solidFill>
+                <a:latin typeface="Courier"/>
+              </a:rPr>
+              <a:t>(needle_length_mm </a:t>
+            </a:r>
+            <a:r>
+              <a:rPr>
+                <a:solidFill>
+                  <a:srgbClr val="5E5E5E"/>
+                </a:solidFill>
+                <a:latin typeface="Courier"/>
+              </a:rPr>
+              <a:t>~</a:t>
+            </a:r>
+            <a:r>
+              <a:rPr>
+                <a:solidFill>
+                  <a:srgbClr val="003B4F"/>
+                </a:solidFill>
+                <a:latin typeface="Courier"/>
+              </a:rPr>
+              <a:t> side,</a:t>
+            </a:r>
+            <a:br/>
+            <a:r>
+              <a:rPr>
+                <a:solidFill>
+                  <a:srgbClr val="003B4F"/>
+                </a:solidFill>
+                <a:latin typeface="Courier"/>
+              </a:rPr>
+              <a:t>                      </a:t>
+            </a:r>
+            <a:r>
+              <a:rPr>
+                <a:solidFill>
+                  <a:srgbClr val="657422"/>
+                </a:solidFill>
+                <a:latin typeface="Courier"/>
+              </a:rPr>
+              <a:t>data =</a:t>
+            </a:r>
+            <a:r>
+              <a:rPr>
+                <a:solidFill>
+                  <a:srgbClr val="003B4F"/>
+                </a:solidFill>
+                <a:latin typeface="Courier"/>
+              </a:rPr>
+              <a:t> p_df, </a:t>
+            </a:r>
+            <a:r>
+              <a:rPr>
+                <a:solidFill>
+                  <a:srgbClr val="657422"/>
+                </a:solidFill>
+                <a:latin typeface="Courier"/>
+              </a:rPr>
+              <a:t>var.equal =</a:t>
+            </a:r>
+            <a:r>
+              <a:rPr>
+                <a:solidFill>
+                  <a:srgbClr val="003B4F"/>
+                </a:solidFill>
+                <a:latin typeface="Courier"/>
+              </a:rPr>
+              <a:t> </a:t>
+            </a:r>
+            <a:r>
+              <a:rPr>
+                <a:solidFill>
+                  <a:srgbClr val="8F5902"/>
+                </a:solidFill>
+                <a:latin typeface="Courier"/>
+              </a:rPr>
+              <a:t>FALSE</a:t>
+            </a:r>
+            <a:r>
+              <a:rPr>
+                <a:solidFill>
+                  <a:srgbClr val="003B4F"/>
+                </a:solidFill>
+                <a:latin typeface="Courier"/>
+              </a:rPr>
+              <a:t>)</a:t>
+            </a:r>
+            <a:br/>
+            <a:br/>
+            <a:r>
+              <a:rPr>
+                <a:solidFill>
+                  <a:srgbClr val="003B4F"/>
+                </a:solidFill>
+                <a:latin typeface="Courier"/>
+              </a:rPr>
+              <a:t>welch_model</a:t>
+            </a:r>
+          </a:p>
+          <a:p>
+            <a:pPr lvl="0" indent="0">
+              <a:buNone/>
+            </a:pPr>
+            <a:r>
+              <a:rPr>
+                <a:latin typeface="Courier"/>
+              </a:rPr>
+              <a:t>
+    Welch Two Sample t-test
+data:  needle_length_mm by side
+t = -0.85529, df = 5.6627, p-value = 0.4271
+alternative hypothesis: true difference in means between group shady and group sunny is not equal to 0
+95 percent confidence interval:
+ -4.267394  2.080519
+sample estimates:
+mean in group shady mean in group sunny 
+           14.12094            15.21438 </a:t>
+            </a:r>
+          </a:p>
+        </p:txBody>
+      </p:sp>
+    </p:spTree>
+  </p:cSld>
+</p:sld>
+</file>
+
+<file path=ppt/slides/slide41.xml><?xml version="1.0" encoding="utf-8"?>
+<p:sld xmlns:a="http://schemas.openxmlformats.org/drawingml/2006/main" xmlns:r="http://schemas.openxmlformats.org/officeDocument/2006/relationships" xmlns:p="http://schemas.openxmlformats.org/presentationml/2006/main">
+  <p:cSld>
+    <p:spTree>
+      <p:nvGrpSpPr>
+        <p:cNvPr id="1" name=""/>
+        <p:cNvGrpSpPr/>
+        <p:nvPr/>
+      </p:nvGrpSpPr>
+      <p:grpSpPr>
+        <a:xfrm>
+          <a:off x="0" y="0"/>
+          <a:ext cx="0" cy="0"/>
+          <a:chOff x="0" y="0"/>
+          <a:chExt cx="0" cy="0"/>
+        </a:xfrm>
+      </p:grpSpPr>
+      <p:sp>
+        <p:nvSpPr>
+          <p:cNvPr id="2" name="Title 1"/>
+          <p:cNvSpPr>
+            <a:spLocks noGrp="1"/>
+          </p:cNvSpPr>
+          <p:nvPr>
+            <p:ph type="title"/>
+          </p:nvPr>
+        </p:nvSpPr>
+        <p:spPr>
+          <a:xfrm>
+            <a:off x="0" y="0"/>
+            <a:ext cx="9144000" cy="602780"/>
+          </a:xfrm>
+          <a:solidFill>
+            <a:srgbClr val="70121D"/>
+          </a:solidFill>
+        </p:spPr>
+        <p:txBody>
+          <a:bodyPr/>
+          <a:lstStyle/>
+          <a:p>
+            <a:pPr lvl="0" indent="0" marL="0">
+              <a:buNone/>
+            </a:pPr>
+            <a:r>
+              <a:rPr/>
+              <a:t>Standard vs. Welch’s t-Test</a:t>
+            </a:r>
+          </a:p>
+        </p:txBody>
+      </p:sp>
+      <p:sp>
+        <p:nvSpPr>
+          <p:cNvPr id="3" name="Content Placeholder 2"/>
+          <p:cNvSpPr>
+            <a:spLocks noGrp="1"/>
+          </p:cNvSpPr>
+          <p:nvPr>
+            <p:ph idx="1" sz="half"/>
+          </p:nvPr>
+        </p:nvSpPr>
+        <p:spPr/>
+        <p:txBody>
+          <a:bodyPr/>
+          <a:lstStyle/>
+          <a:p>
+            <a:pPr lvl="0" indent="0" marL="0">
+              <a:buNone/>
+            </a:pPr>
+            <a:r>
+              <a:rPr b="1"/>
+              <a:t>Standard t-test (Student’s)</a:t>
+            </a:r>
+          </a:p>
+          <a:p>
+            <a:pPr lvl="0"/>
+            <a:r>
+              <a:rPr b="1"/>
+              <a:t>Assumes equal variances</a:t>
+            </a:r>
+            <a:r>
+              <a:rPr/>
+              <a:t> between groups</a:t>
+            </a:r>
+          </a:p>
+          <a:p>
+            <a:pPr lvl="0"/>
+            <a:r>
+              <a:rPr/>
+              <a:t>Uses a </a:t>
+            </a:r>
+            <a:r>
+              <a:rPr b="1"/>
+              <a:t>pooled variance estimate</a:t>
+            </a:r>
+            <a:r>
+              <a:rPr/>
+              <a:t> combining both groups</a:t>
+            </a:r>
+          </a:p>
+          <a:p>
+            <a:pPr lvl="0"/>
+            <a:r>
+              <a:rPr b="1"/>
+              <a:t>Higher power</a:t>
+            </a:r>
+            <a:r>
+              <a:rPr/>
+              <a:t> when the equal-variance assumption is met</a:t>
+            </a:r>
+          </a:p>
+          <a:p>
+            <a:pPr lvl="0"/>
+            <a:r>
+              <a:rPr b="1"/>
+              <a:t>df = n₁ + n₂ − 2 = 6</a:t>
+            </a:r>
+            <a:r>
+              <a:rPr/>
+              <a:t> — a whole number, every time</a:t>
+            </a:r>
+          </a:p>
+        </p:txBody>
+      </p:sp>
+      <p:sp>
+        <p:nvSpPr>
+          <p:cNvPr id="4" name="Content Placeholder 3"/>
+          <p:cNvSpPr>
+            <a:spLocks noGrp="1"/>
+          </p:cNvSpPr>
+          <p:nvPr>
+            <p:ph idx="2" sz="half"/>
+          </p:nvPr>
+        </p:nvSpPr>
+        <p:spPr/>
+        <p:txBody>
+          <a:bodyPr/>
+          <a:lstStyle/>
+          <a:p>
+            <a:pPr lvl="0" indent="0" marL="0">
+              <a:buNone/>
+            </a:pPr>
+            <a:r>
+              <a:rPr b="1"/>
+              <a:t>Welch’s t-test</a:t>
+            </a:r>
+          </a:p>
+          <a:p>
+            <a:pPr lvl="0"/>
+            <a:r>
+              <a:rPr b="1"/>
+              <a:t>Does not assume equal variances</a:t>
+            </a:r>
+          </a:p>
+          <a:p>
+            <a:pPr lvl="0"/>
+            <a:r>
+              <a:rPr/>
+              <a:t>Uses </a:t>
+            </a:r>
+            <a:r>
+              <a:rPr b="1"/>
+              <a:t>separate variance estimates</a:t>
+            </a:r>
+            <a:r>
+              <a:rPr/>
+              <a:t> for each group</a:t>
+            </a:r>
+          </a:p>
+          <a:p>
+            <a:pPr lvl="0"/>
+            <a:r>
+              <a:rPr/>
+              <a:t>More </a:t>
+            </a:r>
+            <a:r>
+              <a:rPr b="1"/>
+              <a:t>robust</a:t>
+            </a:r>
+            <a:r>
+              <a:rPr/>
+              <a:t> when group variances differ</a:t>
+            </a:r>
+          </a:p>
+          <a:p>
+            <a:pPr lvl="0"/>
+            <a:r>
+              <a:rPr b="1"/>
+              <a:t>df from the Welch–Satterthwaite equation</a:t>
+            </a:r>
+            <a:r>
+              <a:rPr/>
+              <a:t> — typically </a:t>
+            </a:r>
+            <a:r>
+              <a:rPr i="1"/>
+              <a:t>not</a:t>
+            </a:r>
+            <a:r>
+              <a:rPr/>
+              <a:t> a whole number, and always smaller than n₁ + n₂ − 2. Here </a:t>
+            </a:r>
+            <a:r>
+              <a:rPr b="1"/>
+              <a:t>df ≈ 5.66</a:t>
+            </a:r>
+          </a:p>
+          <a:p>
+            <a:pPr lvl="0" indent="0" marL="1270000">
+              <a:buNone/>
+            </a:pPr>
+            <a:r>
+              <a:rPr sz="2000" b="1"/>
+              <a:t>Tip</a:t>
+            </a:r>
+          </a:p>
+          <a:p>
+            <a:pPr lvl="0" indent="0" marL="1270000">
+              <a:buNone/>
+            </a:pPr>
+            <a:r>
+              <a:rPr sz="2000" b="1"/>
+              <a:t>🖐 The fractional df is the price of the robustness</a:t>
+            </a:r>
+            <a:r>
+              <a:rPr sz="2000"/>
+              <a:t> — Welch’s buys safety by spending degrees of freedom.</a:t>
+            </a:r>
+          </a:p>
+        </p:txBody>
+      </p:sp>
+    </p:spTree>
+  </p:cSld>
+</p:sld>
+</file>
+
+<file path=ppt/slides/slide42.xml><?xml version="1.0" encoding="utf-8"?>
 <p:sld xmlns:a="http://schemas.openxmlformats.org/drawingml/2006/main" xmlns:r="http://schemas.openxmlformats.org/officeDocument/2006/relationships" xmlns:p="http://schemas.openxmlformats.org/presentationml/2006/main">
   <p:cSld>
     <p:spTree>
@@ -13048,7 +13828,7 @@
 </p:sld>
 </file>
 
-<file path=ppt/slides/slide4.xml><?xml version="1.0" encoding="utf-8"?>
+<file path=ppt/slides/slide43.xml><?xml version="1.0" encoding="utf-8"?>
 <p:sld xmlns:a="http://schemas.openxmlformats.org/drawingml/2006/main" xmlns:r="http://schemas.openxmlformats.org/officeDocument/2006/relationships" xmlns:p="http://schemas.openxmlformats.org/presentationml/2006/main">
   <p:cSld>
     <p:spTree>
@@ -13078,11 +13858,8 @@
         <p:spPr>
           <a:xfrm>
             <a:off x="0" y="0"/>
-            <a:ext cx="9144000" cy="602780"/>
+            <a:ext cx="9144000" cy="582780"/>
           </a:xfrm>
-          <a:solidFill>
-            <a:srgbClr val="70121D"/>
-          </a:solidFill>
         </p:spPr>
         <p:txBody>
           <a:bodyPr/>
@@ -13093,455 +13870,7 @@
             </a:pPr>
             <a:r>
               <a:rPr/>
-              <a:t>Setup — One </a:t>
-            </a:r>
-            <a:r>
-              <a:rPr>
-                <a:latin typeface="Courier"/>
-              </a:rPr>
-              <a:t>source()</a:t>
-            </a:r>
-            <a:r>
-              <a:rPr/>
-              <a:t> Line, Two Tools</a:t>
-            </a:r>
-          </a:p>
-        </p:txBody>
-      </p:sp>
-      <p:sp>
-        <p:nvSpPr>
-          <p:cNvPr id="3" name="Content Placeholder 2"/>
-          <p:cNvSpPr>
-            <a:spLocks noGrp="1"/>
-          </p:cNvSpPr>
-          <p:nvPr>
-            <p:ph idx="1" sz="half"/>
-          </p:nvPr>
-        </p:nvSpPr>
-        <p:spPr/>
-        <p:txBody>
-          <a:bodyPr/>
-          <a:lstStyle/>
-          <a:p>
-            <a:pPr lvl="0" indent="0">
-              <a:buNone/>
-            </a:pPr>
-            <a:r>
-              <a:rPr>
-                <a:solidFill>
-                  <a:srgbClr val="4758AB"/>
-                </a:solidFill>
-                <a:latin typeface="Courier"/>
-              </a:rPr>
-              <a:t>library</a:t>
-            </a:r>
-            <a:r>
-              <a:rPr>
-                <a:solidFill>
-                  <a:srgbClr val="003B4F"/>
-                </a:solidFill>
-                <a:latin typeface="Courier"/>
-              </a:rPr>
-              <a:t>(tidyverse)</a:t>
-            </a:r>
-            <a:br/>
-            <a:r>
-              <a:rPr>
-                <a:solidFill>
-                  <a:srgbClr val="4758AB"/>
-                </a:solidFill>
-                <a:latin typeface="Courier"/>
-              </a:rPr>
-              <a:t>library</a:t>
-            </a:r>
-            <a:r>
-              <a:rPr>
-                <a:solidFill>
-                  <a:srgbClr val="003B4F"/>
-                </a:solidFill>
-                <a:latin typeface="Courier"/>
-              </a:rPr>
-              <a:t>(janitor)</a:t>
-            </a:r>
-            <a:br/>
-            <a:r>
-              <a:rPr>
-                <a:solidFill>
-                  <a:srgbClr val="4758AB"/>
-                </a:solidFill>
-                <a:latin typeface="Courier"/>
-              </a:rPr>
-              <a:t>library</a:t>
-            </a:r>
-            <a:r>
-              <a:rPr>
-                <a:solidFill>
-                  <a:srgbClr val="003B4F"/>
-                </a:solidFill>
-                <a:latin typeface="Courier"/>
-              </a:rPr>
-              <a:t>(car)   </a:t>
-            </a:r>
-            <a:r>
-              <a:rPr>
-                <a:solidFill>
-                  <a:srgbClr val="5E5E5E"/>
-                </a:solidFill>
-                <a:latin typeface="Courier"/>
-              </a:rPr>
-              <a:t># qqPlot(), leveneTest()</a:t>
-            </a:r>
-            <a:br/>
-            <a:br/>
-            <a:r>
-              <a:rPr>
-                <a:solidFill>
-                  <a:srgbClr val="4758AB"/>
-                </a:solidFill>
-                <a:latin typeface="Courier"/>
-              </a:rPr>
-              <a:t>source</a:t>
-            </a:r>
-            <a:r>
-              <a:rPr>
-                <a:solidFill>
-                  <a:srgbClr val="003B4F"/>
-                </a:solidFill>
-                <a:latin typeface="Courier"/>
-              </a:rPr>
-              <a:t>(</a:t>
-            </a:r>
-            <a:r>
-              <a:rPr>
-                <a:solidFill>
-                  <a:srgbClr val="20794D"/>
-                </a:solidFill>
-                <a:latin typeface="Courier"/>
-              </a:rPr>
-              <a:t>"themes_functions/r_themes_and_functions.R"</a:t>
-            </a:r>
-            <a:r>
-              <a:rPr>
-                <a:solidFill>
-                  <a:srgbClr val="003B4F"/>
-                </a:solidFill>
-                <a:latin typeface="Courier"/>
-              </a:rPr>
-              <a:t>)</a:t>
-            </a:r>
-            <a:br/>
-            <a:br/>
-            <a:r>
-              <a:rPr>
-                <a:solidFill>
-                  <a:srgbClr val="003B4F"/>
-                </a:solidFill>
-                <a:latin typeface="Courier"/>
-              </a:rPr>
-              <a:t>pine_df &lt;- </a:t>
-            </a:r>
-            <a:r>
-              <a:rPr>
-                <a:solidFill>
-                  <a:srgbClr val="4758AB"/>
-                </a:solidFill>
-                <a:latin typeface="Courier"/>
-              </a:rPr>
-              <a:t>read_csv</a:t>
-            </a:r>
-            <a:r>
-              <a:rPr>
-                <a:solidFill>
-                  <a:srgbClr val="003B4F"/>
-                </a:solidFill>
-                <a:latin typeface="Courier"/>
-              </a:rPr>
-              <a:t>(</a:t>
-            </a:r>
-            <a:r>
-              <a:rPr>
-                <a:solidFill>
-                  <a:srgbClr val="20794D"/>
-                </a:solidFill>
-                <a:latin typeface="Courier"/>
-              </a:rPr>
-              <a:t>"data/pine_data.csv"</a:t>
-            </a:r>
-            <a:r>
-              <a:rPr>
-                <a:solidFill>
-                  <a:srgbClr val="003B4F"/>
-                </a:solidFill>
-                <a:latin typeface="Courier"/>
-              </a:rPr>
-              <a:t>)</a:t>
-            </a:r>
-            <a:br/>
-            <a:br/>
-            <a:r>
-              <a:rPr>
-                <a:solidFill>
-                  <a:srgbClr val="003B4F"/>
-                </a:solidFill>
-                <a:latin typeface="Courier"/>
-              </a:rPr>
-              <a:t>pine_df</a:t>
-            </a:r>
-          </a:p>
-          <a:p>
-            <a:pPr lvl="0" indent="0">
-              <a:buNone/>
-            </a:pPr>
-            <a:r>
-              <a:rPr>
-                <a:latin typeface="Courier"/>
-              </a:rPr>
-              <a:t># A tibble: 64 × 6
-   source_file            team  replicate side  needle_length_mm needle_width_mm
-   &lt;chr&gt;                  &lt;chr&gt;     &lt;dbl&gt; &lt;chr&gt;            &lt;dbl&gt;           &lt;dbl&gt;
- 1 Bartell_Shingledecker… grac…         1 sunny             18.4            0.79
- 2 Bartell_Shingledecker… grac…         2 sunny             12.5            0.99
- 3 Bartell_Shingledecker… grac…         3 sunny             17.7            1.12
- 4 Bartell_Shingledecker… grac…         4 sunny             14.0            0.94
- 5 Bartell_Shingledecker… grac…         5 sunny             14.2            1   
- 6 Bartell_Shingledecker… grac…         6 sunny             19.2            0.99
- 7 Bartell_Shingledecker… grac…         7 sunny             10.9            0.81
- 8 Bartell_Shingledecker… grac…         8 sunny             17.3            1.29
- 9 Bartell_Shingledecker… grac…         1 shady             16.6            0.75
-10 Bartell_Shingledecker… grac…         2 shady             17.0            0.84
-# ℹ 54 more rows</a:t>
-            </a:r>
-          </a:p>
-          <a:p>
-            <a:pPr lvl="0" indent="0" marL="0">
-              <a:buNone/>
-            </a:pPr>
-            <a:r>
-              <a:rPr>
-                <a:hlinkClick r:id="rId2"/>
-              </a:rPr>
-              <a:t>📥 Download the data</a:t>
-            </a:r>
-            <a:r>
-              <a:rPr/>
-              <a:t> </a:t>
-            </a:r>
-            <a:r>
-              <a:rPr>
-                <a:hlinkClick r:id="rId3"/>
-              </a:rPr>
-              <a:t>📥 Download the tools script</a:t>
-            </a:r>
-          </a:p>
-        </p:txBody>
-      </p:sp>
-      <p:sp>
-        <p:nvSpPr>
-          <p:cNvPr id="4" name="Content Placeholder 3"/>
-          <p:cNvSpPr>
-            <a:spLocks noGrp="1"/>
-          </p:cNvSpPr>
-          <p:nvPr>
-            <p:ph idx="2" sz="half"/>
-          </p:nvPr>
-        </p:nvSpPr>
-        <p:spPr/>
-        <p:txBody>
-          <a:bodyPr/>
-          <a:lstStyle/>
-          <a:p>
-            <a:pPr lvl="0" indent="0" marL="1270000">
-              <a:buNone/>
-            </a:pPr>
-            <a:r>
-              <a:rPr sz="2000" b="1"/>
-              <a:t>Note</a:t>
-            </a:r>
-          </a:p>
-          <a:p>
-            <a:pPr lvl="0" indent="0" marL="1270000">
-              <a:buNone/>
-            </a:pPr>
-            <a:r>
-              <a:rPr sz="2000" b="1"/>
-              <a:t>✅ What </a:t>
-            </a:r>
-            <a:r>
-              <a:rPr sz="2000" b="1">
-                <a:latin typeface="Courier"/>
-              </a:rPr>
-              <a:t>source()</a:t>
-            </a:r>
-            <a:r>
-              <a:rPr sz="2000" b="1"/>
-              <a:t> just gave you</a:t>
-            </a:r>
-          </a:p>
-          <a:p>
-            <a:pPr lvl="0"/>
-            <a:r>
-              <a:rPr sz="2000">
-                <a:latin typeface="Courier"/>
-              </a:rPr>
-              <a:t>theme_regular()</a:t>
-            </a:r>
-            <a:r>
-              <a:rPr sz="2000"/>
-              <a:t> — the publication theme from the Graphing lecture</a:t>
-            </a:r>
-          </a:p>
-          <a:p>
-            <a:pPr lvl="0"/>
-            <a:r>
-              <a:rPr sz="2000">
-                <a:latin typeface="Courier"/>
-              </a:rPr>
-              <a:t>summary_stats()</a:t>
-            </a:r>
-            <a:r>
-              <a:rPr sz="2000"/>
-              <a:t> — hand it a column of numbers, get back </a:t>
-            </a:r>
-            <a:r>
-              <a:rPr sz="2000">
-                <a:latin typeface="Courier"/>
-              </a:rPr>
-              <a:t>n</a:t>
-            </a:r>
-            <a:r>
-              <a:rPr sz="2000"/>
-              <a:t>, </a:t>
-            </a:r>
-            <a:r>
-              <a:rPr sz="2000">
-                <a:latin typeface="Courier"/>
-              </a:rPr>
-              <a:t>mean</a:t>
-            </a:r>
-            <a:r>
-              <a:rPr sz="2000"/>
-              <a:t>, </a:t>
-            </a:r>
-            <a:r>
-              <a:rPr sz="2000">
-                <a:latin typeface="Courier"/>
-              </a:rPr>
-              <a:t>sd</a:t>
-            </a:r>
-            <a:r>
-              <a:rPr sz="2000"/>
-              <a:t>, </a:t>
-            </a:r>
-            <a:r>
-              <a:rPr sz="2000">
-                <a:latin typeface="Courier"/>
-              </a:rPr>
-              <a:t>se</a:t>
-            </a:r>
-            <a:r>
-              <a:rPr sz="2000"/>
-              <a:t> and a 95% CI</a:t>
-            </a:r>
-          </a:p>
-          <a:p>
-            <a:pPr lvl="0" indent="0" marL="1270000">
-              <a:buNone/>
-            </a:pPr>
-            <a:r>
-              <a:rPr sz="2000"/>
-              <a:t>Save the file in a </a:t>
-            </a:r>
-            <a:r>
-              <a:rPr sz="2000" b="1">
-                <a:latin typeface="Courier"/>
-              </a:rPr>
-              <a:t>themes_functions/</a:t>
-            </a:r>
-            <a:r>
-              <a:rPr sz="2000"/>
-              <a:t> folder in your project and this exact line works. One line at the top of a script, and both tools are available for the rest of the semester — fix the theme once, and every figure in every script updates.</a:t>
-            </a:r>
-          </a:p>
-          <a:p>
-            <a:pPr lvl="0" indent="0" marL="1270000">
-              <a:buNone/>
-            </a:pPr>
-            <a:r>
-              <a:rPr sz="2000" b="1"/>
-              <a:t>Tip</a:t>
-            </a:r>
-          </a:p>
-          <a:p>
-            <a:pPr lvl="0" indent="0" marL="1270000">
-              <a:buNone/>
-            </a:pPr>
-            <a:r>
-              <a:rPr sz="2000" b="1"/>
-              <a:t>🖐 Recap</a:t>
-            </a:r>
-          </a:p>
-          <a:p>
-            <a:pPr lvl="0" indent="0" marL="1270000">
-              <a:buNone/>
-            </a:pPr>
-            <a:r>
-              <a:rPr sz="2000"/>
-              <a:t>This is the data </a:t>
-            </a:r>
-            <a:r>
-              <a:rPr sz="2000" b="1"/>
-              <a:t>you</a:t>
-            </a:r>
-            <a:r>
-              <a:rPr sz="2000"/>
-              <a:t> collected: </a:t>
-            </a:r>
-            <a:r>
-              <a:rPr sz="2000">
-                <a:latin typeface="Courier"/>
-              </a:rPr>
-              <a:t>team</a:t>
-            </a:r>
-            <a:r>
-              <a:rPr sz="2000"/>
-              <a:t> is your field team (one tree each), </a:t>
-            </a:r>
-            <a:r>
-              <a:rPr sz="2000">
-                <a:latin typeface="Courier"/>
-              </a:rPr>
-              <a:t>side</a:t>
-            </a:r>
-            <a:r>
-              <a:rPr sz="2000"/>
-              <a:t> is sunny vs. shady, </a:t>
-            </a:r>
-            <a:r>
-              <a:rPr sz="2000">
-                <a:latin typeface="Courier"/>
-              </a:rPr>
-              <a:t>replicate</a:t>
-            </a:r>
-            <a:r>
-              <a:rPr sz="2000"/>
-              <a:t> is which of the 8 needles.</a:t>
-            </a:r>
-          </a:p>
-          <a:p>
-            <a:pPr lvl="0" indent="0" marL="1270000">
-              <a:buNone/>
-            </a:pPr>
-            <a:r>
-              <a:rPr sz="2000"/>
-              <a:t>64 rows — but only </a:t>
-            </a:r>
-            <a:r>
-              <a:rPr sz="2000" b="1"/>
-              <a:t>4 trees</a:t>
-            </a:r>
-            <a:r>
-              <a:rPr sz="2000"/>
-              <a:t>.</a:t>
+              <a:t>Part 6 · Paired T-Test</a:t>
             </a:r>
           </a:p>
         </p:txBody>
@@ -13551,7 +13880,7 @@
 </p:sld>
 </file>
 
-<file path=ppt/slides/slide40.xml><?xml version="1.0" encoding="utf-8"?>
+<file path=ppt/slides/slide44.xml><?xml version="1.0" encoding="utf-8"?>
 <p:sld xmlns:a="http://schemas.openxmlformats.org/drawingml/2006/main" xmlns:r="http://schemas.openxmlformats.org/officeDocument/2006/relationships" xmlns:p="http://schemas.openxmlformats.org/presentationml/2006/main">
   <p:cSld>
     <p:spTree>
@@ -13581,58 +13910,6 @@
         <p:spPr>
           <a:xfrm>
             <a:off x="0" y="0"/>
-            <a:ext cx="9144000" cy="582780"/>
-          </a:xfrm>
-        </p:spPr>
-        <p:txBody>
-          <a:bodyPr/>
-          <a:lstStyle/>
-          <a:p>
-            <a:pPr lvl="0" indent="0" marL="0">
-              <a:buNone/>
-            </a:pPr>
-            <a:r>
-              <a:rPr/>
-              <a:t>Part 6 · Paired T-Test</a:t>
-            </a:r>
-          </a:p>
-        </p:txBody>
-      </p:sp>
-    </p:spTree>
-  </p:cSld>
-</p:sld>
-</file>
-
-<file path=ppt/slides/slide41.xml><?xml version="1.0" encoding="utf-8"?>
-<p:sld xmlns:a="http://schemas.openxmlformats.org/drawingml/2006/main" xmlns:r="http://schemas.openxmlformats.org/officeDocument/2006/relationships" xmlns:p="http://schemas.openxmlformats.org/presentationml/2006/main">
-  <p:cSld>
-    <p:spTree>
-      <p:nvGrpSpPr>
-        <p:cNvPr id="1" name=""/>
-        <p:cNvGrpSpPr/>
-        <p:nvPr/>
-      </p:nvGrpSpPr>
-      <p:grpSpPr>
-        <a:xfrm>
-          <a:off x="0" y="0"/>
-          <a:ext cx="0" cy="0"/>
-          <a:chOff x="0" y="0"/>
-          <a:chExt cx="0" cy="0"/>
-        </a:xfrm>
-      </p:grpSpPr>
-      <p:sp>
-        <p:nvSpPr>
-          <p:cNvPr id="2" name="Title 1"/>
-          <p:cNvSpPr>
-            <a:spLocks noGrp="1"/>
-          </p:cNvSpPr>
-          <p:nvPr>
-            <p:ph type="title"/>
-          </p:nvPr>
-        </p:nvSpPr>
-        <p:spPr>
-          <a:xfrm>
-            <a:off x="0" y="0"/>
             <a:ext cx="9144000" cy="602780"/>
           </a:xfrm>
           <a:solidFill>
@@ -14124,7 +14401,7 @@
 </p:sld>
 </file>
 
-<file path=ppt/slides/slide42.xml><?xml version="1.0" encoding="utf-8"?>
+<file path=ppt/slides/slide45.xml><?xml version="1.0" encoding="utf-8"?>
 <p:sld xmlns:a="http://schemas.openxmlformats.org/drawingml/2006/main" xmlns:r="http://schemas.openxmlformats.org/officeDocument/2006/relationships" xmlns:p="http://schemas.openxmlformats.org/presentationml/2006/main">
   <p:cSld>
     <p:spTree>
@@ -14514,71 +14791,6 @@
               <a:t>, so tree-to-tree variation cancels out entirely.</a:t>
             </a:r>
           </a:p>
-          <a:p>
-            <a:pPr lvl="0" indent="0" marL="1270000">
-              <a:buNone/>
-            </a:pPr>
-            <a:r>
-              <a:rPr sz="2000" b="1"/>
-              <a:t>Important</a:t>
-            </a:r>
-          </a:p>
-          <a:p>
-            <a:pPr lvl="0" indent="0" marL="1270000">
-              <a:buNone/>
-            </a:pPr>
-            <a:r>
-              <a:rPr sz="2000" b="1"/>
-              <a:t>And notice it did that on half the degrees of freedom</a:t>
-            </a:r>
-          </a:p>
-          <a:p>
-            <a:pPr lvl="0" indent="0" marL="1270000">
-              <a:buNone/>
-            </a:pPr>
-            <a:r>
-              <a:rPr sz="2000"/>
-              <a:t>3 instead of 6 — because it is working with 4 differences, not 8 values. A smaller df makes significance </a:t>
-            </a:r>
-            <a:r>
-              <a:rPr sz="2000" i="1"/>
-              <a:t>harder</a:t>
-            </a:r>
-            <a:r>
-              <a:rPr sz="2000"/>
-              <a:t> to reach. It still won by a mile, because the noise it removed mattered far more than the df it gave up.</a:t>
-            </a:r>
-          </a:p>
-          <a:p>
-            <a:pPr lvl="0" indent="0" marL="1270000">
-              <a:buNone/>
-            </a:pPr>
-            <a:r>
-              <a:rPr sz="2000" b="1"/>
-              <a:t>Note</a:t>
-            </a:r>
-          </a:p>
-          <a:p>
-            <a:pPr lvl="0" indent="0" marL="1270000">
-              <a:buNone/>
-            </a:pPr>
-            <a:r>
-              <a:rPr sz="2000" b="1"/>
-              <a:t>These data are paired by design</a:t>
-            </a:r>
-            <a:r>
-              <a:rPr sz="2000"/>
-              <a:t> — each team measured both sides of the </a:t>
-            </a:r>
-            <a:r>
-              <a:rPr sz="2000" i="1"/>
-              <a:t>same</a:t>
-            </a:r>
-            <a:r>
-              <a:rPr sz="2000"/>
-              <a:t> tree. The two-sample test is not just less powerful, it is answering a question our design never asked.</a:t>
-            </a:r>
-          </a:p>
         </p:txBody>
       </p:sp>
       <p:sp>
@@ -14671,795 +14883,6 @@
 </p:sld>
 </file>
 
-<file path=ppt/slides/slide43.xml><?xml version="1.0" encoding="utf-8"?>
-<p:sld xmlns:a="http://schemas.openxmlformats.org/drawingml/2006/main" xmlns:r="http://schemas.openxmlformats.org/officeDocument/2006/relationships" xmlns:p="http://schemas.openxmlformats.org/presentationml/2006/main">
-  <p:cSld>
-    <p:spTree>
-      <p:nvGrpSpPr>
-        <p:cNvPr id="1" name=""/>
-        <p:cNvGrpSpPr/>
-        <p:nvPr/>
-      </p:nvGrpSpPr>
-      <p:grpSpPr>
-        <a:xfrm>
-          <a:off x="0" y="0"/>
-          <a:ext cx="0" cy="0"/>
-          <a:chOff x="0" y="0"/>
-          <a:chExt cx="0" cy="0"/>
-        </a:xfrm>
-      </p:grpSpPr>
-      <p:sp>
-        <p:nvSpPr>
-          <p:cNvPr id="2" name="Title 1"/>
-          <p:cNvSpPr>
-            <a:spLocks noGrp="1"/>
-          </p:cNvSpPr>
-          <p:nvPr>
-            <p:ph type="title"/>
-          </p:nvPr>
-        </p:nvSpPr>
-        <p:spPr>
-          <a:xfrm>
-            <a:off x="0" y="0"/>
-            <a:ext cx="9144000" cy="602780"/>
-          </a:xfrm>
-          <a:solidFill>
-            <a:srgbClr val="70121D"/>
-          </a:solidFill>
-        </p:spPr>
-        <p:txBody>
-          <a:bodyPr/>
-          <a:lstStyle/>
-          <a:p>
-            <a:pPr lvl="0" indent="0" marL="0">
-              <a:buNone/>
-            </a:pPr>
-            <a:r>
-              <a:rPr/>
-              <a:t>✅ A Paired Test </a:t>
-            </a:r>
-            <a:r>
-              <a:rPr i="1"/>
-              <a:t>Is</a:t>
-            </a:r>
-            <a:r>
-              <a:rPr/>
-              <a:t> a One-Sample Test</a:t>
-            </a:r>
-          </a:p>
-        </p:txBody>
-      </p:sp>
-      <p:sp>
-        <p:nvSpPr>
-          <p:cNvPr id="3" name="Content Placeholder 2"/>
-          <p:cNvSpPr>
-            <a:spLocks noGrp="1"/>
-          </p:cNvSpPr>
-          <p:nvPr>
-            <p:ph idx="1" sz="half"/>
-          </p:nvPr>
-        </p:nvSpPr>
-        <p:spPr/>
-        <p:txBody>
-          <a:bodyPr/>
-          <a:lstStyle/>
-          <a:p>
-            <a:pPr lvl="0" indent="0" marL="0">
-              <a:buNone/>
-            </a:pPr>
-            <a:r>
-              <a:rPr/>
-              <a:t>Here is the idea that makes the df finally click. Treat the </a:t>
-            </a:r>
-            <a:r>
-              <a:rPr b="1"/>
-              <a:t>shady side as each tree’s own control</a:t>
-            </a:r>
-            <a:r>
-              <a:rPr/>
-              <a:t>, and compute one difference per tree:</a:t>
-            </a:r>
-          </a:p>
-          <a:p>
-            <a:pPr lvl="0" indent="0">
-              <a:buNone/>
-            </a:pPr>
-            <a:r>
-              <a:rPr>
-                <a:solidFill>
-                  <a:srgbClr val="003B4F"/>
-                </a:solidFill>
-                <a:latin typeface="Courier"/>
-              </a:rPr>
-              <a:t>diff_df &lt;- p_wide_df </a:t>
-            </a:r>
-            <a:r>
-              <a:rPr>
-                <a:solidFill>
-                  <a:srgbClr val="5E5E5E"/>
-                </a:solidFill>
-                <a:latin typeface="Courier"/>
-              </a:rPr>
-              <a:t>%&gt;%</a:t>
-            </a:r>
-            <a:br/>
-            <a:r>
-              <a:rPr>
-                <a:solidFill>
-                  <a:srgbClr val="003B4F"/>
-                </a:solidFill>
-                <a:latin typeface="Courier"/>
-              </a:rPr>
-              <a:t>  </a:t>
-            </a:r>
-            <a:r>
-              <a:rPr>
-                <a:solidFill>
-                  <a:srgbClr val="4758AB"/>
-                </a:solidFill>
-                <a:latin typeface="Courier"/>
-              </a:rPr>
-              <a:t>mutate</a:t>
-            </a:r>
-            <a:r>
-              <a:rPr>
-                <a:solidFill>
-                  <a:srgbClr val="003B4F"/>
-                </a:solidFill>
-                <a:latin typeface="Courier"/>
-              </a:rPr>
-              <a:t>(</a:t>
-            </a:r>
-            <a:r>
-              <a:rPr>
-                <a:solidFill>
-                  <a:srgbClr val="657422"/>
-                </a:solidFill>
-                <a:latin typeface="Courier"/>
-              </a:rPr>
-              <a:t>difference =</a:t>
-            </a:r>
-            <a:r>
-              <a:rPr>
-                <a:solidFill>
-                  <a:srgbClr val="003B4F"/>
-                </a:solidFill>
-                <a:latin typeface="Courier"/>
-              </a:rPr>
-              <a:t> sunny </a:t>
-            </a:r>
-            <a:r>
-              <a:rPr>
-                <a:solidFill>
-                  <a:srgbClr val="5E5E5E"/>
-                </a:solidFill>
-                <a:latin typeface="Courier"/>
-              </a:rPr>
-              <a:t>-</a:t>
-            </a:r>
-            <a:r>
-              <a:rPr>
-                <a:solidFill>
-                  <a:srgbClr val="003B4F"/>
-                </a:solidFill>
-                <a:latin typeface="Courier"/>
-              </a:rPr>
-              <a:t> shady)</a:t>
-            </a:r>
-            <a:br/>
-            <a:br/>
-            <a:r>
-              <a:rPr>
-                <a:solidFill>
-                  <a:srgbClr val="003B4F"/>
-                </a:solidFill>
-                <a:latin typeface="Courier"/>
-              </a:rPr>
-              <a:t>diff_df</a:t>
-            </a:r>
-          </a:p>
-          <a:p>
-            <a:pPr lvl="0" indent="0">
-              <a:buNone/>
-            </a:pPr>
-            <a:r>
-              <a:rPr>
-                <a:latin typeface="Courier"/>
-              </a:rPr>
-              <a:t># A tibble: 4 × 4
-  team       shady sunny difference
-  &lt;chr&gt;      &lt;dbl&gt; &lt;dbl&gt;      &lt;dbl&gt;
-1 botany      16.1  17.3      1.16 
-2 grace_jace  15.4  15.5      0.146
-3 one         13.2  14.2      0.968
-4 waterbugs   11.7  13.8      2.10 </a:t>
-            </a:r>
-          </a:p>
-          <a:p>
-            <a:pPr lvl="0" indent="0" marL="0">
-              <a:buNone/>
-            </a:pPr>
-            <a:r>
-              <a:rPr/>
-              <a:t>Now throw away the pairing language entirely and run a plain </a:t>
-            </a:r>
-            <a:r>
-              <a:rPr b="1"/>
-              <a:t>one-sample t-test on those 4 differences, against μ = 0</a:t>
-            </a:r>
-            <a:r>
-              <a:rPr/>
-              <a:t>:</a:t>
-            </a:r>
-          </a:p>
-          <a:p>
-            <a:pPr lvl="0" indent="0">
-              <a:buNone/>
-            </a:pPr>
-            <a:r>
-              <a:rPr>
-                <a:solidFill>
-                  <a:srgbClr val="003B4F"/>
-                </a:solidFill>
-                <a:latin typeface="Courier"/>
-              </a:rPr>
-              <a:t>diff_model &lt;- </a:t>
-            </a:r>
-            <a:r>
-              <a:rPr>
-                <a:solidFill>
-                  <a:srgbClr val="4758AB"/>
-                </a:solidFill>
-                <a:latin typeface="Courier"/>
-              </a:rPr>
-              <a:t>t.test</a:t>
-            </a:r>
-            <a:r>
-              <a:rPr>
-                <a:solidFill>
-                  <a:srgbClr val="003B4F"/>
-                </a:solidFill>
-                <a:latin typeface="Courier"/>
-              </a:rPr>
-              <a:t>(diff_df</a:t>
-            </a:r>
-            <a:r>
-              <a:rPr>
-                <a:solidFill>
-                  <a:srgbClr val="5E5E5E"/>
-                </a:solidFill>
-                <a:latin typeface="Courier"/>
-              </a:rPr>
-              <a:t>$</a:t>
-            </a:r>
-            <a:r>
-              <a:rPr>
-                <a:solidFill>
-                  <a:srgbClr val="003B4F"/>
-                </a:solidFill>
-                <a:latin typeface="Courier"/>
-              </a:rPr>
-              <a:t>difference, </a:t>
-            </a:r>
-            <a:r>
-              <a:rPr>
-                <a:solidFill>
-                  <a:srgbClr val="657422"/>
-                </a:solidFill>
-                <a:latin typeface="Courier"/>
-              </a:rPr>
-              <a:t>mu =</a:t>
-            </a:r>
-            <a:r>
-              <a:rPr>
-                <a:solidFill>
-                  <a:srgbClr val="003B4F"/>
-                </a:solidFill>
-                <a:latin typeface="Courier"/>
-              </a:rPr>
-              <a:t> </a:t>
-            </a:r>
-            <a:r>
-              <a:rPr>
-                <a:solidFill>
-                  <a:srgbClr val="AD0000"/>
-                </a:solidFill>
-                <a:latin typeface="Courier"/>
-              </a:rPr>
-              <a:t>0</a:t>
-            </a:r>
-            <a:r>
-              <a:rPr>
-                <a:solidFill>
-                  <a:srgbClr val="003B4F"/>
-                </a:solidFill>
-                <a:latin typeface="Courier"/>
-              </a:rPr>
-              <a:t>)</a:t>
-            </a:r>
-            <a:br/>
-            <a:br/>
-            <a:r>
-              <a:rPr>
-                <a:solidFill>
-                  <a:srgbClr val="003B4F"/>
-                </a:solidFill>
-                <a:latin typeface="Courier"/>
-              </a:rPr>
-              <a:t>diff_model</a:t>
-            </a:r>
-          </a:p>
-          <a:p>
-            <a:pPr lvl="0" indent="0">
-              <a:buNone/>
-            </a:pPr>
-            <a:r>
-              <a:rPr>
-                <a:latin typeface="Courier"/>
-              </a:rPr>
-              <a:t>
-    One Sample t-test
-data:  diff_df$difference
-t = 2.7227, df = 3, p-value = 0.07238
-alternative hypothesis: true mean is not equal to 0
-95 percent confidence interval:
- -0.1846147  2.3714897
-sample estimates:
-mean of x 
- 1.093438 </a:t>
-            </a:r>
-          </a:p>
-        </p:txBody>
-      </p:sp>
-      <p:sp>
-        <p:nvSpPr>
-          <p:cNvPr id="4" name="Content Placeholder 3"/>
-          <p:cNvSpPr>
-            <a:spLocks noGrp="1"/>
-          </p:cNvSpPr>
-          <p:nvPr>
-            <p:ph idx="2" sz="half"/>
-          </p:nvPr>
-        </p:nvSpPr>
-        <p:spPr/>
-        <p:txBody>
-          <a:bodyPr/>
-          <a:lstStyle/>
-          <a:p>
-            <a:pPr lvl="0" indent="0" marL="1270000">
-              <a:buNone/>
-            </a:pPr>
-            <a:r>
-              <a:rPr sz="2000" b="1"/>
-              <a:t>Important</a:t>
-            </a:r>
-          </a:p>
-          <a:p>
-            <a:pPr lvl="0" indent="0" marL="1270000">
-              <a:buNone/>
-            </a:pPr>
-            <a:r>
-              <a:rPr sz="2000" b="1"/>
-              <a:t>Identical. Same t, same df, same p.</a:t>
-            </a:r>
-          </a:p>
-          <a:p>
-            <a:pPr lvl="0" indent="0" marL="1270000">
-              <a:buNone/>
-            </a:pPr>
-            <a:r>
-              <a:rPr sz="2000">
-                <a:latin typeface="Courier"/>
-              </a:rPr>
-              <a:t>t.test(sunny, shady, paired = TRUE)</a:t>
-            </a:r>
-            <a:r>
-              <a:rPr sz="2000"/>
-              <a:t> and </a:t>
-            </a:r>
-            <a:r>
-              <a:rPr sz="2000">
-                <a:latin typeface="Courier"/>
-              </a:rPr>
-              <a:t>t.test(sunny - shady, mu = 0)</a:t>
-            </a:r>
-            <a:r>
-              <a:rPr sz="2000"/>
-              <a:t> are </a:t>
-            </a:r>
-            <a:r>
-              <a:rPr sz="2000" b="1"/>
-              <a:t>the same test</a:t>
-            </a:r>
-            <a:r>
-              <a:rPr sz="2000"/>
-              <a:t>. </a:t>
-            </a:r>
-            <a:r>
-              <a:rPr sz="2000">
-                <a:latin typeface="Courier"/>
-              </a:rPr>
-              <a:t>paired = TRUE</a:t>
-            </a:r>
-            <a:r>
-              <a:rPr sz="2000"/>
-              <a:t> is nothing more than a convenience that does the subtraction for you.</a:t>
-            </a:r>
-          </a:p>
-          <a:p>
-            <a:pPr lvl="0" indent="0" marL="1270000">
-              <a:buNone/>
-            </a:pPr>
-            <a:r>
-              <a:rPr sz="2000"/>
-              <a:t>That is why the paired df is </a:t>
-            </a:r>
-            <a:r>
-              <a:rPr sz="2000" b="1"/>
-              <a:t>n</a:t>
-            </a:r>
-            <a:r>
-              <a:rPr sz="2000" b="1" baseline="-25000"/>
-              <a:t>pairs</a:t>
-            </a:r>
-            <a:r>
-              <a:rPr sz="2000" b="1"/>
-              <a:t> − 1 = 3</a:t>
-            </a:r>
-            <a:r>
-              <a:rPr sz="2000"/>
-              <a:t> and not n₁ + n₂ − 2 = 6: once you subtract, you genuinely only have </a:t>
-            </a:r>
-            <a:r>
-              <a:rPr sz="2000" b="1"/>
-              <a:t>four numbers</a:t>
-            </a:r>
-            <a:r>
-              <a:rPr sz="2000"/>
-              <a:t>. A one-sample test on four numbers has 3 df. Always.</a:t>
-            </a:r>
-          </a:p>
-          <a:p>
-            <a:pPr lvl="0" indent="0" marL="1270000">
-              <a:buNone/>
-            </a:pPr>
-            <a:r>
-              <a:rPr sz="2000" b="1"/>
-              <a:t>Tip</a:t>
-            </a:r>
-          </a:p>
-          <a:p>
-            <a:pPr lvl="0" indent="0" marL="1270000">
-              <a:buNone/>
-            </a:pPr>
-            <a:r>
-              <a:rPr sz="2000" b="1"/>
-              <a:t>🖐 Each tree is its own control</a:t>
-            </a:r>
-          </a:p>
-          <a:p>
-            <a:pPr lvl="0" indent="0" marL="1270000">
-              <a:buNone/>
-            </a:pPr>
-            <a:r>
-              <a:rPr sz="2000"/>
-              <a:t>The shady side accounts for everything about that particular tree — its genetics, its soil, its water, its team’s measuring technique. Subtracting removes all of it at once, and what is left is the effect of </a:t>
-            </a:r>
-            <a:r>
-              <a:rPr sz="2000" i="1"/>
-              <a:t>sun</a:t>
-            </a:r>
-            <a:r>
-              <a:rPr sz="2000"/>
-              <a:t>.</a:t>
-            </a:r>
-          </a:p>
-          <a:p>
-            <a:pPr lvl="0" indent="0" marL="1270000">
-              <a:buNone/>
-            </a:pPr>
-            <a:r>
-              <a:rPr sz="2000"/>
-              <a:t>This is the same logic as a before/after design, and it is the seed of the blocked designs you will meet in ANOVA.</a:t>
-            </a:r>
-          </a:p>
-        </p:txBody>
-      </p:sp>
-    </p:spTree>
-  </p:cSld>
-</p:sld>
-</file>
-
-<file path=ppt/slides/slide44.xml><?xml version="1.0" encoding="utf-8"?>
-<p:sld xmlns:a="http://schemas.openxmlformats.org/drawingml/2006/main" xmlns:r="http://schemas.openxmlformats.org/officeDocument/2006/relationships" xmlns:p="http://schemas.openxmlformats.org/presentationml/2006/main">
-  <p:cSld>
-    <p:spTree>
-      <p:nvGrpSpPr>
-        <p:cNvPr id="1" name=""/>
-        <p:cNvGrpSpPr/>
-        <p:nvPr/>
-      </p:nvGrpSpPr>
-      <p:grpSpPr>
-        <a:xfrm>
-          <a:off x="0" y="0"/>
-          <a:ext cx="0" cy="0"/>
-          <a:chOff x="0" y="0"/>
-          <a:chExt cx="0" cy="0"/>
-        </a:xfrm>
-      </p:grpSpPr>
-      <p:sp>
-        <p:nvSpPr>
-          <p:cNvPr id="2" name="Title 1"/>
-          <p:cNvSpPr>
-            <a:spLocks noGrp="1"/>
-          </p:cNvSpPr>
-          <p:nvPr>
-            <p:ph type="title"/>
-          </p:nvPr>
-        </p:nvSpPr>
-        <p:spPr>
-          <a:xfrm>
-            <a:off x="0" y="0"/>
-            <a:ext cx="9144000" cy="582780"/>
-          </a:xfrm>
-        </p:spPr>
-        <p:txBody>
-          <a:bodyPr/>
-          <a:lstStyle/>
-          <a:p>
-            <a:pPr lvl="0" indent="0" marL="0">
-              <a:buNone/>
-            </a:pPr>
-            <a:r>
-              <a:rPr/>
-              <a:t>Part 7 · Assumptions and Wrap-Up</a:t>
-            </a:r>
-          </a:p>
-        </p:txBody>
-      </p:sp>
-    </p:spTree>
-  </p:cSld>
-</p:sld>
-</file>
-
-<file path=ppt/slides/slide45.xml><?xml version="1.0" encoding="utf-8"?>
-<p:sld xmlns:a="http://schemas.openxmlformats.org/drawingml/2006/main" xmlns:r="http://schemas.openxmlformats.org/officeDocument/2006/relationships" xmlns:p="http://schemas.openxmlformats.org/presentationml/2006/main">
-  <p:cSld>
-    <p:spTree>
-      <p:nvGrpSpPr>
-        <p:cNvPr id="1" name=""/>
-        <p:cNvGrpSpPr/>
-        <p:nvPr/>
-      </p:nvGrpSpPr>
-      <p:grpSpPr>
-        <a:xfrm>
-          <a:off x="0" y="0"/>
-          <a:ext cx="0" cy="0"/>
-          <a:chOff x="0" y="0"/>
-          <a:chExt cx="0" cy="0"/>
-        </a:xfrm>
-      </p:grpSpPr>
-      <p:sp>
-        <p:nvSpPr>
-          <p:cNvPr id="2" name="Title 1"/>
-          <p:cNvSpPr>
-            <a:spLocks noGrp="1"/>
-          </p:cNvSpPr>
-          <p:nvPr>
-            <p:ph type="title"/>
-          </p:nvPr>
-        </p:nvSpPr>
-        <p:spPr>
-          <a:xfrm>
-            <a:off x="0" y="0"/>
-            <a:ext cx="9144000" cy="602780"/>
-          </a:xfrm>
-          <a:solidFill>
-            <a:srgbClr val="70121D"/>
-          </a:solidFill>
-        </p:spPr>
-        <p:txBody>
-          <a:bodyPr/>
-          <a:lstStyle/>
-          <a:p>
-            <a:pPr lvl="0" indent="0" marL="0">
-              <a:buNone/>
-            </a:pPr>
-            <a:r>
-              <a:rPr/>
-              <a:t>Assumptions of Parametric Tests</a:t>
-            </a:r>
-          </a:p>
-        </p:txBody>
-      </p:sp>
-      <p:sp>
-        <p:nvSpPr>
-          <p:cNvPr id="3" name="Content Placeholder 2"/>
-          <p:cNvSpPr>
-            <a:spLocks noGrp="1"/>
-          </p:cNvSpPr>
-          <p:nvPr>
-            <p:ph idx="1" sz="half"/>
-          </p:nvPr>
-        </p:nvSpPr>
-        <p:spPr/>
-        <p:txBody>
-          <a:bodyPr/>
-          <a:lstStyle/>
-          <a:p>
-            <a:pPr lvl="0" indent="0" marL="0">
-              <a:buNone/>
-            </a:pPr>
-            <a:r>
-              <a:rPr b="1"/>
-              <a:t>Common assumptions for t-tests:</a:t>
-            </a:r>
-          </a:p>
-          <a:p>
-            <a:pPr lvl="0" indent="-342900" marL="342900">
-              <a:buAutoNum type="arabicPeriod"/>
-            </a:pPr>
-            <a:r>
-              <a:rPr b="1"/>
-              <a:t>Normality</a:t>
-            </a:r>
-            <a:r>
-              <a:rPr/>
-              <a:t> — the data (or, for a paired test, the </a:t>
-            </a:r>
-            <a:r>
-              <a:rPr b="1"/>
-              <a:t>differences</a:t>
-            </a:r>
-            <a:r>
-              <a:rPr/>
-              <a:t>) come from a normally distributed population</a:t>
-            </a:r>
-          </a:p>
-          <a:p>
-            <a:pPr lvl="0" indent="-342900" marL="342900">
-              <a:buAutoNum type="arabicPeriod"/>
-            </a:pPr>
-            <a:r>
-              <a:rPr b="1"/>
-              <a:t>Equal variances</a:t>
-            </a:r>
-            <a:r>
-              <a:rPr/>
-              <a:t> — two-sample tests only</a:t>
-            </a:r>
-          </a:p>
-          <a:p>
-            <a:pPr lvl="0" indent="-342900" marL="342900">
-              <a:buAutoNum type="arabicPeriod"/>
-            </a:pPr>
-            <a:r>
-              <a:rPr b="1"/>
-              <a:t>Independence</a:t>
-            </a:r>
-            <a:r>
-              <a:rPr/>
-              <a:t> — observations are independent</a:t>
-            </a:r>
-          </a:p>
-          <a:p>
-            <a:pPr lvl="0" indent="-342900" marL="342900">
-              <a:buAutoNum type="arabicPeriod"/>
-            </a:pPr>
-            <a:r>
-              <a:rPr b="1"/>
-              <a:t>No outliers</a:t>
-            </a:r>
-            <a:r>
-              <a:rPr/>
-              <a:t> — extreme values can dominate a small sample</a:t>
-            </a:r>
-          </a:p>
-          <a:p>
-            <a:pPr lvl="0" indent="0" marL="0">
-              <a:buNone/>
-            </a:pPr>
-            <a:r>
-              <a:rPr/>
-              <a:t>What do we do if our data violate these?</a:t>
-            </a:r>
-          </a:p>
-        </p:txBody>
-      </p:sp>
-      <p:sp>
-        <p:nvSpPr>
-          <p:cNvPr id="4" name="Content Placeholder 3"/>
-          <p:cNvSpPr>
-            <a:spLocks noGrp="1"/>
-          </p:cNvSpPr>
-          <p:nvPr>
-            <p:ph idx="2" sz="half"/>
-          </p:nvPr>
-        </p:nvSpPr>
-        <p:spPr/>
-        <p:txBody>
-          <a:bodyPr/>
-          <a:lstStyle/>
-          <a:p>
-            <a:pPr lvl="0" indent="0" marL="0">
-              <a:buNone/>
-            </a:pPr>
-            <a:r>
-              <a:rPr b="1"/>
-              <a:t>Alternatives when assumptions are violated:</a:t>
-            </a:r>
-          </a:p>
-          <a:p>
-            <a:pPr lvl="0"/>
-            <a:r>
-              <a:rPr/>
-              <a:t>Data transformation (log, square root)</a:t>
-            </a:r>
-          </a:p>
-          <a:p>
-            <a:pPr lvl="0"/>
-            <a:r>
-              <a:rPr/>
-              <a:t>Non-parametric tests — Mann-Whitney U for two samples, Wilcoxon signed-rank for paired</a:t>
-            </a:r>
-          </a:p>
-          <a:p>
-            <a:pPr lvl="0"/>
-            <a:r>
-              <a:rPr/>
-              <a:t>Robust methods</a:t>
-            </a:r>
-          </a:p>
-          <a:p>
-            <a:pPr lvl="0" indent="0" marL="1270000">
-              <a:buNone/>
-            </a:pPr>
-            <a:r>
-              <a:rPr sz="2000" b="1"/>
-              <a:t>Tip</a:t>
-            </a:r>
-          </a:p>
-          <a:p>
-            <a:pPr lvl="0" indent="0" marL="1270000">
-              <a:buNone/>
-            </a:pPr>
-            <a:r>
-              <a:rPr sz="2000" b="1"/>
-              <a:t>🖐 Note the paired case</a:t>
-            </a:r>
-          </a:p>
-          <a:p>
-            <a:pPr lvl="0" indent="0" marL="1270000">
-              <a:buNone/>
-            </a:pPr>
-            <a:r>
-              <a:rPr sz="2000"/>
-              <a:t>You check normality of the </a:t>
-            </a:r>
-            <a:r>
-              <a:rPr sz="2000" b="1"/>
-              <a:t>differences</a:t>
-            </a:r>
-            <a:r>
-              <a:rPr sz="2000"/>
-              <a:t>, not of the two groups. Which follows directly from the last slide — the differences </a:t>
-            </a:r>
-            <a:r>
-              <a:rPr sz="2000" i="1"/>
-              <a:t>are</a:t>
-            </a:r>
-            <a:r>
-              <a:rPr sz="2000"/>
-              <a:t> the data.</a:t>
-            </a:r>
-          </a:p>
-        </p:txBody>
-      </p:sp>
-    </p:spTree>
-  </p:cSld>
-</p:sld>
-</file>
-
 <file path=ppt/slides/slide46.xml><?xml version="1.0" encoding="utf-8"?>
 <p:sld xmlns:a="http://schemas.openxmlformats.org/drawingml/2006/main" xmlns:r="http://schemas.openxmlformats.org/officeDocument/2006/relationships" xmlns:p="http://schemas.openxmlformats.org/presentationml/2006/main">
   <p:cSld>
@@ -15505,7 +14928,7 @@
             </a:pPr>
             <a:r>
               <a:rPr/>
-              <a:t>Summary and Conclusions</a:t>
+              <a:t>Same Data, Two Different Answers — Why the Design Matters</a:t>
             </a:r>
           </a:p>
         </p:txBody>
@@ -15525,61 +14948,38 @@
           <a:bodyPr/>
           <a:lstStyle/>
           <a:p>
-            <a:pPr lvl="0" indent="0" marL="0">
-              <a:buNone/>
-            </a:pPr>
-            <a:r>
-              <a:rPr/>
-              <a:t>In this lecture we:</a:t>
-            </a:r>
-          </a:p>
-          <a:p>
-            <a:pPr lvl="0" indent="-342900" marL="342900">
-              <a:buAutoNum type="arabicPeriod"/>
-            </a:pPr>
-            <a:r>
-              <a:rPr/>
-              <a:t>Went from question → prediction → H₀ / Hₐ → α, before looking at output</a:t>
-            </a:r>
-          </a:p>
-          <a:p>
-            <a:pPr lvl="0" indent="-342900" marL="342900">
-              <a:buAutoNum type="arabicPeriod"/>
-            </a:pPr>
-            <a:r>
-              <a:rPr/>
-              <a:t>Tested assumptions — QQ plot, Shapiro-Wilk, Levene’s</a:t>
-            </a:r>
-          </a:p>
-          <a:p>
-            <a:pPr lvl="0" indent="-342900" marL="342900">
-              <a:buAutoNum type="arabicPeriod"/>
-            </a:pPr>
-            <a:r>
-              <a:rPr/>
-              <a:t>Ran one-sample (two- and one-tailed), two-sample (Student’s and Welch’s), and paired t-tests</a:t>
-            </a:r>
-          </a:p>
-          <a:p>
-            <a:pPr lvl="0" indent="-342900" marL="342900">
-              <a:buAutoNum type="arabicPeriod"/>
-            </a:pPr>
-            <a:r>
-              <a:rPr/>
-              <a:t>Saw that a paired test is a one-sample test on the differences</a:t>
-            </a:r>
-          </a:p>
-          <a:p>
-            <a:pPr lvl="0" indent="-342900" marL="342900">
-              <a:buAutoNum type="arabicPeriod"/>
-            </a:pPr>
-            <a:r>
-              <a:rPr/>
-              <a:t>Learned to read and report </a:t>
-            </a:r>
-            <a:r>
-              <a:rPr b="1"/>
-              <a:t>t(df) = …, p = …</a:t>
+            <a:pPr lvl="0" indent="0" marL="1270000">
+              <a:buNone/>
+            </a:pPr>
+            <a:r>
+              <a:rPr sz="2000" b="1"/>
+              <a:t>Important</a:t>
+            </a:r>
+          </a:p>
+          <a:p>
+            <a:pPr lvl="0" indent="0" marL="1270000">
+              <a:buNone/>
+            </a:pPr>
+            <a:r>
+              <a:rPr sz="2000" b="1"/>
+              <a:t>And notice it did that on half the degrees of freedom</a:t>
+            </a:r>
+          </a:p>
+          <a:p>
+            <a:pPr lvl="0" indent="0" marL="1270000">
+              <a:buNone/>
+            </a:pPr>
+            <a:r>
+              <a:rPr sz="2000"/>
+              <a:t>3 instead of 6 — because it is working with 4 differences, not 8 values. A smaller df makes significance </a:t>
+            </a:r>
+            <a:r>
+              <a:rPr sz="2000" i="1"/>
+              <a:t>harder</a:t>
+            </a:r>
+            <a:r>
+              <a:rPr sz="2000"/>
+              <a:t> to reach. It still won by a mile, because the noise it removed mattered far more than the df it gave up.</a:t>
             </a:r>
           </a:p>
         </p:txBody>
@@ -15604,6 +15004,536 @@
             </a:pPr>
             <a:r>
               <a:rPr sz="2000" b="1"/>
+              <a:t>Note</a:t>
+            </a:r>
+          </a:p>
+          <a:p>
+            <a:pPr lvl="0" indent="0" marL="1270000">
+              <a:buNone/>
+            </a:pPr>
+            <a:r>
+              <a:rPr sz="2000" b="1"/>
+              <a:t>These data are paired by design</a:t>
+            </a:r>
+            <a:r>
+              <a:rPr sz="2000"/>
+              <a:t> — each team measured both sides of the </a:t>
+            </a:r>
+            <a:r>
+              <a:rPr sz="2000" i="1"/>
+              <a:t>same</a:t>
+            </a:r>
+            <a:r>
+              <a:rPr sz="2000"/>
+              <a:t> tree. The two-sample test is not just less powerful, it is answering a question our design never asked.</a:t>
+            </a:r>
+          </a:p>
+        </p:txBody>
+      </p:sp>
+    </p:spTree>
+  </p:cSld>
+</p:sld>
+</file>
+
+<file path=ppt/slides/slide47.xml><?xml version="1.0" encoding="utf-8"?>
+<p:sld xmlns:a="http://schemas.openxmlformats.org/drawingml/2006/main" xmlns:r="http://schemas.openxmlformats.org/officeDocument/2006/relationships" xmlns:p="http://schemas.openxmlformats.org/presentationml/2006/main">
+  <p:cSld>
+    <p:spTree>
+      <p:nvGrpSpPr>
+        <p:cNvPr id="1" name=""/>
+        <p:cNvGrpSpPr/>
+        <p:nvPr/>
+      </p:nvGrpSpPr>
+      <p:grpSpPr>
+        <a:xfrm>
+          <a:off x="0" y="0"/>
+          <a:ext cx="0" cy="0"/>
+          <a:chOff x="0" y="0"/>
+          <a:chExt cx="0" cy="0"/>
+        </a:xfrm>
+      </p:grpSpPr>
+      <p:sp>
+        <p:nvSpPr>
+          <p:cNvPr id="2" name="Title 1"/>
+          <p:cNvSpPr>
+            <a:spLocks noGrp="1"/>
+          </p:cNvSpPr>
+          <p:nvPr>
+            <p:ph type="title"/>
+          </p:nvPr>
+        </p:nvSpPr>
+        <p:spPr>
+          <a:xfrm>
+            <a:off x="0" y="0"/>
+            <a:ext cx="9144000" cy="602780"/>
+          </a:xfrm>
+          <a:solidFill>
+            <a:srgbClr val="70121D"/>
+          </a:solidFill>
+        </p:spPr>
+        <p:txBody>
+          <a:bodyPr/>
+          <a:lstStyle/>
+          <a:p>
+            <a:pPr lvl="0" indent="0" marL="0">
+              <a:buNone/>
+            </a:pPr>
+            <a:r>
+              <a:rPr/>
+              <a:t>✅ A Paired Test </a:t>
+            </a:r>
+            <a:r>
+              <a:rPr i="1"/>
+              <a:t>Is</a:t>
+            </a:r>
+            <a:r>
+              <a:rPr/>
+              <a:t> a One-Sample Test</a:t>
+            </a:r>
+          </a:p>
+        </p:txBody>
+      </p:sp>
+      <p:sp>
+        <p:nvSpPr>
+          <p:cNvPr id="3" name="Content Placeholder 2"/>
+          <p:cNvSpPr>
+            <a:spLocks noGrp="1"/>
+          </p:cNvSpPr>
+          <p:nvPr>
+            <p:ph idx="1" sz="half"/>
+          </p:nvPr>
+        </p:nvSpPr>
+        <p:spPr/>
+        <p:txBody>
+          <a:bodyPr/>
+          <a:lstStyle/>
+          <a:p>
+            <a:pPr lvl="0" indent="0" marL="0">
+              <a:buNone/>
+            </a:pPr>
+            <a:r>
+              <a:rPr/>
+              <a:t>Here is the idea that makes the df finally click. Treat the </a:t>
+            </a:r>
+            <a:r>
+              <a:rPr b="1"/>
+              <a:t>shady side as each tree’s own control</a:t>
+            </a:r>
+            <a:r>
+              <a:rPr/>
+              <a:t>, and compute one difference per tree:</a:t>
+            </a:r>
+          </a:p>
+          <a:p>
+            <a:pPr lvl="0" indent="0">
+              <a:buNone/>
+            </a:pPr>
+            <a:r>
+              <a:rPr>
+                <a:solidFill>
+                  <a:srgbClr val="003B4F"/>
+                </a:solidFill>
+                <a:latin typeface="Courier"/>
+              </a:rPr>
+              <a:t>diff_df &lt;- p_wide_df </a:t>
+            </a:r>
+            <a:r>
+              <a:rPr>
+                <a:solidFill>
+                  <a:srgbClr val="5E5E5E"/>
+                </a:solidFill>
+                <a:latin typeface="Courier"/>
+              </a:rPr>
+              <a:t>%&gt;%</a:t>
+            </a:r>
+            <a:br/>
+            <a:r>
+              <a:rPr>
+                <a:solidFill>
+                  <a:srgbClr val="003B4F"/>
+                </a:solidFill>
+                <a:latin typeface="Courier"/>
+              </a:rPr>
+              <a:t>  </a:t>
+            </a:r>
+            <a:r>
+              <a:rPr>
+                <a:solidFill>
+                  <a:srgbClr val="4758AB"/>
+                </a:solidFill>
+                <a:latin typeface="Courier"/>
+              </a:rPr>
+              <a:t>mutate</a:t>
+            </a:r>
+            <a:r>
+              <a:rPr>
+                <a:solidFill>
+                  <a:srgbClr val="003B4F"/>
+                </a:solidFill>
+                <a:latin typeface="Courier"/>
+              </a:rPr>
+              <a:t>(</a:t>
+            </a:r>
+            <a:r>
+              <a:rPr>
+                <a:solidFill>
+                  <a:srgbClr val="657422"/>
+                </a:solidFill>
+                <a:latin typeface="Courier"/>
+              </a:rPr>
+              <a:t>difference =</a:t>
+            </a:r>
+            <a:r>
+              <a:rPr>
+                <a:solidFill>
+                  <a:srgbClr val="003B4F"/>
+                </a:solidFill>
+                <a:latin typeface="Courier"/>
+              </a:rPr>
+              <a:t> sunny </a:t>
+            </a:r>
+            <a:r>
+              <a:rPr>
+                <a:solidFill>
+                  <a:srgbClr val="5E5E5E"/>
+                </a:solidFill>
+                <a:latin typeface="Courier"/>
+              </a:rPr>
+              <a:t>-</a:t>
+            </a:r>
+            <a:r>
+              <a:rPr>
+                <a:solidFill>
+                  <a:srgbClr val="003B4F"/>
+                </a:solidFill>
+                <a:latin typeface="Courier"/>
+              </a:rPr>
+              <a:t> shady)</a:t>
+            </a:r>
+            <a:br/>
+            <a:br/>
+            <a:r>
+              <a:rPr>
+                <a:solidFill>
+                  <a:srgbClr val="003B4F"/>
+                </a:solidFill>
+                <a:latin typeface="Courier"/>
+              </a:rPr>
+              <a:t>diff_df</a:t>
+            </a:r>
+          </a:p>
+          <a:p>
+            <a:pPr lvl="0" indent="0">
+              <a:buNone/>
+            </a:pPr>
+            <a:r>
+              <a:rPr>
+                <a:latin typeface="Courier"/>
+              </a:rPr>
+              <a:t># A tibble: 4 × 4
+  team       shady sunny difference
+  &lt;chr&gt;      &lt;dbl&gt; &lt;dbl&gt;      &lt;dbl&gt;
+1 botany      16.1  17.3      1.16 
+2 grace_jace  15.4  15.5      0.146
+3 one         13.2  14.2      0.968
+4 waterbugs   11.7  13.8      2.10 </a:t>
+            </a:r>
+          </a:p>
+        </p:txBody>
+      </p:sp>
+      <p:sp>
+        <p:nvSpPr>
+          <p:cNvPr id="4" name="Content Placeholder 3"/>
+          <p:cNvSpPr>
+            <a:spLocks noGrp="1"/>
+          </p:cNvSpPr>
+          <p:nvPr>
+            <p:ph idx="2" sz="half"/>
+          </p:nvPr>
+        </p:nvSpPr>
+        <p:spPr/>
+        <p:txBody>
+          <a:bodyPr/>
+          <a:lstStyle/>
+          <a:p>
+            <a:pPr lvl="0" indent="0" marL="1270000">
+              <a:buNone/>
+            </a:pPr>
+            <a:r>
+              <a:rPr sz="2000" b="1"/>
+              <a:t>Tip</a:t>
+            </a:r>
+          </a:p>
+          <a:p>
+            <a:pPr lvl="0" indent="0" marL="1270000">
+              <a:buNone/>
+            </a:pPr>
+            <a:r>
+              <a:rPr sz="2000" b="1"/>
+              <a:t>🖐 Each tree is its own control</a:t>
+            </a:r>
+          </a:p>
+          <a:p>
+            <a:pPr lvl="0" indent="0" marL="1270000">
+              <a:buNone/>
+            </a:pPr>
+            <a:r>
+              <a:rPr sz="2000"/>
+              <a:t>The shady side accounts for everything about that particular tree — its genetics, its soil, its water, its team’s measuring technique. Subtracting removes all of it at once, and what is left is the effect of </a:t>
+            </a:r>
+            <a:r>
+              <a:rPr sz="2000" i="1"/>
+              <a:t>sun</a:t>
+            </a:r>
+            <a:r>
+              <a:rPr sz="2000"/>
+              <a:t>.</a:t>
+            </a:r>
+          </a:p>
+          <a:p>
+            <a:pPr lvl="0" indent="0" marL="1270000">
+              <a:buNone/>
+            </a:pPr>
+            <a:r>
+              <a:rPr sz="2000"/>
+              <a:t>This is the same logic as a before/after design, and it is the seed of the blocked designs you will meet in ANOVA.</a:t>
+            </a:r>
+          </a:p>
+        </p:txBody>
+      </p:sp>
+    </p:spTree>
+  </p:cSld>
+</p:sld>
+</file>
+
+<file path=ppt/slides/slide48.xml><?xml version="1.0" encoding="utf-8"?>
+<p:sld xmlns:a="http://schemas.openxmlformats.org/drawingml/2006/main" xmlns:r="http://schemas.openxmlformats.org/officeDocument/2006/relationships" xmlns:p="http://schemas.openxmlformats.org/presentationml/2006/main">
+  <p:cSld>
+    <p:spTree>
+      <p:nvGrpSpPr>
+        <p:cNvPr id="1" name=""/>
+        <p:cNvGrpSpPr/>
+        <p:nvPr/>
+      </p:nvGrpSpPr>
+      <p:grpSpPr>
+        <a:xfrm>
+          <a:off x="0" y="0"/>
+          <a:ext cx="0" cy="0"/>
+          <a:chOff x="0" y="0"/>
+          <a:chExt cx="0" cy="0"/>
+        </a:xfrm>
+      </p:grpSpPr>
+      <p:sp>
+        <p:nvSpPr>
+          <p:cNvPr id="2" name="Title 1"/>
+          <p:cNvSpPr>
+            <a:spLocks noGrp="1"/>
+          </p:cNvSpPr>
+          <p:nvPr>
+            <p:ph type="title"/>
+          </p:nvPr>
+        </p:nvSpPr>
+        <p:spPr>
+          <a:xfrm>
+            <a:off x="0" y="0"/>
+            <a:ext cx="9144000" cy="602780"/>
+          </a:xfrm>
+          <a:solidFill>
+            <a:srgbClr val="70121D"/>
+          </a:solidFill>
+        </p:spPr>
+        <p:txBody>
+          <a:bodyPr/>
+          <a:lstStyle/>
+          <a:p>
+            <a:pPr lvl="0" indent="0" marL="0">
+              <a:buNone/>
+            </a:pPr>
+            <a:r>
+              <a:rPr/>
+              <a:t>✅ A Paired Test </a:t>
+            </a:r>
+            <a:r>
+              <a:rPr i="1"/>
+              <a:t>Is</a:t>
+            </a:r>
+            <a:r>
+              <a:rPr/>
+              <a:t> a One-Sample Test — Same Numbers</a:t>
+            </a:r>
+          </a:p>
+        </p:txBody>
+      </p:sp>
+      <p:sp>
+        <p:nvSpPr>
+          <p:cNvPr id="3" name="Content Placeholder 2"/>
+          <p:cNvSpPr>
+            <a:spLocks noGrp="1"/>
+          </p:cNvSpPr>
+          <p:nvPr>
+            <p:ph idx="1" sz="half"/>
+          </p:nvPr>
+        </p:nvSpPr>
+        <p:spPr/>
+        <p:txBody>
+          <a:bodyPr/>
+          <a:lstStyle/>
+          <a:p>
+            <a:pPr lvl="0" indent="0" marL="0">
+              <a:buNone/>
+            </a:pPr>
+            <a:r>
+              <a:rPr/>
+              <a:t>Now throw away the pairing language entirely and run a plain </a:t>
+            </a:r>
+            <a:r>
+              <a:rPr b="1"/>
+              <a:t>one-sample t-test on those 4 differences, against μ = 0</a:t>
+            </a:r>
+            <a:r>
+              <a:rPr/>
+              <a:t>:</a:t>
+            </a:r>
+          </a:p>
+          <a:p>
+            <a:pPr lvl="0" indent="0">
+              <a:buNone/>
+            </a:pPr>
+            <a:r>
+              <a:rPr>
+                <a:solidFill>
+                  <a:srgbClr val="003B4F"/>
+                </a:solidFill>
+                <a:latin typeface="Courier"/>
+              </a:rPr>
+              <a:t>diff_model &lt;- </a:t>
+            </a:r>
+            <a:r>
+              <a:rPr>
+                <a:solidFill>
+                  <a:srgbClr val="4758AB"/>
+                </a:solidFill>
+                <a:latin typeface="Courier"/>
+              </a:rPr>
+              <a:t>t.test</a:t>
+            </a:r>
+            <a:r>
+              <a:rPr>
+                <a:solidFill>
+                  <a:srgbClr val="003B4F"/>
+                </a:solidFill>
+                <a:latin typeface="Courier"/>
+              </a:rPr>
+              <a:t>(diff_df</a:t>
+            </a:r>
+            <a:r>
+              <a:rPr>
+                <a:solidFill>
+                  <a:srgbClr val="5E5E5E"/>
+                </a:solidFill>
+                <a:latin typeface="Courier"/>
+              </a:rPr>
+              <a:t>$</a:t>
+            </a:r>
+            <a:r>
+              <a:rPr>
+                <a:solidFill>
+                  <a:srgbClr val="003B4F"/>
+                </a:solidFill>
+                <a:latin typeface="Courier"/>
+              </a:rPr>
+              <a:t>difference, </a:t>
+            </a:r>
+            <a:r>
+              <a:rPr>
+                <a:solidFill>
+                  <a:srgbClr val="657422"/>
+                </a:solidFill>
+                <a:latin typeface="Courier"/>
+              </a:rPr>
+              <a:t>mu =</a:t>
+            </a:r>
+            <a:r>
+              <a:rPr>
+                <a:solidFill>
+                  <a:srgbClr val="003B4F"/>
+                </a:solidFill>
+                <a:latin typeface="Courier"/>
+              </a:rPr>
+              <a:t> </a:t>
+            </a:r>
+            <a:r>
+              <a:rPr>
+                <a:solidFill>
+                  <a:srgbClr val="AD0000"/>
+                </a:solidFill>
+                <a:latin typeface="Courier"/>
+              </a:rPr>
+              <a:t>0</a:t>
+            </a:r>
+            <a:r>
+              <a:rPr>
+                <a:solidFill>
+                  <a:srgbClr val="003B4F"/>
+                </a:solidFill>
+                <a:latin typeface="Courier"/>
+              </a:rPr>
+              <a:t>)</a:t>
+            </a:r>
+            <a:br/>
+            <a:br/>
+            <a:r>
+              <a:rPr>
+                <a:solidFill>
+                  <a:srgbClr val="003B4F"/>
+                </a:solidFill>
+                <a:latin typeface="Courier"/>
+              </a:rPr>
+              <a:t>diff_model</a:t>
+            </a:r>
+          </a:p>
+          <a:p>
+            <a:pPr lvl="0" indent="0">
+              <a:buNone/>
+            </a:pPr>
+            <a:r>
+              <a:rPr>
+                <a:latin typeface="Courier"/>
+              </a:rPr>
+              <a:t>
+    One Sample t-test
+data:  diff_df$difference
+t = 2.7227, df = 3, p-value = 0.07238
+alternative hypothesis: true mean is not equal to 0
+95 percent confidence interval:
+ -0.1846147  2.3714897
+sample estimates:
+mean of x 
+ 1.093438 </a:t>
+            </a:r>
+          </a:p>
+        </p:txBody>
+      </p:sp>
+      <p:sp>
+        <p:nvSpPr>
+          <p:cNvPr id="4" name="Content Placeholder 3"/>
+          <p:cNvSpPr>
+            <a:spLocks noGrp="1"/>
+          </p:cNvSpPr>
+          <p:nvPr>
+            <p:ph idx="2" sz="half"/>
+          </p:nvPr>
+        </p:nvSpPr>
+        <p:spPr/>
+        <p:txBody>
+          <a:bodyPr/>
+          <a:lstStyle/>
+          <a:p>
+            <a:pPr lvl="0" indent="0" marL="1270000">
+              <a:buNone/>
+            </a:pPr>
+            <a:r>
+              <a:rPr sz="2000" b="1"/>
               <a:t>Important</a:t>
             </a:r>
           </a:p>
@@ -15613,44 +15543,59 @@
             </a:pPr>
             <a:r>
               <a:rPr sz="2000" b="1"/>
-              <a:t>Degrees of freedom — the one-line version</a:t>
-            </a:r>
-          </a:p>
-          <a:p>
-            <a:pPr lvl="0"/>
-            <a:r>
-              <a:rPr sz="2000"/>
-              <a:t>One-sample: </a:t>
+              <a:t>Identical. Same t, same df, same p.</a:t>
+            </a:r>
+          </a:p>
+          <a:p>
+            <a:pPr lvl="0" indent="0" marL="1270000">
+              <a:buNone/>
+            </a:pPr>
+            <a:r>
+              <a:rPr sz="2000">
+                <a:latin typeface="Courier"/>
+              </a:rPr>
+              <a:t>t.test(sunny, shady, paired = TRUE)</a:t>
+            </a:r>
+            <a:r>
+              <a:rPr sz="2000"/>
+              <a:t> and </a:t>
+            </a:r>
+            <a:r>
+              <a:rPr sz="2000">
+                <a:latin typeface="Courier"/>
+              </a:rPr>
+              <a:t>t.test(sunny - shady, mu = 0)</a:t>
+            </a:r>
+            <a:r>
+              <a:rPr sz="2000"/>
+              <a:t> are </a:t>
             </a:r>
             <a:r>
               <a:rPr sz="2000" b="1"/>
-              <a:t>n − 1</a:t>
-            </a:r>
-            <a:r>
-              <a:rPr sz="2000"/>
-              <a:t> = 3</a:t>
-            </a:r>
-          </a:p>
-          <a:p>
-            <a:pPr lvl="0"/>
-            <a:r>
-              <a:rPr sz="2000"/>
-              <a:t>Two-sample: </a:t>
-            </a:r>
-            <a:r>
-              <a:rPr sz="2000" b="1"/>
-              <a:t>n₁ + n₂ − 2</a:t>
-            </a:r>
-            <a:r>
-              <a:rPr sz="2000"/>
-              <a:t> = 6</a:t>
-            </a:r>
-          </a:p>
-          <a:p>
-            <a:pPr lvl="0"/>
-            <a:r>
-              <a:rPr sz="2000"/>
-              <a:t>Paired: </a:t>
+              <a:t>the same test</a:t>
+            </a:r>
+            <a:r>
+              <a:rPr sz="2000"/>
+              <a:t>. </a:t>
+            </a:r>
+            <a:r>
+              <a:rPr sz="2000">
+                <a:latin typeface="Courier"/>
+              </a:rPr>
+              <a:t>paired = TRUE</a:t>
+            </a:r>
+            <a:r>
+              <a:rPr sz="2000"/>
+              <a:t> is nothing more than a convenience that does the subtraction for you.</a:t>
+            </a:r>
+          </a:p>
+          <a:p>
+            <a:pPr lvl="0" indent="0" marL="1270000">
+              <a:buNone/>
+            </a:pPr>
+            <a:r>
+              <a:rPr sz="2000"/>
+              <a:t>That is why the paired df is </a:t>
             </a:r>
             <a:r>
               <a:rPr sz="2000" b="1"/>
@@ -15662,89 +15607,71 @@
             </a:r>
             <a:r>
               <a:rPr sz="2000" b="1"/>
-              <a:t> − 1</a:t>
-            </a:r>
-            <a:r>
-              <a:rPr sz="2000"/>
-              <a:t> = 3</a:t>
-            </a:r>
-          </a:p>
-          <a:p>
-            <a:pPr lvl="0"/>
-            <a:r>
-              <a:rPr sz="2000"/>
-              <a:t>Welch’s: fractional, ≤ n₁ + n₂ − 2 ≈ 5.66</a:t>
-            </a:r>
-          </a:p>
-          <a:p>
-            <a:pPr lvl="0" indent="0" marL="1270000">
-              <a:buNone/>
-            </a:pPr>
-            <a:r>
-              <a:rPr sz="2000"/>
-              <a:t>n is </a:t>
+              <a:t> − 1 = 3</a:t>
+            </a:r>
+            <a:r>
+              <a:rPr sz="2000"/>
+              <a:t> and not n₁ + n₂ − 2 = 6: once you subtract, you genuinely only have </a:t>
             </a:r>
             <a:r>
               <a:rPr sz="2000" b="1"/>
-              <a:t>trees</a:t>
-            </a:r>
-            <a:r>
-              <a:rPr sz="2000"/>
-              <a:t>, never needles. You lose one df per mean you estimate.</a:t>
-            </a:r>
-          </a:p>
-          <a:p>
-            <a:pPr lvl="0" indent="0" marL="1270000">
-              <a:buNone/>
-            </a:pPr>
-            <a:r>
-              <a:rPr sz="2000" b="1"/>
-              <a:t>Note</a:t>
-            </a:r>
-          </a:p>
-          <a:p>
-            <a:pPr lvl="0" indent="0" marL="1270000">
-              <a:buNone/>
-            </a:pPr>
-            <a:r>
-              <a:rPr sz="2000" b="1"/>
-              <a:t>Key takeaways</a:t>
-            </a:r>
-          </a:p>
-          <a:p>
-            <a:pPr lvl="0"/>
-            <a:r>
-              <a:rPr sz="2000"/>
-              <a:t>Always check assumptions before you test</a:t>
-            </a:r>
-          </a:p>
-          <a:p>
-            <a:pPr lvl="0"/>
-            <a:r>
-              <a:rPr sz="2000"/>
-              <a:t>Plot the data before you test</a:t>
-            </a:r>
-          </a:p>
-          <a:p>
-            <a:pPr lvl="0"/>
-            <a:r>
-              <a:rPr sz="2000"/>
-              <a:t>Match the test to the </a:t>
-            </a:r>
-            <a:r>
-              <a:rPr sz="2000" b="1"/>
-              <a:t>design</a:t>
-            </a:r>
-            <a:r>
-              <a:rPr sz="2000"/>
-              <a:t>, not to the p-value you want</a:t>
-            </a:r>
-          </a:p>
-          <a:p>
-            <a:pPr lvl="0"/>
-            <a:r>
-              <a:rPr sz="2000"/>
-              <a:t>Non-parametric alternatives are coming up next</a:t>
+              <a:t>four numbers</a:t>
+            </a:r>
+            <a:r>
+              <a:rPr sz="2000"/>
+              <a:t>. A one-sample test on four numbers has 3 df. Always.</a:t>
+            </a:r>
+          </a:p>
+        </p:txBody>
+      </p:sp>
+    </p:spTree>
+  </p:cSld>
+</p:sld>
+</file>
+
+<file path=ppt/slides/slide49.xml><?xml version="1.0" encoding="utf-8"?>
+<p:sld xmlns:a="http://schemas.openxmlformats.org/drawingml/2006/main" xmlns:r="http://schemas.openxmlformats.org/officeDocument/2006/relationships" xmlns:p="http://schemas.openxmlformats.org/presentationml/2006/main">
+  <p:cSld>
+    <p:spTree>
+      <p:nvGrpSpPr>
+        <p:cNvPr id="1" name=""/>
+        <p:cNvGrpSpPr/>
+        <p:nvPr/>
+      </p:nvGrpSpPr>
+      <p:grpSpPr>
+        <a:xfrm>
+          <a:off x="0" y="0"/>
+          <a:ext cx="0" cy="0"/>
+          <a:chOff x="0" y="0"/>
+          <a:chExt cx="0" cy="0"/>
+        </a:xfrm>
+      </p:grpSpPr>
+      <p:sp>
+        <p:nvSpPr>
+          <p:cNvPr id="2" name="Title 1"/>
+          <p:cNvSpPr>
+            <a:spLocks noGrp="1"/>
+          </p:cNvSpPr>
+          <p:nvPr>
+            <p:ph type="title"/>
+          </p:nvPr>
+        </p:nvSpPr>
+        <p:spPr>
+          <a:xfrm>
+            <a:off x="0" y="0"/>
+            <a:ext cx="9144000" cy="582780"/>
+          </a:xfrm>
+        </p:spPr>
+        <p:txBody>
+          <a:bodyPr/>
+          <a:lstStyle/>
+          <a:p>
+            <a:pPr lvl="0" indent="0" marL="0">
+              <a:buNone/>
+            </a:pPr>
+            <a:r>
+              <a:rPr/>
+              <a:t>Part 7 · Assumptions and Wrap-Up</a:t>
             </a:r>
           </a:p>
         </p:txBody>
@@ -16249,6 +16176,538 @@
             <a:r>
               <a:rPr sz="2000"/>
               <a:t> nudges them sideways so you can see how many there are.</a:t>
+            </a:r>
+          </a:p>
+        </p:txBody>
+      </p:sp>
+    </p:spTree>
+  </p:cSld>
+</p:sld>
+</file>
+
+<file path=ppt/slides/slide50.xml><?xml version="1.0" encoding="utf-8"?>
+<p:sld xmlns:a="http://schemas.openxmlformats.org/drawingml/2006/main" xmlns:r="http://schemas.openxmlformats.org/officeDocument/2006/relationships" xmlns:p="http://schemas.openxmlformats.org/presentationml/2006/main">
+  <p:cSld>
+    <p:spTree>
+      <p:nvGrpSpPr>
+        <p:cNvPr id="1" name=""/>
+        <p:cNvGrpSpPr/>
+        <p:nvPr/>
+      </p:nvGrpSpPr>
+      <p:grpSpPr>
+        <a:xfrm>
+          <a:off x="0" y="0"/>
+          <a:ext cx="0" cy="0"/>
+          <a:chOff x="0" y="0"/>
+          <a:chExt cx="0" cy="0"/>
+        </a:xfrm>
+      </p:grpSpPr>
+      <p:sp>
+        <p:nvSpPr>
+          <p:cNvPr id="2" name="Title 1"/>
+          <p:cNvSpPr>
+            <a:spLocks noGrp="1"/>
+          </p:cNvSpPr>
+          <p:nvPr>
+            <p:ph type="title"/>
+          </p:nvPr>
+        </p:nvSpPr>
+        <p:spPr>
+          <a:xfrm>
+            <a:off x="0" y="0"/>
+            <a:ext cx="9144000" cy="602780"/>
+          </a:xfrm>
+          <a:solidFill>
+            <a:srgbClr val="70121D"/>
+          </a:solidFill>
+        </p:spPr>
+        <p:txBody>
+          <a:bodyPr/>
+          <a:lstStyle/>
+          <a:p>
+            <a:pPr lvl="0" indent="0" marL="0">
+              <a:buNone/>
+            </a:pPr>
+            <a:r>
+              <a:rPr/>
+              <a:t>Assumptions of Parametric Tests</a:t>
+            </a:r>
+          </a:p>
+        </p:txBody>
+      </p:sp>
+      <p:sp>
+        <p:nvSpPr>
+          <p:cNvPr id="3" name="Content Placeholder 2"/>
+          <p:cNvSpPr>
+            <a:spLocks noGrp="1"/>
+          </p:cNvSpPr>
+          <p:nvPr>
+            <p:ph idx="1" sz="half"/>
+          </p:nvPr>
+        </p:nvSpPr>
+        <p:spPr/>
+        <p:txBody>
+          <a:bodyPr/>
+          <a:lstStyle/>
+          <a:p>
+            <a:pPr lvl="0" indent="0" marL="0">
+              <a:buNone/>
+            </a:pPr>
+            <a:r>
+              <a:rPr b="1"/>
+              <a:t>Common assumptions for t-tests:</a:t>
+            </a:r>
+          </a:p>
+          <a:p>
+            <a:pPr lvl="0" indent="-342900" marL="342900">
+              <a:buAutoNum type="arabicPeriod"/>
+            </a:pPr>
+            <a:r>
+              <a:rPr b="1"/>
+              <a:t>Normality</a:t>
+            </a:r>
+            <a:r>
+              <a:rPr/>
+              <a:t> — the data (or, for a paired test, the </a:t>
+            </a:r>
+            <a:r>
+              <a:rPr b="1"/>
+              <a:t>differences</a:t>
+            </a:r>
+            <a:r>
+              <a:rPr/>
+              <a:t>) come from a normally distributed population</a:t>
+            </a:r>
+          </a:p>
+          <a:p>
+            <a:pPr lvl="0" indent="-342900" marL="342900">
+              <a:buAutoNum type="arabicPeriod"/>
+            </a:pPr>
+            <a:r>
+              <a:rPr b="1"/>
+              <a:t>Equal variances</a:t>
+            </a:r>
+            <a:r>
+              <a:rPr/>
+              <a:t> — two-sample tests only</a:t>
+            </a:r>
+          </a:p>
+          <a:p>
+            <a:pPr lvl="0" indent="-342900" marL="342900">
+              <a:buAutoNum type="arabicPeriod"/>
+            </a:pPr>
+            <a:r>
+              <a:rPr b="1"/>
+              <a:t>Independence</a:t>
+            </a:r>
+            <a:r>
+              <a:rPr/>
+              <a:t> — observations are independent</a:t>
+            </a:r>
+          </a:p>
+          <a:p>
+            <a:pPr lvl="0" indent="-342900" marL="342900">
+              <a:buAutoNum type="arabicPeriod"/>
+            </a:pPr>
+            <a:r>
+              <a:rPr b="1"/>
+              <a:t>No outliers</a:t>
+            </a:r>
+            <a:r>
+              <a:rPr/>
+              <a:t> — extreme values can dominate a small sample</a:t>
+            </a:r>
+          </a:p>
+          <a:p>
+            <a:pPr lvl="0" indent="0" marL="0">
+              <a:buNone/>
+            </a:pPr>
+            <a:r>
+              <a:rPr/>
+              <a:t>What do we do if our data violate these?</a:t>
+            </a:r>
+          </a:p>
+        </p:txBody>
+      </p:sp>
+      <p:sp>
+        <p:nvSpPr>
+          <p:cNvPr id="4" name="Content Placeholder 3"/>
+          <p:cNvSpPr>
+            <a:spLocks noGrp="1"/>
+          </p:cNvSpPr>
+          <p:nvPr>
+            <p:ph idx="2" sz="half"/>
+          </p:nvPr>
+        </p:nvSpPr>
+        <p:spPr/>
+        <p:txBody>
+          <a:bodyPr/>
+          <a:lstStyle/>
+          <a:p>
+            <a:pPr lvl="0" indent="0" marL="0">
+              <a:buNone/>
+            </a:pPr>
+            <a:r>
+              <a:rPr b="1"/>
+              <a:t>Alternatives when assumptions are violated:</a:t>
+            </a:r>
+          </a:p>
+          <a:p>
+            <a:pPr lvl="0"/>
+            <a:r>
+              <a:rPr/>
+              <a:t>Data transformation (log, square root)</a:t>
+            </a:r>
+          </a:p>
+          <a:p>
+            <a:pPr lvl="0"/>
+            <a:r>
+              <a:rPr/>
+              <a:t>Non-parametric tests — Mann-Whitney U for two samples, Wilcoxon signed-rank for paired</a:t>
+            </a:r>
+          </a:p>
+          <a:p>
+            <a:pPr lvl="0"/>
+            <a:r>
+              <a:rPr/>
+              <a:t>Robust methods</a:t>
+            </a:r>
+          </a:p>
+          <a:p>
+            <a:pPr lvl="0" indent="0" marL="1270000">
+              <a:buNone/>
+            </a:pPr>
+            <a:r>
+              <a:rPr sz="2000" b="1"/>
+              <a:t>Tip</a:t>
+            </a:r>
+          </a:p>
+          <a:p>
+            <a:pPr lvl="0" indent="0" marL="1270000">
+              <a:buNone/>
+            </a:pPr>
+            <a:r>
+              <a:rPr sz="2000" b="1"/>
+              <a:t>🖐 Note the paired case</a:t>
+            </a:r>
+          </a:p>
+          <a:p>
+            <a:pPr lvl="0" indent="0" marL="1270000">
+              <a:buNone/>
+            </a:pPr>
+            <a:r>
+              <a:rPr sz="2000"/>
+              <a:t>You check normality of the </a:t>
+            </a:r>
+            <a:r>
+              <a:rPr sz="2000" b="1"/>
+              <a:t>differences</a:t>
+            </a:r>
+            <a:r>
+              <a:rPr sz="2000"/>
+              <a:t>, not of the two groups. Which follows directly from the last slide — the differences </a:t>
+            </a:r>
+            <a:r>
+              <a:rPr sz="2000" i="1"/>
+              <a:t>are</a:t>
+            </a:r>
+            <a:r>
+              <a:rPr sz="2000"/>
+              <a:t> the data.</a:t>
+            </a:r>
+          </a:p>
+        </p:txBody>
+      </p:sp>
+    </p:spTree>
+  </p:cSld>
+</p:sld>
+</file>
+
+<file path=ppt/slides/slide51.xml><?xml version="1.0" encoding="utf-8"?>
+<p:sld xmlns:a="http://schemas.openxmlformats.org/drawingml/2006/main" xmlns:r="http://schemas.openxmlformats.org/officeDocument/2006/relationships" xmlns:p="http://schemas.openxmlformats.org/presentationml/2006/main">
+  <p:cSld>
+    <p:spTree>
+      <p:nvGrpSpPr>
+        <p:cNvPr id="1" name=""/>
+        <p:cNvGrpSpPr/>
+        <p:nvPr/>
+      </p:nvGrpSpPr>
+      <p:grpSpPr>
+        <a:xfrm>
+          <a:off x="0" y="0"/>
+          <a:ext cx="0" cy="0"/>
+          <a:chOff x="0" y="0"/>
+          <a:chExt cx="0" cy="0"/>
+        </a:xfrm>
+      </p:grpSpPr>
+      <p:sp>
+        <p:nvSpPr>
+          <p:cNvPr id="2" name="Title 1"/>
+          <p:cNvSpPr>
+            <a:spLocks noGrp="1"/>
+          </p:cNvSpPr>
+          <p:nvPr>
+            <p:ph type="title"/>
+          </p:nvPr>
+        </p:nvSpPr>
+        <p:spPr>
+          <a:xfrm>
+            <a:off x="0" y="0"/>
+            <a:ext cx="9144000" cy="602780"/>
+          </a:xfrm>
+          <a:solidFill>
+            <a:srgbClr val="70121D"/>
+          </a:solidFill>
+        </p:spPr>
+        <p:txBody>
+          <a:bodyPr/>
+          <a:lstStyle/>
+          <a:p>
+            <a:pPr lvl="0" indent="0" marL="0">
+              <a:buNone/>
+            </a:pPr>
+            <a:r>
+              <a:rPr/>
+              <a:t>Summary and Conclusions</a:t>
+            </a:r>
+          </a:p>
+        </p:txBody>
+      </p:sp>
+      <p:sp>
+        <p:nvSpPr>
+          <p:cNvPr id="3" name="Content Placeholder 2"/>
+          <p:cNvSpPr>
+            <a:spLocks noGrp="1"/>
+          </p:cNvSpPr>
+          <p:nvPr>
+            <p:ph idx="1" sz="half"/>
+          </p:nvPr>
+        </p:nvSpPr>
+        <p:spPr/>
+        <p:txBody>
+          <a:bodyPr/>
+          <a:lstStyle/>
+          <a:p>
+            <a:pPr lvl="0" indent="0" marL="0">
+              <a:buNone/>
+            </a:pPr>
+            <a:r>
+              <a:rPr/>
+              <a:t>In this lecture we:</a:t>
+            </a:r>
+          </a:p>
+          <a:p>
+            <a:pPr lvl="0" indent="-342900" marL="342900">
+              <a:buAutoNum type="arabicPeriod"/>
+            </a:pPr>
+            <a:r>
+              <a:rPr/>
+              <a:t>Went from question → prediction → H₀ / Hₐ → α, before looking at output</a:t>
+            </a:r>
+          </a:p>
+          <a:p>
+            <a:pPr lvl="0" indent="-342900" marL="342900">
+              <a:buAutoNum type="arabicPeriod"/>
+            </a:pPr>
+            <a:r>
+              <a:rPr/>
+              <a:t>Tested assumptions — QQ plot, Shapiro-Wilk, Levene’s</a:t>
+            </a:r>
+          </a:p>
+          <a:p>
+            <a:pPr lvl="0" indent="-342900" marL="342900">
+              <a:buAutoNum type="arabicPeriod"/>
+            </a:pPr>
+            <a:r>
+              <a:rPr/>
+              <a:t>Ran one-sample (two- and one-tailed), two-sample (Student’s and Welch’s), and paired t-tests</a:t>
+            </a:r>
+          </a:p>
+          <a:p>
+            <a:pPr lvl="0" indent="-342900" marL="342900">
+              <a:buAutoNum type="arabicPeriod"/>
+            </a:pPr>
+            <a:r>
+              <a:rPr/>
+              <a:t>Saw that a paired test is a one-sample test on the differences</a:t>
+            </a:r>
+          </a:p>
+          <a:p>
+            <a:pPr lvl="0" indent="-342900" marL="342900">
+              <a:buAutoNum type="arabicPeriod"/>
+            </a:pPr>
+            <a:r>
+              <a:rPr/>
+              <a:t>Learned to read and report </a:t>
+            </a:r>
+            <a:r>
+              <a:rPr b="1"/>
+              <a:t>t(df) = …, p = …</a:t>
+            </a:r>
+          </a:p>
+        </p:txBody>
+      </p:sp>
+      <p:sp>
+        <p:nvSpPr>
+          <p:cNvPr id="4" name="Content Placeholder 3"/>
+          <p:cNvSpPr>
+            <a:spLocks noGrp="1"/>
+          </p:cNvSpPr>
+          <p:nvPr>
+            <p:ph idx="2" sz="half"/>
+          </p:nvPr>
+        </p:nvSpPr>
+        <p:spPr/>
+        <p:txBody>
+          <a:bodyPr/>
+          <a:lstStyle/>
+          <a:p>
+            <a:pPr lvl="0" indent="0" marL="1270000">
+              <a:buNone/>
+            </a:pPr>
+            <a:r>
+              <a:rPr sz="2000" b="1"/>
+              <a:t>Important</a:t>
+            </a:r>
+          </a:p>
+          <a:p>
+            <a:pPr lvl="0" indent="0" marL="1270000">
+              <a:buNone/>
+            </a:pPr>
+            <a:r>
+              <a:rPr sz="2000" b="1"/>
+              <a:t>Degrees of freedom — the one-line version</a:t>
+            </a:r>
+          </a:p>
+          <a:p>
+            <a:pPr lvl="0"/>
+            <a:r>
+              <a:rPr sz="2000"/>
+              <a:t>One-sample: </a:t>
+            </a:r>
+            <a:r>
+              <a:rPr sz="2000" b="1"/>
+              <a:t>n − 1</a:t>
+            </a:r>
+            <a:r>
+              <a:rPr sz="2000"/>
+              <a:t> = 3</a:t>
+            </a:r>
+          </a:p>
+          <a:p>
+            <a:pPr lvl="0"/>
+            <a:r>
+              <a:rPr sz="2000"/>
+              <a:t>Two-sample: </a:t>
+            </a:r>
+            <a:r>
+              <a:rPr sz="2000" b="1"/>
+              <a:t>n₁ + n₂ − 2</a:t>
+            </a:r>
+            <a:r>
+              <a:rPr sz="2000"/>
+              <a:t> = 6</a:t>
+            </a:r>
+          </a:p>
+          <a:p>
+            <a:pPr lvl="0"/>
+            <a:r>
+              <a:rPr sz="2000"/>
+              <a:t>Paired: </a:t>
+            </a:r>
+            <a:r>
+              <a:rPr sz="2000" b="1"/>
+              <a:t>n</a:t>
+            </a:r>
+            <a:r>
+              <a:rPr sz="2000" b="1" baseline="-25000"/>
+              <a:t>pairs</a:t>
+            </a:r>
+            <a:r>
+              <a:rPr sz="2000" b="1"/>
+              <a:t> − 1</a:t>
+            </a:r>
+            <a:r>
+              <a:rPr sz="2000"/>
+              <a:t> = 3</a:t>
+            </a:r>
+          </a:p>
+          <a:p>
+            <a:pPr lvl="0"/>
+            <a:r>
+              <a:rPr sz="2000"/>
+              <a:t>Welch’s: fractional, ≤ n₁ + n₂ − 2 ≈ 5.66</a:t>
+            </a:r>
+          </a:p>
+          <a:p>
+            <a:pPr lvl="0" indent="0" marL="1270000">
+              <a:buNone/>
+            </a:pPr>
+            <a:r>
+              <a:rPr sz="2000"/>
+              <a:t>n is </a:t>
+            </a:r>
+            <a:r>
+              <a:rPr sz="2000" b="1"/>
+              <a:t>trees</a:t>
+            </a:r>
+            <a:r>
+              <a:rPr sz="2000"/>
+              <a:t>, never needles. You lose one df per mean you estimate.</a:t>
+            </a:r>
+          </a:p>
+          <a:p>
+            <a:pPr lvl="0" indent="0" marL="1270000">
+              <a:buNone/>
+            </a:pPr>
+            <a:r>
+              <a:rPr sz="2000" b="1"/>
+              <a:t>Note</a:t>
+            </a:r>
+          </a:p>
+          <a:p>
+            <a:pPr lvl="0" indent="0" marL="1270000">
+              <a:buNone/>
+            </a:pPr>
+            <a:r>
+              <a:rPr sz="2000" b="1"/>
+              <a:t>Key takeaways</a:t>
+            </a:r>
+          </a:p>
+          <a:p>
+            <a:pPr lvl="0"/>
+            <a:r>
+              <a:rPr sz="2000"/>
+              <a:t>Always check assumptions before you test</a:t>
+            </a:r>
+          </a:p>
+          <a:p>
+            <a:pPr lvl="0"/>
+            <a:r>
+              <a:rPr sz="2000"/>
+              <a:t>Plot the data before you test</a:t>
+            </a:r>
+          </a:p>
+          <a:p>
+            <a:pPr lvl="0"/>
+            <a:r>
+              <a:rPr sz="2000"/>
+              <a:t>Match the test to the </a:t>
+            </a:r>
+            <a:r>
+              <a:rPr sz="2000" b="1"/>
+              <a:t>design</a:t>
+            </a:r>
+            <a:r>
+              <a:rPr sz="2000"/>
+              <a:t>, not to the p-value you want</a:t>
+            </a:r>
+          </a:p>
+          <a:p>
+            <a:pPr lvl="0"/>
+            <a:r>
+              <a:rPr sz="2000"/>
+              <a:t>Non-parametric alternatives are coming up next</a:t>
             </a:r>
           </a:p>
         </p:txBody>
